--- a/docs/vzp_segmentace/slides.pptx
+++ b/docs/vzp_segmentace/slides.pptx
@@ -19,9 +19,11 @@
     <p:sldId id="267" r:id="rId13"/>
     <p:sldId id="268" r:id="rId14"/>
     <p:sldId id="269" r:id="rId15"/>
+    <p:sldId id="270" r:id="rId16"/>
+    <p:sldId id="271" r:id="rId17"/>
   </p:sldIdLst>
   <p:notesMasterIdLst>
-    <p:notesMasterId r:id="rId16"/>
+    <p:notesMasterId r:id="rId18"/>
   </p:notesMasterIdLst>
   <p:sldSz cx="12192000" cy="6858000"/>
   <p:notesSz cx="6858000" cy="12192000"/>
@@ -120,46 +122,48 @@
   <p:extLst>
     <p:ext uri="{521415D9-36F7-43E2-AB2F-B90AF26B5E84}">
       <p14:sectionLst xmlns:p14="http://schemas.microsoft.com/office/powerpoint/2010/main">
-        <p14:section name="Úvod" id="{0208bed4-9503-f599-db88-0763cf06f387}">
+        <p14:section name="Úvod" id="{e8aeb38b-11c5-632c-835b-0b9006c806b2}">
           <p14:sldIdLst>
             <p14:sldId id="256"/>
             <p14:sldId id="257"/>
           </p14:sldIdLst>
         </p14:section>
-        <p14:section name="Segmentační model" id="{2fb07449-22f3-5cfe-cd1a-a155d7cf607e}">
+        <p14:section name="Segmentační model" id="{0d9ea92d-cb5a-623b-6257-349f85356049}">
           <p14:sldIdLst>
             <p14:sldId id="258"/>
             <p14:sldId id="259"/>
+            <p14:sldId id="260"/>
           </p14:sldIdLst>
         </p14:section>
-        <p14:section name="Kde jsou nepřišlé ženy" id="{2246ef65-b572-a880-291b-7e3b5071c323}">
+        <p14:section name="Kde jsou nepřišlé ženy" id="{93d69d11-9973-3019-94d2-56f26d8bd6d9}">
           <p14:sldIdLst>
-            <p14:sldId id="260"/>
             <p14:sldId id="261"/>
+            <p14:sldId id="262"/>
           </p14:sldIdLst>
         </p14:section>
-        <p14:section name="Přechody mezi segmenty" id="{331f06b0-0bc0-efa9-659f-5961bba763f7}">
+        <p14:section name="Přechody mezi segmenty" id="{2508e8a8-9804-ecd2-caf6-3ac23c2c913a}">
           <p14:sldIdLst>
-            <p14:sldId id="262"/>
             <p14:sldId id="263"/>
             <p14:sldId id="264"/>
+            <p14:sldId id="265"/>
           </p14:sldIdLst>
         </p14:section>
-        <p14:section name="Zjištění" id="{5b132044-ac9a-cb5d-6537-8c8077758772}">
+        <p14:section name="Zjištění" id="{a0be8e5a-5393-b7a9-10c4-a6bfd7c22c39}">
           <p14:sldIdLst>
-            <p14:sldId id="265"/>
             <p14:sldId id="266"/>
+            <p14:sldId id="267"/>
           </p14:sldIdLst>
         </p14:section>
-        <p14:section name="Experimenty" id="{20ee95e7-d7ba-928f-02a9-9e39a3066f31}">
+        <p14:section name="Experimenty" id="{8c9da344-e791-8c1e-2868-0715419794ef}">
           <p14:sldIdLst>
-            <p14:sldId id="267"/>
             <p14:sldId id="268"/>
+            <p14:sldId id="269"/>
+            <p14:sldId id="270"/>
           </p14:sldIdLst>
         </p14:section>
-        <p14:section name="Omezení" id="{3fbb47d3-a26d-b62e-cb4f-bdc7ada7dcea}">
+        <p14:section name="Omezení" id="{72190a5b-de85-25e2-0748-27021c7d180d}">
           <p14:sldIdLst>
-            <p14:sldId id="269"/>
+            <p14:sldId id="271"/>
           </p14:sldIdLst>
         </p14:section>
       </p14:sectionLst>
@@ -1030,6 +1034,182 @@
             <a:fld id="{F7021451-1387-4CA6-816F-3879F97B5CBC}" type="slidenum">
               <a:rPr lang="en-US"/>
               <a:t>14</a:t>
+            </a:fld>
+            <a:endParaRPr lang="en-US"/>
+          </a:p>
+        </p:txBody>
+      </p:sp>
+    </p:spTree>
+    <p:extLst>
+      <p:ext uri="{BB962C8B-B14F-4D97-AF65-F5344CB8AC3E}">
+        <p14:creationId xmlns:p14="http://schemas.microsoft.com/office/powerpoint/2010/main" val="1024086991"/>
+      </p:ext>
+    </p:extLst>
+  </p:cSld>
+  <p:clrMapOvr>
+    <a:masterClrMapping/>
+  </p:clrMapOvr>
+</p:notes>
+</file>
+
+<file path=ppt/notesSlides/notesSlide15.xml><?xml version="1.0" encoding="utf-8"?>
+<p:notes xmlns:a="http://schemas.openxmlformats.org/drawingml/2006/main" xmlns:r="http://schemas.openxmlformats.org/officeDocument/2006/relationships" xmlns:p="http://schemas.openxmlformats.org/presentationml/2006/main">
+  <p:cSld>
+    <p:spTree>
+      <p:nvGrpSpPr>
+        <p:cNvPr id="1" name=""/>
+        <p:cNvGrpSpPr/>
+        <p:nvPr/>
+      </p:nvGrpSpPr>
+      <p:grpSpPr>
+        <a:xfrm>
+          <a:off x="0" y="0"/>
+          <a:ext cx="0" cy="0"/>
+          <a:chOff x="0" y="0"/>
+          <a:chExt cx="0" cy="0"/>
+        </a:xfrm>
+      </p:grpSpPr>
+      <p:sp>
+        <p:nvSpPr>
+          <p:cNvPr id="2" name="Slide Image Placeholder 1"/>
+          <p:cNvSpPr>
+            <a:spLocks noGrp="1" noRot="1" noChangeAspect="1"/>
+          </p:cNvSpPr>
+          <p:nvPr>
+            <p:ph type="sldImg"/>
+          </p:nvPr>
+        </p:nvSpPr>
+        <p:spPr/>
+      </p:sp>
+      <p:sp>
+        <p:nvSpPr>
+          <p:cNvPr id="3" name="Notes Placeholder 2"/>
+          <p:cNvSpPr>
+            <a:spLocks noGrp="1"/>
+          </p:cNvSpPr>
+          <p:nvPr>
+            <p:ph type="body" idx="1"/>
+          </p:nvPr>
+        </p:nvSpPr>
+        <p:spPr/>
+        <p:txBody>
+          <a:bodyPr/>
+          <a:lstStyle/>
+          <a:p>
+            <a:r>
+              <a:rPr lang="en-US" dirty="0"/>
+              <a:t/>
+            </a:r>
+            <a:endParaRPr lang="en-US" dirty="0"/>
+          </a:p>
+        </p:txBody>
+      </p:sp>
+      <p:sp>
+        <p:nvSpPr>
+          <p:cNvPr id="4" name="Slide Number Placeholder 3"/>
+          <p:cNvSpPr>
+            <a:spLocks noGrp="1"/>
+          </p:cNvSpPr>
+          <p:nvPr>
+            <p:ph type="sldNum" sz="quarter" idx="10"/>
+          </p:nvPr>
+        </p:nvSpPr>
+        <p:spPr/>
+        <p:txBody>
+          <a:bodyPr/>
+          <a:lstStyle/>
+          <a:p>
+            <a:fld id="{F7021451-1387-4CA6-816F-3879F97B5CBC}" type="slidenum">
+              <a:rPr lang="en-US"/>
+              <a:t>15</a:t>
+            </a:fld>
+            <a:endParaRPr lang="en-US"/>
+          </a:p>
+        </p:txBody>
+      </p:sp>
+    </p:spTree>
+    <p:extLst>
+      <p:ext uri="{BB962C8B-B14F-4D97-AF65-F5344CB8AC3E}">
+        <p14:creationId xmlns:p14="http://schemas.microsoft.com/office/powerpoint/2010/main" val="1024086991"/>
+      </p:ext>
+    </p:extLst>
+  </p:cSld>
+  <p:clrMapOvr>
+    <a:masterClrMapping/>
+  </p:clrMapOvr>
+</p:notes>
+</file>
+
+<file path=ppt/notesSlides/notesSlide16.xml><?xml version="1.0" encoding="utf-8"?>
+<p:notes xmlns:a="http://schemas.openxmlformats.org/drawingml/2006/main" xmlns:r="http://schemas.openxmlformats.org/officeDocument/2006/relationships" xmlns:p="http://schemas.openxmlformats.org/presentationml/2006/main">
+  <p:cSld>
+    <p:spTree>
+      <p:nvGrpSpPr>
+        <p:cNvPr id="1" name=""/>
+        <p:cNvGrpSpPr/>
+        <p:nvPr/>
+      </p:nvGrpSpPr>
+      <p:grpSpPr>
+        <a:xfrm>
+          <a:off x="0" y="0"/>
+          <a:ext cx="0" cy="0"/>
+          <a:chOff x="0" y="0"/>
+          <a:chExt cx="0" cy="0"/>
+        </a:xfrm>
+      </p:grpSpPr>
+      <p:sp>
+        <p:nvSpPr>
+          <p:cNvPr id="2" name="Slide Image Placeholder 1"/>
+          <p:cNvSpPr>
+            <a:spLocks noGrp="1" noRot="1" noChangeAspect="1"/>
+          </p:cNvSpPr>
+          <p:nvPr>
+            <p:ph type="sldImg"/>
+          </p:nvPr>
+        </p:nvSpPr>
+        <p:spPr/>
+      </p:sp>
+      <p:sp>
+        <p:nvSpPr>
+          <p:cNvPr id="3" name="Notes Placeholder 2"/>
+          <p:cNvSpPr>
+            <a:spLocks noGrp="1"/>
+          </p:cNvSpPr>
+          <p:nvPr>
+            <p:ph type="body" idx="1"/>
+          </p:nvPr>
+        </p:nvSpPr>
+        <p:spPr/>
+        <p:txBody>
+          <a:bodyPr/>
+          <a:lstStyle/>
+          <a:p>
+            <a:r>
+              <a:rPr lang="en-US" dirty="0"/>
+              <a:t/>
+            </a:r>
+            <a:endParaRPr lang="en-US" dirty="0"/>
+          </a:p>
+        </p:txBody>
+      </p:sp>
+      <p:sp>
+        <p:nvSpPr>
+          <p:cNvPr id="4" name="Slide Number Placeholder 3"/>
+          <p:cNvSpPr>
+            <a:spLocks noGrp="1"/>
+          </p:cNvSpPr>
+          <p:nvPr>
+            <p:ph type="sldNum" sz="quarter" idx="10"/>
+          </p:nvPr>
+        </p:nvSpPr>
+        <p:spPr/>
+        <p:txBody>
+          <a:bodyPr/>
+          <a:lstStyle/>
+          <a:p>
+            <a:fld id="{F7021451-1387-4CA6-816F-3879F97B5CBC}" type="slidenum">
+              <a:rPr lang="en-US"/>
+              <a:t>16</a:t>
             </a:fld>
             <a:endParaRPr lang="en-US"/>
           </a:p>
@@ -2705,26 +2885,50 @@
                   <a:schemeClr val="accent1"/>
                 </a:solidFill>
               </a:rPr>
-              <a:t>Hlavní zjištění (1/2)</a:t>
+              <a:t>Hlavní tok: pět největších segmentů</a:t>
             </a:r>
             <a:endParaRPr lang="en-US" sz="3000" dirty="0"/>
           </a:p>
         </p:txBody>
       </p:sp>
-      <p:sp>
-        <p:nvSpPr>
-          <p:cNvPr id="3" name="zjisteni_1"/>
-          <p:cNvSpPr/>
+      <p:pic>
+        <p:nvPicPr>
+          <p:cNvPr id="3" name="graf_prechodu_top5.png" descr="C:\Users\vittu\src\mamograf-vzp\docs\vzp_segmentace\graf_prechodu_top5.png">    </p:cNvPr>
+          <p:cNvPicPr>
+            <a:picLocks noChangeAspect="1"/>
+          </p:cNvPicPr>
           <p:nvPr/>
-        </p:nvSpPr>
+        </p:nvPicPr>
+        <p:blipFill>
+          <a:blip r:embed="rId1"/>
+          <a:stretch>
+            <a:fillRect/>
+          </a:stretch>
+        </p:blipFill>
         <p:spPr>
           <a:xfrm>
             <a:off x="548640" y="1234440"/>
-            <a:ext cx="5410048" cy="2331720"/>
+            <a:ext cx="7677642" cy="5166360"/>
+          </a:xfrm>
+          <a:prstGeom prst="rect">
+            <a:avLst/>
+          </a:prstGeom>
+        </p:spPr>
+      </p:pic>
+      <p:sp>
+        <p:nvSpPr>
+          <p:cNvPr id="4" name="karta_tok"/>
+          <p:cNvSpPr/>
+          <p:nvPr/>
+        </p:nvSpPr>
+        <p:spPr>
+          <a:xfrm>
+            <a:off x="8546322" y="1234440"/>
+            <a:ext cx="3096733" cy="2377440"/>
           </a:xfrm>
           <a:prstGeom prst="roundRect">
             <a:avLst>
-              <a:gd name="adj" fmla="val 3137"/>
+              <a:gd name="adj" fmla="val 3077"/>
             </a:avLst>
           </a:prstGeom>
           <a:solidFill>
@@ -2735,34 +2939,90 @@
       </p:sp>
       <p:sp>
         <p:nvSpPr>
-          <p:cNvPr id="4" name="cislo_1"/>
-          <p:cNvSpPr/>
+          <p:cNvPr id="5" name="karta_tok_text"/>
+          <p:cNvSpPr txBox="1"/>
           <p:nvPr/>
         </p:nvSpPr>
         <p:spPr>
           <a:xfrm>
-            <a:off x="777240" y="1463040"/>
-            <a:ext cx="548640" cy="548640"/>
+            <a:off x="8729202" y="1417320"/>
+            <a:ext cx="2730973" cy="2011680"/>
           </a:xfrm>
-          <a:prstGeom prst="ellipse">
+          <a:prstGeom prst="rect">
             <a:avLst/>
           </a:prstGeom>
-          <a:solidFill>
-            <a:schemeClr val="accent1"/>
-          </a:solidFill>
+          <a:noFill/>
           <a:ln/>
         </p:spPr>
-      </p:sp>
-      <p:sp>
-        <p:nvSpPr>
-          <p:cNvPr id="5" name="Text 3"/>
+        <p:txBody>
+          <a:bodyPr wrap="square" lIns="0" tIns="0" rIns="0" bIns="0" rtlCol="0" anchor="t"/>
+          <a:lstStyle/>
+          <a:p>
+            <a:pPr indent="0" marL="0">
+              <a:buNone/>
+            </a:pPr>
+            <a:r>
+              <a:rPr lang="en-US" sz="1600" b="1" dirty="0">
+                <a:solidFill>
+                  <a:schemeClr val="tx1"/>
+                </a:solidFill>
+              </a:rPr>
+              <a:t>1. pozvánka</a:t>
+            </a:r>
+            <a:r>
+              <a:rPr lang="en-US" sz="1600" dirty="0">
+                <a:solidFill>
+                  <a:schemeClr val="tx1"/>
+                </a:solidFill>
+              </a:rPr>
+              <a:t> (57 % přijde) → </a:t>
+            </a:r>
+            <a:r>
+              <a:rPr lang="en-US" sz="1600" b="1" dirty="0">
+                <a:solidFill>
+                  <a:schemeClr val="tx1"/>
+                </a:solidFill>
+              </a:rPr>
+              <a:t>gynekolog / jiná prevence, zvaná málokrát</a:t>
+            </a:r>
+            <a:r>
+              <a:rPr lang="en-US" sz="1600" dirty="0">
+                <a:solidFill>
+                  <a:schemeClr val="tx1"/>
+                </a:solidFill>
+              </a:rPr>
+              <a:t> (26 % / 12 %) → </a:t>
+            </a:r>
+            <a:r>
+              <a:rPr lang="en-US" sz="1600" b="1" dirty="0">
+                <a:solidFill>
+                  <a:schemeClr val="tx1"/>
+                </a:solidFill>
+              </a:rPr>
+              <a:t>jiná prevence, nereaguje</a:t>
+            </a:r>
+            <a:r>
+              <a:rPr lang="en-US" sz="1600" dirty="0">
+                <a:solidFill>
+                  <a:schemeClr val="tx1"/>
+                </a:solidFill>
+              </a:rPr>
+              <a:t> (4 %, 74 % zůstává).</a:t>
+            </a:r>
+            <a:endParaRPr lang="en-US" sz="1600" dirty="0"/>
+          </a:p>
+        </p:txBody>
+      </p:sp>
+      <p:sp>
+        <p:nvSpPr>
+          <p:cNvPr id="6" name="pointa"/>
           <p:cNvSpPr txBox="1"/>
           <p:nvPr/>
         </p:nvSpPr>
         <p:spPr>
           <a:xfrm>
-            <a:off x="777240" y="1463040"/>
-            <a:ext cx="548640" cy="548640"/>
+            <a:off x="8546322" y="3886200"/>
+            <a:ext cx="3096733" cy="1188720"/>
           </a:xfrm>
           <a:prstGeom prst="rect">
             <a:avLst/>
@@ -2774,440 +3034,18 @@
           <a:bodyPr wrap="square" lIns="0" tIns="0" rIns="0" bIns="0" rtlCol="0" anchor="ctr"/>
           <a:lstStyle/>
           <a:p>
-            <a:pPr algn="ctr" indent="0" marL="0">
-              <a:buNone/>
-            </a:pPr>
-            <a:r>
-              <a:rPr lang="en-US" sz="2000" b="1" dirty="0">
-                <a:solidFill>
-                  <a:schemeClr val="bg1"/>
-                </a:solidFill>
-                <a:latin typeface="Cambria" pitchFamily="34" charset="0"/>
-                <a:ea typeface="Cambria" pitchFamily="34" charset="-122"/>
-                <a:cs typeface="Cambria" pitchFamily="34" charset="-120"/>
-              </a:rPr>
-              <a:t>1</a:t>
-            </a:r>
-            <a:endParaRPr lang="en-US" sz="2000" dirty="0"/>
-          </a:p>
-        </p:txBody>
-      </p:sp>
-      <p:sp>
-        <p:nvSpPr>
-          <p:cNvPr id="6" name="zjisteni_1_text"/>
-          <p:cNvSpPr txBox="1"/>
-          <p:nvPr/>
-        </p:nvSpPr>
-        <p:spPr>
-          <a:xfrm>
-            <a:off x="1554480" y="1417320"/>
-            <a:ext cx="4221328" cy="1965960"/>
-          </a:xfrm>
-          <a:prstGeom prst="rect">
-            <a:avLst/>
-          </a:prstGeom>
-          <a:noFill/>
-          <a:ln/>
-        </p:spPr>
-        <p:txBody>
-          <a:bodyPr wrap="square" lIns="0" tIns="0" rIns="0" bIns="0" rtlCol="0" anchor="t"/>
-          <a:lstStyle/>
-          <a:p>
             <a:pPr indent="0" marL="0">
               <a:buNone/>
             </a:pPr>
             <a:r>
-              <a:rPr lang="en-US" sz="1800" b="1" dirty="0">
-                <a:solidFill>
-                  <a:schemeClr val="tx1"/>
+              <a:rPr lang="en-US" sz="1600" i="1" dirty="0">
+                <a:solidFill>
+                  <a:schemeClr val="accent2"/>
                 </a:solidFill>
               </a:rPr>
-              <a:t>11 pravidel stačí.</a:t>
-            </a:r>
-            <a:r>
-              <a:rPr lang="en-US" sz="1800" dirty="0">
-                <a:solidFill>
-                  <a:schemeClr val="tx1"/>
-                </a:solidFill>
-              </a:rPr>
-              <a:t> AUROC 0,807 na roce 2024 proti 0,837 plného modelu. Segmenty jsou stabilní v čase.</a:t>
-            </a:r>
-            <a:endParaRPr lang="en-US" sz="1800" dirty="0"/>
-          </a:p>
-        </p:txBody>
-      </p:sp>
-      <p:sp>
-        <p:nvSpPr>
-          <p:cNvPr id="7" name="zjisteni_2"/>
-          <p:cNvSpPr/>
-          <p:nvPr/>
-        </p:nvSpPr>
-        <p:spPr>
-          <a:xfrm>
-            <a:off x="6233008" y="1234440"/>
-            <a:ext cx="5410048" cy="2331720"/>
-          </a:xfrm>
-          <a:prstGeom prst="roundRect">
-            <a:avLst>
-              <a:gd name="adj" fmla="val 3137"/>
-            </a:avLst>
-          </a:prstGeom>
-          <a:solidFill>
-            <a:schemeClr val="bg2"/>
-          </a:solidFill>
-          <a:ln/>
-        </p:spPr>
-      </p:sp>
-      <p:sp>
-        <p:nvSpPr>
-          <p:cNvPr id="8" name="cislo_2"/>
-          <p:cNvSpPr/>
-          <p:nvPr/>
-        </p:nvSpPr>
-        <p:spPr>
-          <a:xfrm>
-            <a:off x="6461608" y="1463040"/>
-            <a:ext cx="548640" cy="548640"/>
-          </a:xfrm>
-          <a:prstGeom prst="ellipse">
-            <a:avLst/>
-          </a:prstGeom>
-          <a:solidFill>
-            <a:schemeClr val="accent1"/>
-          </a:solidFill>
-          <a:ln/>
-        </p:spPr>
-      </p:sp>
-      <p:sp>
-        <p:nvSpPr>
-          <p:cNvPr id="9" name="Text 7"/>
-          <p:cNvSpPr txBox="1"/>
-          <p:nvPr/>
-        </p:nvSpPr>
-        <p:spPr>
-          <a:xfrm>
-            <a:off x="6461608" y="1463040"/>
-            <a:ext cx="548640" cy="548640"/>
-          </a:xfrm>
-          <a:prstGeom prst="rect">
-            <a:avLst/>
-          </a:prstGeom>
-          <a:noFill/>
-          <a:ln/>
-        </p:spPr>
-        <p:txBody>
-          <a:bodyPr wrap="square" lIns="0" tIns="0" rIns="0" bIns="0" rtlCol="0" anchor="ctr"/>
-          <a:lstStyle/>
-          <a:p>
-            <a:pPr algn="ctr" indent="0" marL="0">
-              <a:buNone/>
-            </a:pPr>
-            <a:r>
-              <a:rPr lang="en-US" sz="2000" b="1" dirty="0">
-                <a:solidFill>
-                  <a:schemeClr val="bg1"/>
-                </a:solidFill>
-                <a:latin typeface="Cambria" pitchFamily="34" charset="0"/>
-                <a:ea typeface="Cambria" pitchFamily="34" charset="-122"/>
-                <a:cs typeface="Cambria" pitchFamily="34" charset="-120"/>
-              </a:rPr>
-              <a:t>2</a:t>
-            </a:r>
-            <a:endParaRPr lang="en-US" sz="2000" dirty="0"/>
-          </a:p>
-        </p:txBody>
-      </p:sp>
-      <p:sp>
-        <p:nvSpPr>
-          <p:cNvPr id="10" name="zjisteni_2_text"/>
-          <p:cNvSpPr txBox="1"/>
-          <p:nvPr/>
-        </p:nvSpPr>
-        <p:spPr>
-          <a:xfrm>
-            <a:off x="7238848" y="1417320"/>
-            <a:ext cx="4221328" cy="1965960"/>
-          </a:xfrm>
-          <a:prstGeom prst="rect">
-            <a:avLst/>
-          </a:prstGeom>
-          <a:noFill/>
-          <a:ln/>
-        </p:spPr>
-        <p:txBody>
-          <a:bodyPr wrap="square" lIns="0" tIns="0" rIns="0" bIns="0" rtlCol="0" anchor="t"/>
-          <a:lstStyle/>
-          <a:p>
-            <a:pPr indent="0" marL="0">
-              <a:buNone/>
-            </a:pPr>
-            <a:r>
-              <a:rPr lang="en-US" sz="1800" b="1" dirty="0">
-                <a:solidFill>
-                  <a:schemeClr val="tx1"/>
-                </a:solidFill>
-              </a:rPr>
-              <a:t>Účast se liší 25×:</a:t>
-            </a:r>
-            <a:r>
-              <a:rPr lang="en-US" sz="1800" dirty="0">
-                <a:solidFill>
-                  <a:schemeClr val="tx1"/>
-                </a:solidFill>
-              </a:rPr>
-              <a:t> 60 % u první pozvánky v kontaktu se zdravotnictvím, 2–5 % u zkřížených dopisů, odpojených a opakovaně nereagujících.</a:t>
-            </a:r>
-            <a:endParaRPr lang="en-US" sz="1800" dirty="0"/>
-          </a:p>
-        </p:txBody>
-      </p:sp>
-      <p:sp>
-        <p:nvSpPr>
-          <p:cNvPr id="11" name="zjisteni_3"/>
-          <p:cNvSpPr/>
-          <p:nvPr/>
-        </p:nvSpPr>
-        <p:spPr>
-          <a:xfrm>
-            <a:off x="548640" y="3840480"/>
-            <a:ext cx="5410048" cy="2331720"/>
-          </a:xfrm>
-          <a:prstGeom prst="roundRect">
-            <a:avLst>
-              <a:gd name="adj" fmla="val 3137"/>
-            </a:avLst>
-          </a:prstGeom>
-          <a:solidFill>
-            <a:schemeClr val="bg2"/>
-          </a:solidFill>
-          <a:ln/>
-        </p:spPr>
-      </p:sp>
-      <p:sp>
-        <p:nvSpPr>
-          <p:cNvPr id="12" name="cislo_3"/>
-          <p:cNvSpPr/>
-          <p:nvPr/>
-        </p:nvSpPr>
-        <p:spPr>
-          <a:xfrm>
-            <a:off x="777240" y="4069080"/>
-            <a:ext cx="548640" cy="548640"/>
-          </a:xfrm>
-          <a:prstGeom prst="ellipse">
-            <a:avLst/>
-          </a:prstGeom>
-          <a:solidFill>
-            <a:schemeClr val="accent1"/>
-          </a:solidFill>
-          <a:ln/>
-        </p:spPr>
-      </p:sp>
-      <p:sp>
-        <p:nvSpPr>
-          <p:cNvPr id="13" name="Text 11"/>
-          <p:cNvSpPr txBox="1"/>
-          <p:nvPr/>
-        </p:nvSpPr>
-        <p:spPr>
-          <a:xfrm>
-            <a:off x="777240" y="4069080"/>
-            <a:ext cx="548640" cy="548640"/>
-          </a:xfrm>
-          <a:prstGeom prst="rect">
-            <a:avLst/>
-          </a:prstGeom>
-          <a:noFill/>
-          <a:ln/>
-        </p:spPr>
-        <p:txBody>
-          <a:bodyPr wrap="square" lIns="0" tIns="0" rIns="0" bIns="0" rtlCol="0" anchor="ctr"/>
-          <a:lstStyle/>
-          <a:p>
-            <a:pPr algn="ctr" indent="0" marL="0">
-              <a:buNone/>
-            </a:pPr>
-            <a:r>
-              <a:rPr lang="en-US" sz="2000" b="1" dirty="0">
-                <a:solidFill>
-                  <a:schemeClr val="bg1"/>
-                </a:solidFill>
-                <a:latin typeface="Cambria" pitchFamily="34" charset="0"/>
-                <a:ea typeface="Cambria" pitchFamily="34" charset="-122"/>
-                <a:cs typeface="Cambria" pitchFamily="34" charset="-120"/>
-              </a:rPr>
-              <a:t>3</a:t>
-            </a:r>
-            <a:endParaRPr lang="en-US" sz="2000" dirty="0"/>
-          </a:p>
-        </p:txBody>
-      </p:sp>
-      <p:sp>
-        <p:nvSpPr>
-          <p:cNvPr id="14" name="zjisteni_3_text"/>
-          <p:cNvSpPr txBox="1"/>
-          <p:nvPr/>
-        </p:nvSpPr>
-        <p:spPr>
-          <a:xfrm>
-            <a:off x="1554480" y="4023360"/>
-            <a:ext cx="4221328" cy="1965960"/>
-          </a:xfrm>
-          <a:prstGeom prst="rect">
-            <a:avLst/>
-          </a:prstGeom>
-          <a:noFill/>
-          <a:ln/>
-        </p:spPr>
-        <p:txBody>
-          <a:bodyPr wrap="square" lIns="0" tIns="0" rIns="0" bIns="0" rtlCol="0" anchor="t"/>
-          <a:lstStyle/>
-          <a:p>
-            <a:pPr indent="0" marL="0">
-              <a:buNone/>
-            </a:pPr>
-            <a:r>
-              <a:rPr lang="en-US" sz="1800" b="1" dirty="0">
-                <a:solidFill>
-                  <a:schemeClr val="tx1"/>
-                </a:solidFill>
-              </a:rPr>
-              <a:t>59 % nepřišlých chodí ke gynekologovi nebo na jinou prevenci.</a:t>
-            </a:r>
-            <a:r>
-              <a:rPr lang="en-US" sz="1800" dirty="0">
-                <a:solidFill>
-                  <a:schemeClr val="tx1"/>
-                </a:solidFill>
-              </a:rPr>
-              <a:t> Jsou dosažitelné jinou cestou než dopisem.</a:t>
-            </a:r>
-            <a:endParaRPr lang="en-US" sz="1800" dirty="0"/>
-          </a:p>
-        </p:txBody>
-      </p:sp>
-      <p:sp>
-        <p:nvSpPr>
-          <p:cNvPr id="15" name="zjisteni_4"/>
-          <p:cNvSpPr/>
-          <p:nvPr/>
-        </p:nvSpPr>
-        <p:spPr>
-          <a:xfrm>
-            <a:off x="6233008" y="3840480"/>
-            <a:ext cx="5410048" cy="2331720"/>
-          </a:xfrm>
-          <a:prstGeom prst="roundRect">
-            <a:avLst>
-              <a:gd name="adj" fmla="val 3137"/>
-            </a:avLst>
-          </a:prstGeom>
-          <a:solidFill>
-            <a:schemeClr val="bg2"/>
-          </a:solidFill>
-          <a:ln/>
-        </p:spPr>
-      </p:sp>
-      <p:sp>
-        <p:nvSpPr>
-          <p:cNvPr id="16" name="cislo_4"/>
-          <p:cNvSpPr/>
-          <p:nvPr/>
-        </p:nvSpPr>
-        <p:spPr>
-          <a:xfrm>
-            <a:off x="6461608" y="4069080"/>
-            <a:ext cx="548640" cy="548640"/>
-          </a:xfrm>
-          <a:prstGeom prst="ellipse">
-            <a:avLst/>
-          </a:prstGeom>
-          <a:solidFill>
-            <a:schemeClr val="accent1"/>
-          </a:solidFill>
-          <a:ln/>
-        </p:spPr>
-      </p:sp>
-      <p:sp>
-        <p:nvSpPr>
-          <p:cNvPr id="17" name="Text 15"/>
-          <p:cNvSpPr txBox="1"/>
-          <p:nvPr/>
-        </p:nvSpPr>
-        <p:spPr>
-          <a:xfrm>
-            <a:off x="6461608" y="4069080"/>
-            <a:ext cx="548640" cy="548640"/>
-          </a:xfrm>
-          <a:prstGeom prst="rect">
-            <a:avLst/>
-          </a:prstGeom>
-          <a:noFill/>
-          <a:ln/>
-        </p:spPr>
-        <p:txBody>
-          <a:bodyPr wrap="square" lIns="0" tIns="0" rIns="0" bIns="0" rtlCol="0" anchor="ctr"/>
-          <a:lstStyle/>
-          <a:p>
-            <a:pPr algn="ctr" indent="0" marL="0">
-              <a:buNone/>
-            </a:pPr>
-            <a:r>
-              <a:rPr lang="en-US" sz="2000" b="1" dirty="0">
-                <a:solidFill>
-                  <a:schemeClr val="bg1"/>
-                </a:solidFill>
-                <a:latin typeface="Cambria" pitchFamily="34" charset="0"/>
-                <a:ea typeface="Cambria" pitchFamily="34" charset="-122"/>
-                <a:cs typeface="Cambria" pitchFamily="34" charset="-120"/>
-              </a:rPr>
-              <a:t>4</a:t>
-            </a:r>
-            <a:endParaRPr lang="en-US" sz="2000" dirty="0"/>
-          </a:p>
-        </p:txBody>
-      </p:sp>
-      <p:sp>
-        <p:nvSpPr>
-          <p:cNvPr id="18" name="zjisteni_4_text"/>
-          <p:cNvSpPr txBox="1"/>
-          <p:nvPr/>
-        </p:nvSpPr>
-        <p:spPr>
-          <a:xfrm>
-            <a:off x="7238848" y="4023360"/>
-            <a:ext cx="4221328" cy="1965960"/>
-          </a:xfrm>
-          <a:prstGeom prst="rect">
-            <a:avLst/>
-          </a:prstGeom>
-          <a:noFill/>
-          <a:ln/>
-        </p:spPr>
-        <p:txBody>
-          <a:bodyPr wrap="square" lIns="0" tIns="0" rIns="0" bIns="0" rtlCol="0" anchor="t"/>
-          <a:lstStyle/>
-          <a:p>
-            <a:pPr indent="0" marL="0">
-              <a:buNone/>
-            </a:pPr>
-            <a:r>
-              <a:rPr lang="en-US" sz="1800" b="1" dirty="0">
-                <a:solidFill>
-                  <a:schemeClr val="tx1"/>
-                </a:solidFill>
-              </a:rPr>
-              <a:t>Zkřížené dopisy:</a:t>
-            </a:r>
-            <a:r>
-              <a:rPr lang="en-US" sz="1800" dirty="0">
-                <a:solidFill>
-                  <a:schemeClr val="tx1"/>
-                </a:solidFill>
-              </a:rPr>
-              <a:t> 7 600 dopisů ročně (3 %) jde ženám, které screening měly 0–1 měsíc předem.</a:t>
-            </a:r>
-            <a:endParaRPr lang="en-US" sz="1800" dirty="0"/>
+              <a:t>Zpětná hrana z „nereaguje“ chybí: co se nezíská brzy, už se skoro nezíská.</a:t>
+            </a:r>
+            <a:endParaRPr lang="en-US" sz="1600" dirty="0"/>
           </a:p>
         </p:txBody>
       </p:sp>
@@ -3313,7 +3151,7 @@
                   <a:schemeClr val="accent1"/>
                 </a:solidFill>
               </a:rPr>
-              <a:t>Hlavní zjištění (2/2)</a:t>
+              <a:t>Hlavní zjištění (1/2)</a:t>
             </a:r>
             <a:endParaRPr lang="en-US" sz="3000" dirty="0"/>
           </a:p>
@@ -3321,7 +3159,7 @@
       </p:sp>
       <p:sp>
         <p:nvSpPr>
-          <p:cNvPr id="3" name="zjisteni_5"/>
+          <p:cNvPr id="3" name="zjisteni_1"/>
           <p:cNvSpPr/>
           <p:nvPr/>
         </p:nvSpPr>
@@ -3343,7 +3181,7 @@
       </p:sp>
       <p:sp>
         <p:nvSpPr>
-          <p:cNvPr id="4" name="cislo_5"/>
+          <p:cNvPr id="4" name="cislo_1"/>
           <p:cNvSpPr/>
           <p:nvPr/>
         </p:nvSpPr>
@@ -3394,7 +3232,7 @@
                 <a:ea typeface="Cambria" pitchFamily="34" charset="-122"/>
                 <a:cs typeface="Cambria" pitchFamily="34" charset="-120"/>
               </a:rPr>
-              <a:t>5</a:t>
+              <a:t>1</a:t>
             </a:r>
             <a:endParaRPr lang="en-US" sz="2000" dirty="0"/>
           </a:p>
@@ -3402,7 +3240,7 @@
       </p:sp>
       <p:sp>
         <p:nvSpPr>
-          <p:cNvPr id="6" name="zjisteni_5_text"/>
+          <p:cNvPr id="6" name="zjisteni_1_text"/>
           <p:cNvSpPr txBox="1"/>
           <p:nvPr/>
         </p:nvSpPr>
@@ -3430,7 +3268,7 @@
                   <a:schemeClr val="tx1"/>
                 </a:solidFill>
               </a:rPr>
-              <a:t>Segmenty bez screeningu jsou „lepkavé“.</a:t>
+              <a:t>11 pravidel stačí.</a:t>
             </a:r>
             <a:r>
               <a:rPr lang="en-US" sz="1800" dirty="0">
@@ -3438,7 +3276,7 @@
                   <a:schemeClr val="tx1"/>
                 </a:solidFill>
               </a:rPr>
-              <a:t> Ve stejném segmentu zůstává 56–83 % žen. Každý rok sestoupí 9–15 % „zvaných málokrát“ do „opakovaně nereaguje“.</a:t>
+              <a:t> AUROC 0,807 na roce 2024 proti 0,837 plného modelu. Segmenty jsou stabilní v čase.</a:t>
             </a:r>
             <a:endParaRPr lang="en-US" sz="1800" dirty="0"/>
           </a:p>
@@ -3446,7 +3284,7 @@
       </p:sp>
       <p:sp>
         <p:nvSpPr>
-          <p:cNvPr id="7" name="zjisteni_6"/>
+          <p:cNvPr id="7" name="zjisteni_2"/>
           <p:cNvSpPr/>
           <p:nvPr/>
         </p:nvSpPr>
@@ -3468,7 +3306,7 @@
       </p:sp>
       <p:sp>
         <p:nvSpPr>
-          <p:cNvPr id="8" name="cislo_6"/>
+          <p:cNvPr id="8" name="cislo_2"/>
           <p:cNvSpPr/>
           <p:nvPr/>
         </p:nvSpPr>
@@ -3519,7 +3357,7 @@
                 <a:ea typeface="Cambria" pitchFamily="34" charset="-122"/>
                 <a:cs typeface="Cambria" pitchFamily="34" charset="-120"/>
               </a:rPr>
-              <a:t>6</a:t>
+              <a:t>2</a:t>
             </a:r>
             <a:endParaRPr lang="en-US" sz="2000" dirty="0"/>
           </a:p>
@@ -3527,7 +3365,7 @@
       </p:sp>
       <p:sp>
         <p:nvSpPr>
-          <p:cNvPr id="10" name="zjisteni_6_text"/>
+          <p:cNvPr id="10" name="zjisteni_2_text"/>
           <p:cNvSpPr txBox="1"/>
           <p:nvPr/>
         </p:nvSpPr>
@@ -3555,7 +3393,7 @@
                   <a:schemeClr val="tx1"/>
                 </a:solidFill>
               </a:rPr>
-              <a:t>První pozvánka je rozcestí.</a:t>
+              <a:t>Účast se liší 25×:</a:t>
             </a:r>
             <a:r>
               <a:rPr lang="en-US" sz="1800" dirty="0">
@@ -3563,7 +3401,7 @@
                   <a:schemeClr val="tx1"/>
                 </a:solidFill>
               </a:rPr>
-              <a:t> Přijde 57 % žen v kontaktu se zdravotnictvím, ale jen 31–36 % žen s málo kontakty. Z nich je 13 % příští rok odpojených.</a:t>
+              <a:t> 60 % u první pozvánky v kontaktu se zdravotnictvím, 2–5 % u zkřížených dopisů, odpojených a opakovaně nereagujících.</a:t>
             </a:r>
             <a:endParaRPr lang="en-US" sz="1800" dirty="0"/>
           </a:p>
@@ -3571,7 +3409,7 @@
       </p:sp>
       <p:sp>
         <p:nvSpPr>
-          <p:cNvPr id="11" name="zjisteni_7"/>
+          <p:cNvPr id="11" name="zjisteni_3"/>
           <p:cNvSpPr/>
           <p:nvPr/>
         </p:nvSpPr>
@@ -3593,7 +3431,7 @@
       </p:sp>
       <p:sp>
         <p:nvSpPr>
-          <p:cNvPr id="12" name="cislo_7"/>
+          <p:cNvPr id="12" name="cislo_3"/>
           <p:cNvSpPr/>
           <p:nvPr/>
         </p:nvSpPr>
@@ -3644,7 +3482,7 @@
                 <a:ea typeface="Cambria" pitchFamily="34" charset="-122"/>
                 <a:cs typeface="Cambria" pitchFamily="34" charset="-120"/>
               </a:rPr>
-              <a:t>7</a:t>
+              <a:t>3</a:t>
             </a:r>
             <a:endParaRPr lang="en-US" sz="2000" dirty="0"/>
           </a:p>
@@ -3652,7 +3490,7 @@
       </p:sp>
       <p:sp>
         <p:nvSpPr>
-          <p:cNvPr id="14" name="zjisteni_7_text"/>
+          <p:cNvPr id="14" name="zjisteni_3_text"/>
           <p:cNvSpPr txBox="1"/>
           <p:nvPr/>
         </p:nvSpPr>
@@ -3680,7 +3518,7 @@
                   <a:schemeClr val="tx1"/>
                 </a:solidFill>
               </a:rPr>
-              <a:t>Model uvnitř segmentu pomůže jen tam, kde je rozptyl:</a:t>
+              <a:t>59 % nepřišlých chodí ke gynekologovi nebo na jinou prevenci.</a:t>
             </a:r>
             <a:r>
               <a:rPr lang="en-US" sz="1800" dirty="0">
@@ -3688,7 +3526,7 @@
                   <a:schemeClr val="tx1"/>
                 </a:solidFill>
               </a:rPr>
-              <a:t> u první pozvánky, vypadlých a žen u gynekologa.</a:t>
+              <a:t> Jsou dosažitelné jinou cestou než dopisem.</a:t>
             </a:r>
             <a:endParaRPr lang="en-US" sz="1800" dirty="0"/>
           </a:p>
@@ -3696,7 +3534,7 @@
       </p:sp>
       <p:sp>
         <p:nvSpPr>
-          <p:cNvPr id="15" name="zjisteni_8"/>
+          <p:cNvPr id="15" name="zjisteni_4"/>
           <p:cNvSpPr/>
           <p:nvPr/>
         </p:nvSpPr>
@@ -3718,7 +3556,7 @@
       </p:sp>
       <p:sp>
         <p:nvSpPr>
-          <p:cNvPr id="16" name="cislo_8"/>
+          <p:cNvPr id="16" name="cislo_4"/>
           <p:cNvSpPr/>
           <p:nvPr/>
         </p:nvSpPr>
@@ -3769,7 +3607,7 @@
                 <a:ea typeface="Cambria" pitchFamily="34" charset="-122"/>
                 <a:cs typeface="Cambria" pitchFamily="34" charset="-120"/>
               </a:rPr>
-              <a:t>8</a:t>
+              <a:t>4</a:t>
             </a:r>
             <a:endParaRPr lang="en-US" sz="2000" dirty="0"/>
           </a:p>
@@ -3777,7 +3615,7 @@
       </p:sp>
       <p:sp>
         <p:nvSpPr>
-          <p:cNvPr id="18" name="zjisteni_8_text"/>
+          <p:cNvPr id="18" name="zjisteni_4_text"/>
           <p:cNvSpPr txBox="1"/>
           <p:nvPr/>
         </p:nvSpPr>
@@ -3805,7 +3643,7 @@
                   <a:schemeClr val="tx1"/>
                 </a:solidFill>
               </a:rPr>
-              <a:t>Intervenovat co nejdřív v toku:</a:t>
+              <a:t>Zkřížené dopisy:</a:t>
             </a:r>
             <a:r>
               <a:rPr lang="en-US" sz="1800" dirty="0">
@@ -3813,7 +3651,7 @@
                   <a:schemeClr val="tx1"/>
                 </a:solidFill>
               </a:rPr>
-              <a:t> první pozvánka a „zvaná málokrát“, dokud žena nesestoupí.</a:t>
+              <a:t> 7 600 dopisů ročně (3 %) jde ženám, které screening měly 0–1 měsíc předem.</a:t>
             </a:r>
             <a:endParaRPr lang="en-US" sz="1800" dirty="0"/>
           </a:p>
@@ -3921,6 +3759,614 @@
                   <a:schemeClr val="accent1"/>
                 </a:solidFill>
               </a:rPr>
+              <a:t>Hlavní zjištění (2/2)</a:t>
+            </a:r>
+            <a:endParaRPr lang="en-US" sz="3000" dirty="0"/>
+          </a:p>
+        </p:txBody>
+      </p:sp>
+      <p:sp>
+        <p:nvSpPr>
+          <p:cNvPr id="3" name="zjisteni_5"/>
+          <p:cNvSpPr/>
+          <p:nvPr/>
+        </p:nvSpPr>
+        <p:spPr>
+          <a:xfrm>
+            <a:off x="548640" y="1234440"/>
+            <a:ext cx="5410048" cy="2331720"/>
+          </a:xfrm>
+          <a:prstGeom prst="roundRect">
+            <a:avLst>
+              <a:gd name="adj" fmla="val 3137"/>
+            </a:avLst>
+          </a:prstGeom>
+          <a:solidFill>
+            <a:schemeClr val="bg2"/>
+          </a:solidFill>
+          <a:ln/>
+        </p:spPr>
+      </p:sp>
+      <p:sp>
+        <p:nvSpPr>
+          <p:cNvPr id="4" name="cislo_5"/>
+          <p:cNvSpPr/>
+          <p:nvPr/>
+        </p:nvSpPr>
+        <p:spPr>
+          <a:xfrm>
+            <a:off x="777240" y="1463040"/>
+            <a:ext cx="548640" cy="548640"/>
+          </a:xfrm>
+          <a:prstGeom prst="ellipse">
+            <a:avLst/>
+          </a:prstGeom>
+          <a:solidFill>
+            <a:schemeClr val="accent1"/>
+          </a:solidFill>
+          <a:ln/>
+        </p:spPr>
+      </p:sp>
+      <p:sp>
+        <p:nvSpPr>
+          <p:cNvPr id="5" name="Text 3"/>
+          <p:cNvSpPr txBox="1"/>
+          <p:nvPr/>
+        </p:nvSpPr>
+        <p:spPr>
+          <a:xfrm>
+            <a:off x="777240" y="1463040"/>
+            <a:ext cx="548640" cy="548640"/>
+          </a:xfrm>
+          <a:prstGeom prst="rect">
+            <a:avLst/>
+          </a:prstGeom>
+          <a:noFill/>
+          <a:ln/>
+        </p:spPr>
+        <p:txBody>
+          <a:bodyPr wrap="square" lIns="0" tIns="0" rIns="0" bIns="0" rtlCol="0" anchor="ctr"/>
+          <a:lstStyle/>
+          <a:p>
+            <a:pPr algn="ctr" indent="0" marL="0">
+              <a:buNone/>
+            </a:pPr>
+            <a:r>
+              <a:rPr lang="en-US" sz="2000" b="1" dirty="0">
+                <a:solidFill>
+                  <a:schemeClr val="bg1"/>
+                </a:solidFill>
+                <a:latin typeface="Cambria" pitchFamily="34" charset="0"/>
+                <a:ea typeface="Cambria" pitchFamily="34" charset="-122"/>
+                <a:cs typeface="Cambria" pitchFamily="34" charset="-120"/>
+              </a:rPr>
+              <a:t>5</a:t>
+            </a:r>
+            <a:endParaRPr lang="en-US" sz="2000" dirty="0"/>
+          </a:p>
+        </p:txBody>
+      </p:sp>
+      <p:sp>
+        <p:nvSpPr>
+          <p:cNvPr id="6" name="zjisteni_5_text"/>
+          <p:cNvSpPr txBox="1"/>
+          <p:nvPr/>
+        </p:nvSpPr>
+        <p:spPr>
+          <a:xfrm>
+            <a:off x="1554480" y="1417320"/>
+            <a:ext cx="4221328" cy="1965960"/>
+          </a:xfrm>
+          <a:prstGeom prst="rect">
+            <a:avLst/>
+          </a:prstGeom>
+          <a:noFill/>
+          <a:ln/>
+        </p:spPr>
+        <p:txBody>
+          <a:bodyPr wrap="square" lIns="0" tIns="0" rIns="0" bIns="0" rtlCol="0" anchor="t"/>
+          <a:lstStyle/>
+          <a:p>
+            <a:pPr indent="0" marL="0">
+              <a:buNone/>
+            </a:pPr>
+            <a:r>
+              <a:rPr lang="en-US" sz="1800" b="1" dirty="0">
+                <a:solidFill>
+                  <a:schemeClr val="tx1"/>
+                </a:solidFill>
+              </a:rPr>
+              <a:t>Segmenty bez screeningu jsou „lepkavé“.</a:t>
+            </a:r>
+            <a:r>
+              <a:rPr lang="en-US" sz="1800" dirty="0">
+                <a:solidFill>
+                  <a:schemeClr val="tx1"/>
+                </a:solidFill>
+              </a:rPr>
+              <a:t> Ve stejném segmentu zůstává 56–83 % žen. Každý rok sestoupí 9–15 % „zvaných málokrát“ do „opakovaně nereaguje“.</a:t>
+            </a:r>
+            <a:endParaRPr lang="en-US" sz="1800" dirty="0"/>
+          </a:p>
+        </p:txBody>
+      </p:sp>
+      <p:sp>
+        <p:nvSpPr>
+          <p:cNvPr id="7" name="zjisteni_6"/>
+          <p:cNvSpPr/>
+          <p:nvPr/>
+        </p:nvSpPr>
+        <p:spPr>
+          <a:xfrm>
+            <a:off x="6233008" y="1234440"/>
+            <a:ext cx="5410048" cy="2331720"/>
+          </a:xfrm>
+          <a:prstGeom prst="roundRect">
+            <a:avLst>
+              <a:gd name="adj" fmla="val 3137"/>
+            </a:avLst>
+          </a:prstGeom>
+          <a:solidFill>
+            <a:schemeClr val="bg2"/>
+          </a:solidFill>
+          <a:ln/>
+        </p:spPr>
+      </p:sp>
+      <p:sp>
+        <p:nvSpPr>
+          <p:cNvPr id="8" name="cislo_6"/>
+          <p:cNvSpPr/>
+          <p:nvPr/>
+        </p:nvSpPr>
+        <p:spPr>
+          <a:xfrm>
+            <a:off x="6461608" y="1463040"/>
+            <a:ext cx="548640" cy="548640"/>
+          </a:xfrm>
+          <a:prstGeom prst="ellipse">
+            <a:avLst/>
+          </a:prstGeom>
+          <a:solidFill>
+            <a:schemeClr val="accent1"/>
+          </a:solidFill>
+          <a:ln/>
+        </p:spPr>
+      </p:sp>
+      <p:sp>
+        <p:nvSpPr>
+          <p:cNvPr id="9" name="Text 7"/>
+          <p:cNvSpPr txBox="1"/>
+          <p:nvPr/>
+        </p:nvSpPr>
+        <p:spPr>
+          <a:xfrm>
+            <a:off x="6461608" y="1463040"/>
+            <a:ext cx="548640" cy="548640"/>
+          </a:xfrm>
+          <a:prstGeom prst="rect">
+            <a:avLst/>
+          </a:prstGeom>
+          <a:noFill/>
+          <a:ln/>
+        </p:spPr>
+        <p:txBody>
+          <a:bodyPr wrap="square" lIns="0" tIns="0" rIns="0" bIns="0" rtlCol="0" anchor="ctr"/>
+          <a:lstStyle/>
+          <a:p>
+            <a:pPr algn="ctr" indent="0" marL="0">
+              <a:buNone/>
+            </a:pPr>
+            <a:r>
+              <a:rPr lang="en-US" sz="2000" b="1" dirty="0">
+                <a:solidFill>
+                  <a:schemeClr val="bg1"/>
+                </a:solidFill>
+                <a:latin typeface="Cambria" pitchFamily="34" charset="0"/>
+                <a:ea typeface="Cambria" pitchFamily="34" charset="-122"/>
+                <a:cs typeface="Cambria" pitchFamily="34" charset="-120"/>
+              </a:rPr>
+              <a:t>6</a:t>
+            </a:r>
+            <a:endParaRPr lang="en-US" sz="2000" dirty="0"/>
+          </a:p>
+        </p:txBody>
+      </p:sp>
+      <p:sp>
+        <p:nvSpPr>
+          <p:cNvPr id="10" name="zjisteni_6_text"/>
+          <p:cNvSpPr txBox="1"/>
+          <p:nvPr/>
+        </p:nvSpPr>
+        <p:spPr>
+          <a:xfrm>
+            <a:off x="7238848" y="1417320"/>
+            <a:ext cx="4221328" cy="1965960"/>
+          </a:xfrm>
+          <a:prstGeom prst="rect">
+            <a:avLst/>
+          </a:prstGeom>
+          <a:noFill/>
+          <a:ln/>
+        </p:spPr>
+        <p:txBody>
+          <a:bodyPr wrap="square" lIns="0" tIns="0" rIns="0" bIns="0" rtlCol="0" anchor="t"/>
+          <a:lstStyle/>
+          <a:p>
+            <a:pPr indent="0" marL="0">
+              <a:buNone/>
+            </a:pPr>
+            <a:r>
+              <a:rPr lang="en-US" sz="1800" b="1" dirty="0">
+                <a:solidFill>
+                  <a:schemeClr val="tx1"/>
+                </a:solidFill>
+              </a:rPr>
+              <a:t>První pozvánka je rozcestí.</a:t>
+            </a:r>
+            <a:r>
+              <a:rPr lang="en-US" sz="1800" dirty="0">
+                <a:solidFill>
+                  <a:schemeClr val="tx1"/>
+                </a:solidFill>
+              </a:rPr>
+              <a:t> Přijde 57 % žen v kontaktu se zdravotnictvím, ale jen 31–36 % žen s málo kontakty. Z nich je 13 % příští rok odpojených.</a:t>
+            </a:r>
+            <a:endParaRPr lang="en-US" sz="1800" dirty="0"/>
+          </a:p>
+        </p:txBody>
+      </p:sp>
+      <p:sp>
+        <p:nvSpPr>
+          <p:cNvPr id="11" name="zjisteni_7"/>
+          <p:cNvSpPr/>
+          <p:nvPr/>
+        </p:nvSpPr>
+        <p:spPr>
+          <a:xfrm>
+            <a:off x="548640" y="3840480"/>
+            <a:ext cx="5410048" cy="2331720"/>
+          </a:xfrm>
+          <a:prstGeom prst="roundRect">
+            <a:avLst>
+              <a:gd name="adj" fmla="val 3137"/>
+            </a:avLst>
+          </a:prstGeom>
+          <a:solidFill>
+            <a:schemeClr val="bg2"/>
+          </a:solidFill>
+          <a:ln/>
+        </p:spPr>
+      </p:sp>
+      <p:sp>
+        <p:nvSpPr>
+          <p:cNvPr id="12" name="cislo_7"/>
+          <p:cNvSpPr/>
+          <p:nvPr/>
+        </p:nvSpPr>
+        <p:spPr>
+          <a:xfrm>
+            <a:off x="777240" y="4069080"/>
+            <a:ext cx="548640" cy="548640"/>
+          </a:xfrm>
+          <a:prstGeom prst="ellipse">
+            <a:avLst/>
+          </a:prstGeom>
+          <a:solidFill>
+            <a:schemeClr val="accent1"/>
+          </a:solidFill>
+          <a:ln/>
+        </p:spPr>
+      </p:sp>
+      <p:sp>
+        <p:nvSpPr>
+          <p:cNvPr id="13" name="Text 11"/>
+          <p:cNvSpPr txBox="1"/>
+          <p:nvPr/>
+        </p:nvSpPr>
+        <p:spPr>
+          <a:xfrm>
+            <a:off x="777240" y="4069080"/>
+            <a:ext cx="548640" cy="548640"/>
+          </a:xfrm>
+          <a:prstGeom prst="rect">
+            <a:avLst/>
+          </a:prstGeom>
+          <a:noFill/>
+          <a:ln/>
+        </p:spPr>
+        <p:txBody>
+          <a:bodyPr wrap="square" lIns="0" tIns="0" rIns="0" bIns="0" rtlCol="0" anchor="ctr"/>
+          <a:lstStyle/>
+          <a:p>
+            <a:pPr algn="ctr" indent="0" marL="0">
+              <a:buNone/>
+            </a:pPr>
+            <a:r>
+              <a:rPr lang="en-US" sz="2000" b="1" dirty="0">
+                <a:solidFill>
+                  <a:schemeClr val="bg1"/>
+                </a:solidFill>
+                <a:latin typeface="Cambria" pitchFamily="34" charset="0"/>
+                <a:ea typeface="Cambria" pitchFamily="34" charset="-122"/>
+                <a:cs typeface="Cambria" pitchFamily="34" charset="-120"/>
+              </a:rPr>
+              <a:t>7</a:t>
+            </a:r>
+            <a:endParaRPr lang="en-US" sz="2000" dirty="0"/>
+          </a:p>
+        </p:txBody>
+      </p:sp>
+      <p:sp>
+        <p:nvSpPr>
+          <p:cNvPr id="14" name="zjisteni_7_text"/>
+          <p:cNvSpPr txBox="1"/>
+          <p:nvPr/>
+        </p:nvSpPr>
+        <p:spPr>
+          <a:xfrm>
+            <a:off x="1554480" y="4023360"/>
+            <a:ext cx="4221328" cy="1965960"/>
+          </a:xfrm>
+          <a:prstGeom prst="rect">
+            <a:avLst/>
+          </a:prstGeom>
+          <a:noFill/>
+          <a:ln/>
+        </p:spPr>
+        <p:txBody>
+          <a:bodyPr wrap="square" lIns="0" tIns="0" rIns="0" bIns="0" rtlCol="0" anchor="t"/>
+          <a:lstStyle/>
+          <a:p>
+            <a:pPr indent="0" marL="0">
+              <a:buNone/>
+            </a:pPr>
+            <a:r>
+              <a:rPr lang="en-US" sz="1800" b="1" dirty="0">
+                <a:solidFill>
+                  <a:schemeClr val="tx1"/>
+                </a:solidFill>
+              </a:rPr>
+              <a:t>Model uvnitř segmentu pomůže jen tam, kde je rozptyl:</a:t>
+            </a:r>
+            <a:r>
+              <a:rPr lang="en-US" sz="1800" dirty="0">
+                <a:solidFill>
+                  <a:schemeClr val="tx1"/>
+                </a:solidFill>
+              </a:rPr>
+              <a:t> u první pozvánky, vypadlých a žen u gynekologa.</a:t>
+            </a:r>
+            <a:endParaRPr lang="en-US" sz="1800" dirty="0"/>
+          </a:p>
+        </p:txBody>
+      </p:sp>
+      <p:sp>
+        <p:nvSpPr>
+          <p:cNvPr id="15" name="zjisteni_8"/>
+          <p:cNvSpPr/>
+          <p:nvPr/>
+        </p:nvSpPr>
+        <p:spPr>
+          <a:xfrm>
+            <a:off x="6233008" y="3840480"/>
+            <a:ext cx="5410048" cy="2331720"/>
+          </a:xfrm>
+          <a:prstGeom prst="roundRect">
+            <a:avLst>
+              <a:gd name="adj" fmla="val 3137"/>
+            </a:avLst>
+          </a:prstGeom>
+          <a:solidFill>
+            <a:schemeClr val="bg2"/>
+          </a:solidFill>
+          <a:ln/>
+        </p:spPr>
+      </p:sp>
+      <p:sp>
+        <p:nvSpPr>
+          <p:cNvPr id="16" name="cislo_8"/>
+          <p:cNvSpPr/>
+          <p:nvPr/>
+        </p:nvSpPr>
+        <p:spPr>
+          <a:xfrm>
+            <a:off x="6461608" y="4069080"/>
+            <a:ext cx="548640" cy="548640"/>
+          </a:xfrm>
+          <a:prstGeom prst="ellipse">
+            <a:avLst/>
+          </a:prstGeom>
+          <a:solidFill>
+            <a:schemeClr val="accent1"/>
+          </a:solidFill>
+          <a:ln/>
+        </p:spPr>
+      </p:sp>
+      <p:sp>
+        <p:nvSpPr>
+          <p:cNvPr id="17" name="Text 15"/>
+          <p:cNvSpPr txBox="1"/>
+          <p:nvPr/>
+        </p:nvSpPr>
+        <p:spPr>
+          <a:xfrm>
+            <a:off x="6461608" y="4069080"/>
+            <a:ext cx="548640" cy="548640"/>
+          </a:xfrm>
+          <a:prstGeom prst="rect">
+            <a:avLst/>
+          </a:prstGeom>
+          <a:noFill/>
+          <a:ln/>
+        </p:spPr>
+        <p:txBody>
+          <a:bodyPr wrap="square" lIns="0" tIns="0" rIns="0" bIns="0" rtlCol="0" anchor="ctr"/>
+          <a:lstStyle/>
+          <a:p>
+            <a:pPr algn="ctr" indent="0" marL="0">
+              <a:buNone/>
+            </a:pPr>
+            <a:r>
+              <a:rPr lang="en-US" sz="2000" b="1" dirty="0">
+                <a:solidFill>
+                  <a:schemeClr val="bg1"/>
+                </a:solidFill>
+                <a:latin typeface="Cambria" pitchFamily="34" charset="0"/>
+                <a:ea typeface="Cambria" pitchFamily="34" charset="-122"/>
+                <a:cs typeface="Cambria" pitchFamily="34" charset="-120"/>
+              </a:rPr>
+              <a:t>8</a:t>
+            </a:r>
+            <a:endParaRPr lang="en-US" sz="2000" dirty="0"/>
+          </a:p>
+        </p:txBody>
+      </p:sp>
+      <p:sp>
+        <p:nvSpPr>
+          <p:cNvPr id="18" name="zjisteni_8_text"/>
+          <p:cNvSpPr txBox="1"/>
+          <p:nvPr/>
+        </p:nvSpPr>
+        <p:spPr>
+          <a:xfrm>
+            <a:off x="7238848" y="4023360"/>
+            <a:ext cx="4221328" cy="1965960"/>
+          </a:xfrm>
+          <a:prstGeom prst="rect">
+            <a:avLst/>
+          </a:prstGeom>
+          <a:noFill/>
+          <a:ln/>
+        </p:spPr>
+        <p:txBody>
+          <a:bodyPr wrap="square" lIns="0" tIns="0" rIns="0" bIns="0" rtlCol="0" anchor="t"/>
+          <a:lstStyle/>
+          <a:p>
+            <a:pPr indent="0" marL="0">
+              <a:buNone/>
+            </a:pPr>
+            <a:r>
+              <a:rPr lang="en-US" sz="1800" b="1" dirty="0">
+                <a:solidFill>
+                  <a:schemeClr val="tx1"/>
+                </a:solidFill>
+              </a:rPr>
+              <a:t>Intervenovat co nejdřív v toku:</a:t>
+            </a:r>
+            <a:r>
+              <a:rPr lang="en-US" sz="1800" dirty="0">
+                <a:solidFill>
+                  <a:schemeClr val="tx1"/>
+                </a:solidFill>
+              </a:rPr>
+              <a:t> první pozvánka a „zvaná málokrát“, dokud žena nesestoupí.</a:t>
+            </a:r>
+            <a:endParaRPr lang="en-US" sz="1800" dirty="0"/>
+          </a:p>
+        </p:txBody>
+      </p:sp>
+      <p:sp>
+        <p:nvSpPr>
+          <p:cNvPr id="25" name="Slide Number Placeholder 0"/>
+          <p:cNvSpPr>
+            <a:spLocks noGrp="1"/>
+          </p:cNvSpPr>
+          <p:nvPr>
+            <p:ph type="sldNum" sz="quarter" idx="4294967295"/>
+          </p:nvPr>
+        </p:nvSpPr>
+        <p:spPr>
+          <a:xfrm>
+            <a:off x="11094415" y="6446520"/>
+            <a:ext cx="548640" cy="274320"/>
+          </a:xfrm>
+          <a:prstGeom prst="rect">
+            <a:avLst/>
+          </a:prstGeom>
+          <a:extLst>
+            <a:ext uri="{C572A759-6A51-4108-AA02-DFA0A04FC94B}">
+              <ma14:wrappingTextBoxFlag xmlns:ma14="http://schemas.microsoft.com/office/mac/drawingml/2011/main" val="0"/>
+            </a:ext>
+          </a:extLst>
+        </p:spPr>
+        <p:txBody>
+          <a:bodyPr/>
+          <a:lstStyle>
+            <a:lvl1pPr>
+              <a:defRPr sz="1000">
+                <a:solidFill>
+                  <a:schemeClr val="accent4"/>
+                </a:solidFill>
+              </a:defRPr>
+            </a:lvl1pPr>
+          </a:lstStyle>
+          <a:p>
+            <a:pPr algn="r"/>
+            <a:fld id="{F7021451-1387-4CA6-816F-3879F97B5CBC}" type="slidenum">
+              <a:rPr b="0" lang="en-US"/>
+              <a:t>12</a:t>
+            </a:fld>
+            <a:endParaRPr lang="en-US"/>
+          </a:p>
+        </p:txBody>
+      </p:sp>
+    </p:spTree>
+  </p:cSld>
+  <p:clrMapOvr>
+    <a:masterClrMapping/>
+  </p:clrMapOvr>
+</p:sld>
+</file>
+
+<file path=ppt/slides/slide13.xml><?xml version="1.0" encoding="utf-8"?>
+<p:sld xmlns:a="http://schemas.openxmlformats.org/drawingml/2006/main" xmlns:r="http://schemas.openxmlformats.org/officeDocument/2006/relationships" xmlns:p="http://schemas.openxmlformats.org/presentationml/2006/main">
+  <p:cSld name="Slide 13">
+    <p:spTree>
+      <p:nvGrpSpPr>
+        <p:cNvPr id="1" name=""/>
+        <p:cNvGrpSpPr/>
+        <p:nvPr/>
+      </p:nvGrpSpPr>
+      <p:grpSpPr>
+        <a:xfrm>
+          <a:off x="0" y="0"/>
+          <a:ext cx="0" cy="0"/>
+          <a:chOff x="0" y="0"/>
+          <a:chExt cx="0" cy="0"/>
+        </a:xfrm>
+      </p:grpSpPr>
+      <p:sp>
+        <p:nvSpPr>
+          <p:cNvPr id="2" name="Text 0"/>
+          <p:cNvSpPr/>
+          <p:nvPr>
+            <p:ph idx="100" type="title" hasCustomPrompt="1"/>
+          </p:nvPr>
+        </p:nvSpPr>
+        <p:spPr>
+          <a:xfrm>
+            <a:off x="548640" y="320040"/>
+            <a:ext cx="11094415" cy="731520"/>
+          </a:xfrm>
+          <a:prstGeom prst="rect">
+            <a:avLst/>
+          </a:prstGeom>
+          <a:noFill/>
+          <a:ln/>
+        </p:spPr>
+        <p:txBody>
+          <a:bodyPr wrap="square" lIns="0" tIns="0" rIns="0" bIns="0" rtlCol="0" anchor="ctr"/>
+          <a:lstStyle/>
+          <a:p>
+            <a:pPr algn="l" indent="0" marL="0">
+              <a:buNone/>
+            </a:pPr>
+            <a:r>
+              <a:rPr lang="en-US" sz="3000" b="1" dirty="0">
+                <a:solidFill>
+                  <a:schemeClr val="accent1"/>
+                </a:solidFill>
+              </a:rPr>
               <a:t>Návrhy experimentů (1/2)</a:t>
             </a:r>
             <a:endParaRPr lang="en-US" sz="3000" dirty="0"/>
@@ -3929,7 +4375,7 @@
       </p:sp>
       <p:graphicFrame>
         <p:nvGraphicFramePr>
-          <p:cNvPr id="13" name="tabulka_experimenty_1"/>
+          <p:cNvPr id="14" name="tabulka_experimenty_1"/>
           <p:cNvGraphicFramePr>
             <a:graphicFrameLocks noGrp="1"/>
           </p:cNvGraphicFramePr>
@@ -5570,7 +6016,7 @@
             <a:pPr algn="r"/>
             <a:fld id="{F7021451-1387-4CA6-816F-3879F97B5CBC}" type="slidenum">
               <a:rPr b="0" lang="en-US"/>
-              <a:t>12</a:t>
+              <a:t>13</a:t>
             </a:fld>
             <a:endParaRPr lang="en-US"/>
           </a:p>
@@ -5584,9 +6030,9 @@
 </p:sld>
 </file>
 
-<file path=ppt/slides/slide13.xml><?xml version="1.0" encoding="utf-8"?>
+<file path=ppt/slides/slide14.xml><?xml version="1.0" encoding="utf-8"?>
 <p:sld xmlns:a="http://schemas.openxmlformats.org/drawingml/2006/main" xmlns:r="http://schemas.openxmlformats.org/officeDocument/2006/relationships" xmlns:p="http://schemas.openxmlformats.org/presentationml/2006/main">
-  <p:cSld name="Slide 13">
+  <p:cSld name="Slide 14">
     <p:spTree>
       <p:nvGrpSpPr>
         <p:cNvPr id="1" name=""/>
@@ -5641,7 +6087,7 @@
       </p:sp>
       <p:graphicFrame>
         <p:nvGraphicFramePr>
-          <p:cNvPr id="14" name="tabulka_experimenty_2"/>
+          <p:cNvPr id="15" name="tabulka_experimenty_2"/>
           <p:cNvGraphicFramePr>
             <a:graphicFrameLocks noGrp="1"/>
           </p:cNvGraphicFramePr>
@@ -7037,7 +7483,7 @@
             <a:pPr algn="r"/>
             <a:fld id="{F7021451-1387-4CA6-816F-3879F97B5CBC}" type="slidenum">
               <a:rPr b="0" lang="en-US"/>
-              <a:t>13</a:t>
+              <a:t>14</a:t>
             </a:fld>
             <a:endParaRPr lang="en-US"/>
           </a:p>
@@ -7051,9 +7497,9 @@
 </p:sld>
 </file>
 
-<file path=ppt/slides/slide14.xml><?xml version="1.0" encoding="utf-8"?>
+<file path=ppt/slides/slide15.xml><?xml version="1.0" encoding="utf-8"?>
 <p:sld xmlns:a="http://schemas.openxmlformats.org/drawingml/2006/main" xmlns:r="http://schemas.openxmlformats.org/officeDocument/2006/relationships" xmlns:p="http://schemas.openxmlformats.org/presentationml/2006/main">
-  <p:cSld name="Slide 14">
+  <p:cSld name="Slide 15">
     <p:spTree>
       <p:nvGrpSpPr>
         <p:cNvPr id="1" name=""/>
@@ -7097,49 +7543,1310 @@
             <a:r>
               <a:rPr lang="en-US" sz="3000" b="1" dirty="0">
                 <a:solidFill>
-                  <a:schemeClr val="bg1"/>
+                  <a:schemeClr val="accent1"/>
                 </a:solidFill>
               </a:rPr>
-              <a:t>Omezení</a:t>
+              <a:t>Návrhy experimentů v aplikaci VZP</a:t>
             </a:r>
             <a:endParaRPr lang="en-US" sz="3000" dirty="0"/>
           </a:p>
         </p:txBody>
       </p:sp>
-      <p:sp>
-        <p:nvSpPr>
-          <p:cNvPr id="3" name="omezeni_1"/>
-          <p:cNvSpPr/>
+      <p:graphicFrame>
+        <p:nvGraphicFramePr>
+          <p:cNvPr id="16" name="tabulka_aplikace"/>
+          <p:cNvGraphicFramePr>
+            <a:graphicFrameLocks noGrp="1"/>
+          </p:cNvGraphicFramePr>
+          <p:nvPr>
+            <p:extLst>
+              <p:ext uri="{D42A27DB-BD31-4B8C-83A1-F6EECF244321}">
+                <p14:modId xmlns:p14="http://schemas.microsoft.com/office/powerpoint/2010/main" val="1579011935"/>
+              </p:ext>
+            </p:extLst>
+          </p:nvPr>
+        </p:nvGraphicFramePr>
+        <p:xfrm>
+          <a:off x="548640" y="1234440"/>
+          <a:ext cx="11094415" cy="914400"/>
+        </p:xfrm>
+        <a:graphic>
+          <a:graphicData uri="http://schemas.openxmlformats.org/drawingml/2006/table">
+            <a:tbl>
+              <a:tblPr/>
+              <a:tblGrid>
+                <a:gridCol w="502920"/>
+                <a:gridCol w="5440680"/>
+                <a:gridCol w="1417320"/>
+                <a:gridCol w="1600200"/>
+                <a:gridCol w="2133295"/>
+              </a:tblGrid>
+              <a:tr h="685800">
+                <a:tc>
+                  <a:txBody>
+                    <a:bodyPr/>
+                    <a:lstStyle/>
+                    <a:p>
+                      <a:pPr indent="0" marL="0">
+                        <a:buNone/>
+                      </a:pPr>
+                      <a:r>
+                        <a:rPr lang="en-US" sz="1400" b="1" dirty="0">
+                          <a:solidFill>
+                            <a:schemeClr val="bg1"/>
+                          </a:solidFill>
+                        </a:rPr>
+                        <a:t>#</a:t>
+                      </a:r>
+                      <a:endParaRPr lang="en-US" sz="1400" dirty="0"/>
+                    </a:p>
+                  </a:txBody>
+                  <a:tcPr marL="73152" marR="73152" marT="73152" marB="73152" anchor="ctr">
+                    <a:lnL w="6350" cap="flat" cmpd="sng" algn="ctr">
+                      <a:solidFill>
+                        <a:srgbClr val="D9C4CD"/>
+                      </a:solidFill>
+                      <a:prstDash val="solid"/>
+                      <a:round/>
+                      <a:headEnd type="none" w="med" len="med"/>
+                      <a:tailEnd type="none" w="med" len="med"/>
+                    </a:lnL>
+                    <a:lnR w="6350" cap="flat" cmpd="sng" algn="ctr">
+                      <a:solidFill>
+                        <a:srgbClr val="D9C4CD"/>
+                      </a:solidFill>
+                      <a:prstDash val="solid"/>
+                      <a:round/>
+                      <a:headEnd type="none" w="med" len="med"/>
+                      <a:tailEnd type="none" w="med" len="med"/>
+                    </a:lnR>
+                    <a:lnT w="6350" cap="flat" cmpd="sng" algn="ctr">
+                      <a:solidFill>
+                        <a:srgbClr val="D9C4CD"/>
+                      </a:solidFill>
+                      <a:prstDash val="solid"/>
+                      <a:round/>
+                      <a:headEnd type="none" w="med" len="med"/>
+                      <a:tailEnd type="none" w="med" len="med"/>
+                    </a:lnT>
+                    <a:lnB w="6350" cap="flat" cmpd="sng" algn="ctr">
+                      <a:solidFill>
+                        <a:srgbClr val="D9C4CD"/>
+                      </a:solidFill>
+                      <a:prstDash val="solid"/>
+                      <a:round/>
+                      <a:headEnd type="none" w="med" len="med"/>
+                      <a:tailEnd type="none" w="med" len="med"/>
+                    </a:lnB>
+                    <a:solidFill>
+                      <a:schemeClr val="accent1"/>
+                    </a:solidFill>
+                  </a:tcPr>
+                </a:tc>
+                <a:tc>
+                  <a:txBody>
+                    <a:bodyPr/>
+                    <a:lstStyle/>
+                    <a:p>
+                      <a:pPr indent="0" marL="0">
+                        <a:buNone/>
+                      </a:pPr>
+                      <a:r>
+                        <a:rPr lang="en-US" sz="1400" b="1" dirty="0">
+                          <a:solidFill>
+                            <a:schemeClr val="bg1"/>
+                          </a:solidFill>
+                        </a:rPr>
+                        <a:t>Zásah (jen uživatelky aplikace)</a:t>
+                      </a:r>
+                      <a:endParaRPr lang="en-US" sz="1400" dirty="0"/>
+                    </a:p>
+                  </a:txBody>
+                  <a:tcPr marL="73152" marR="73152" marT="73152" marB="73152" anchor="ctr">
+                    <a:lnL w="6350" cap="flat" cmpd="sng" algn="ctr">
+                      <a:solidFill>
+                        <a:srgbClr val="D9C4CD"/>
+                      </a:solidFill>
+                      <a:prstDash val="solid"/>
+                      <a:round/>
+                      <a:headEnd type="none" w="med" len="med"/>
+                      <a:tailEnd type="none" w="med" len="med"/>
+                    </a:lnL>
+                    <a:lnR w="6350" cap="flat" cmpd="sng" algn="ctr">
+                      <a:solidFill>
+                        <a:srgbClr val="D9C4CD"/>
+                      </a:solidFill>
+                      <a:prstDash val="solid"/>
+                      <a:round/>
+                      <a:headEnd type="none" w="med" len="med"/>
+                      <a:tailEnd type="none" w="med" len="med"/>
+                    </a:lnR>
+                    <a:lnT w="6350" cap="flat" cmpd="sng" algn="ctr">
+                      <a:solidFill>
+                        <a:srgbClr val="D9C4CD"/>
+                      </a:solidFill>
+                      <a:prstDash val="solid"/>
+                      <a:round/>
+                      <a:headEnd type="none" w="med" len="med"/>
+                      <a:tailEnd type="none" w="med" len="med"/>
+                    </a:lnT>
+                    <a:lnB w="6350" cap="flat" cmpd="sng" algn="ctr">
+                      <a:solidFill>
+                        <a:srgbClr val="D9C4CD"/>
+                      </a:solidFill>
+                      <a:prstDash val="solid"/>
+                      <a:round/>
+                      <a:headEnd type="none" w="med" len="med"/>
+                      <a:tailEnd type="none" w="med" len="med"/>
+                    </a:lnB>
+                    <a:solidFill>
+                      <a:schemeClr val="accent1"/>
+                    </a:solidFill>
+                  </a:tcPr>
+                </a:tc>
+                <a:tc>
+                  <a:txBody>
+                    <a:bodyPr/>
+                    <a:lstStyle/>
+                    <a:p>
+                      <a:pPr indent="0" marL="0">
+                        <a:buNone/>
+                      </a:pPr>
+                      <a:r>
+                        <a:rPr lang="en-US" sz="1400" b="1" dirty="0">
+                          <a:solidFill>
+                            <a:schemeClr val="bg1"/>
+                          </a:solidFill>
+                        </a:rPr>
+                        <a:t>Cílové ženy za rok</a:t>
+                      </a:r>
+                      <a:endParaRPr lang="en-US" sz="1400" dirty="0"/>
+                    </a:p>
+                  </a:txBody>
+                  <a:tcPr marL="73152" marR="73152" marT="73152" marB="73152" anchor="ctr">
+                    <a:lnL w="6350" cap="flat" cmpd="sng" algn="ctr">
+                      <a:solidFill>
+                        <a:srgbClr val="D9C4CD"/>
+                      </a:solidFill>
+                      <a:prstDash val="solid"/>
+                      <a:round/>
+                      <a:headEnd type="none" w="med" len="med"/>
+                      <a:tailEnd type="none" w="med" len="med"/>
+                    </a:lnL>
+                    <a:lnR w="6350" cap="flat" cmpd="sng" algn="ctr">
+                      <a:solidFill>
+                        <a:srgbClr val="D9C4CD"/>
+                      </a:solidFill>
+                      <a:prstDash val="solid"/>
+                      <a:round/>
+                      <a:headEnd type="none" w="med" len="med"/>
+                      <a:tailEnd type="none" w="med" len="med"/>
+                    </a:lnR>
+                    <a:lnT w="6350" cap="flat" cmpd="sng" algn="ctr">
+                      <a:solidFill>
+                        <a:srgbClr val="D9C4CD"/>
+                      </a:solidFill>
+                      <a:prstDash val="solid"/>
+                      <a:round/>
+                      <a:headEnd type="none" w="med" len="med"/>
+                      <a:tailEnd type="none" w="med" len="med"/>
+                    </a:lnT>
+                    <a:lnB w="6350" cap="flat" cmpd="sng" algn="ctr">
+                      <a:solidFill>
+                        <a:srgbClr val="D9C4CD"/>
+                      </a:solidFill>
+                      <a:prstDash val="solid"/>
+                      <a:round/>
+                      <a:headEnd type="none" w="med" len="med"/>
+                      <a:tailEnd type="none" w="med" len="med"/>
+                    </a:lnB>
+                    <a:solidFill>
+                      <a:schemeClr val="accent1"/>
+                    </a:solidFill>
+                  </a:tcPr>
+                </a:tc>
+                <a:tc>
+                  <a:txBody>
+                    <a:bodyPr/>
+                    <a:lstStyle/>
+                    <a:p>
+                      <a:pPr indent="0" marL="0">
+                        <a:buNone/>
+                      </a:pPr>
+                      <a:r>
+                        <a:rPr lang="en-US" sz="1400" b="1" dirty="0">
+                          <a:solidFill>
+                            <a:schemeClr val="bg1"/>
+                          </a:solidFill>
+                        </a:rPr>
+                        <a:t>Výchozí účast</a:t>
+                      </a:r>
+                      <a:endParaRPr lang="en-US" sz="1400" dirty="0"/>
+                    </a:p>
+                  </a:txBody>
+                  <a:tcPr marL="73152" marR="73152" marT="73152" marB="73152" anchor="ctr">
+                    <a:lnL w="6350" cap="flat" cmpd="sng" algn="ctr">
+                      <a:solidFill>
+                        <a:srgbClr val="D9C4CD"/>
+                      </a:solidFill>
+                      <a:prstDash val="solid"/>
+                      <a:round/>
+                      <a:headEnd type="none" w="med" len="med"/>
+                      <a:tailEnd type="none" w="med" len="med"/>
+                    </a:lnL>
+                    <a:lnR w="6350" cap="flat" cmpd="sng" algn="ctr">
+                      <a:solidFill>
+                        <a:srgbClr val="D9C4CD"/>
+                      </a:solidFill>
+                      <a:prstDash val="solid"/>
+                      <a:round/>
+                      <a:headEnd type="none" w="med" len="med"/>
+                      <a:tailEnd type="none" w="med" len="med"/>
+                    </a:lnR>
+                    <a:lnT w="6350" cap="flat" cmpd="sng" algn="ctr">
+                      <a:solidFill>
+                        <a:srgbClr val="D9C4CD"/>
+                      </a:solidFill>
+                      <a:prstDash val="solid"/>
+                      <a:round/>
+                      <a:headEnd type="none" w="med" len="med"/>
+                      <a:tailEnd type="none" w="med" len="med"/>
+                    </a:lnT>
+                    <a:lnB w="6350" cap="flat" cmpd="sng" algn="ctr">
+                      <a:solidFill>
+                        <a:srgbClr val="D9C4CD"/>
+                      </a:solidFill>
+                      <a:prstDash val="solid"/>
+                      <a:round/>
+                      <a:headEnd type="none" w="med" len="med"/>
+                      <a:tailEnd type="none" w="med" len="med"/>
+                    </a:lnB>
+                    <a:solidFill>
+                      <a:schemeClr val="accent1"/>
+                    </a:solidFill>
+                  </a:tcPr>
+                </a:tc>
+                <a:tc>
+                  <a:txBody>
+                    <a:bodyPr/>
+                    <a:lstStyle/>
+                    <a:p>
+                      <a:pPr indent="0" marL="0">
+                        <a:buNone/>
+                      </a:pPr>
+                      <a:r>
+                        <a:rPr lang="en-US" sz="1400" b="1" dirty="0">
+                          <a:solidFill>
+                            <a:schemeClr val="bg1"/>
+                          </a:solidFill>
+                        </a:rPr>
+                        <a:t>MDE* při 10 / 20 / 30 % v aplikaci</a:t>
+                      </a:r>
+                      <a:endParaRPr lang="en-US" sz="1400" dirty="0"/>
+                    </a:p>
+                  </a:txBody>
+                  <a:tcPr marL="73152" marR="73152" marT="73152" marB="73152" anchor="ctr">
+                    <a:lnL w="6350" cap="flat" cmpd="sng" algn="ctr">
+                      <a:solidFill>
+                        <a:srgbClr val="D9C4CD"/>
+                      </a:solidFill>
+                      <a:prstDash val="solid"/>
+                      <a:round/>
+                      <a:headEnd type="none" w="med" len="med"/>
+                      <a:tailEnd type="none" w="med" len="med"/>
+                    </a:lnL>
+                    <a:lnR w="6350" cap="flat" cmpd="sng" algn="ctr">
+                      <a:solidFill>
+                        <a:srgbClr val="D9C4CD"/>
+                      </a:solidFill>
+                      <a:prstDash val="solid"/>
+                      <a:round/>
+                      <a:headEnd type="none" w="med" len="med"/>
+                      <a:tailEnd type="none" w="med" len="med"/>
+                    </a:lnR>
+                    <a:lnT w="6350" cap="flat" cmpd="sng" algn="ctr">
+                      <a:solidFill>
+                        <a:srgbClr val="D9C4CD"/>
+                      </a:solidFill>
+                      <a:prstDash val="solid"/>
+                      <a:round/>
+                      <a:headEnd type="none" w="med" len="med"/>
+                      <a:tailEnd type="none" w="med" len="med"/>
+                    </a:lnT>
+                    <a:lnB w="6350" cap="flat" cmpd="sng" algn="ctr">
+                      <a:solidFill>
+                        <a:srgbClr val="D9C4CD"/>
+                      </a:solidFill>
+                      <a:prstDash val="solid"/>
+                      <a:round/>
+                      <a:headEnd type="none" w="med" len="med"/>
+                      <a:tailEnd type="none" w="med" len="med"/>
+                    </a:lnB>
+                    <a:solidFill>
+                      <a:schemeClr val="accent1"/>
+                    </a:solidFill>
+                  </a:tcPr>
+                </a:tc>
+              </a:tr>
+              <a:tr h="685800">
+                <a:tc>
+                  <a:txBody>
+                    <a:bodyPr/>
+                    <a:lstStyle/>
+                    <a:p>
+                      <a:pPr algn="l" indent="0" marL="0">
+                        <a:buNone/>
+                      </a:pPr>
+                      <a:r>
+                        <a:rPr lang="en-US" sz="1400" b="1" dirty="0">
+                          <a:solidFill>
+                            <a:schemeClr val="tx1"/>
+                          </a:solidFill>
+                        </a:rPr>
+                        <a:t>A1</a:t>
+                      </a:r>
+                      <a:endParaRPr lang="en-US" sz="1400" dirty="0"/>
+                    </a:p>
+                  </a:txBody>
+                  <a:tcPr marL="73152" marR="73152" marT="73152" marB="73152" anchor="ctr">
+                    <a:lnL w="6350" cap="flat" cmpd="sng" algn="ctr">
+                      <a:solidFill>
+                        <a:srgbClr val="D9C4CD"/>
+                      </a:solidFill>
+                      <a:prstDash val="solid"/>
+                      <a:round/>
+                      <a:headEnd type="none" w="med" len="med"/>
+                      <a:tailEnd type="none" w="med" len="med"/>
+                    </a:lnL>
+                    <a:lnR w="6350" cap="flat" cmpd="sng" algn="ctr">
+                      <a:solidFill>
+                        <a:srgbClr val="D9C4CD"/>
+                      </a:solidFill>
+                      <a:prstDash val="solid"/>
+                      <a:round/>
+                      <a:headEnd type="none" w="med" len="med"/>
+                      <a:tailEnd type="none" w="med" len="med"/>
+                    </a:lnR>
+                    <a:lnT w="6350" cap="flat" cmpd="sng" algn="ctr">
+                      <a:solidFill>
+                        <a:srgbClr val="D9C4CD"/>
+                      </a:solidFill>
+                      <a:prstDash val="solid"/>
+                      <a:round/>
+                      <a:headEnd type="none" w="med" len="med"/>
+                      <a:tailEnd type="none" w="med" len="med"/>
+                    </a:lnT>
+                    <a:lnB w="6350" cap="flat" cmpd="sng" algn="ctr">
+                      <a:solidFill>
+                        <a:srgbClr val="D9C4CD"/>
+                      </a:solidFill>
+                      <a:prstDash val="solid"/>
+                      <a:round/>
+                      <a:headEnd type="none" w="med" len="med"/>
+                      <a:tailEnd type="none" w="med" len="med"/>
+                    </a:lnB>
+                    <a:solidFill>
+                      <a:schemeClr val="bg2"/>
+                    </a:solidFill>
+                  </a:tcPr>
+                </a:tc>
+                <a:tc>
+                  <a:txBody>
+                    <a:bodyPr/>
+                    <a:lstStyle/>
+                    <a:p>
+                      <a:pPr algn="l" indent="0" marL="0">
+                        <a:buNone/>
+                      </a:pPr>
+                      <a:r>
+                        <a:rPr lang="en-US" sz="1400" b="1" dirty="0">
+                          <a:solidFill>
+                            <a:schemeClr val="tx1"/>
+                          </a:solidFill>
+                        </a:rPr>
+                        <a:t>Rezervace v aplikaci:</a:t>
+                      </a:r>
+                      <a:r>
+                        <a:rPr lang="en-US" sz="1400" dirty="0">
+                          <a:solidFill>
+                            <a:schemeClr val="tx1"/>
+                          </a:solidFill>
+                        </a:rPr>
+                        <a:t> předrezervovaný termín, potvrzení jedním klepnutím (1. pozvánky, vypadlé 3–4 roky)</a:t>
+                      </a:r>
+                      <a:endParaRPr lang="en-US" sz="1400" dirty="0"/>
+                    </a:p>
+                  </a:txBody>
+                  <a:tcPr marL="73152" marR="73152" marT="73152" marB="73152" anchor="ctr">
+                    <a:lnL w="6350" cap="flat" cmpd="sng" algn="ctr">
+                      <a:solidFill>
+                        <a:srgbClr val="D9C4CD"/>
+                      </a:solidFill>
+                      <a:prstDash val="solid"/>
+                      <a:round/>
+                      <a:headEnd type="none" w="med" len="med"/>
+                      <a:tailEnd type="none" w="med" len="med"/>
+                    </a:lnL>
+                    <a:lnR w="6350" cap="flat" cmpd="sng" algn="ctr">
+                      <a:solidFill>
+                        <a:srgbClr val="D9C4CD"/>
+                      </a:solidFill>
+                      <a:prstDash val="solid"/>
+                      <a:round/>
+                      <a:headEnd type="none" w="med" len="med"/>
+                      <a:tailEnd type="none" w="med" len="med"/>
+                    </a:lnR>
+                    <a:lnT w="6350" cap="flat" cmpd="sng" algn="ctr">
+                      <a:solidFill>
+                        <a:srgbClr val="D9C4CD"/>
+                      </a:solidFill>
+                      <a:prstDash val="solid"/>
+                      <a:round/>
+                      <a:headEnd type="none" w="med" len="med"/>
+                      <a:tailEnd type="none" w="med" len="med"/>
+                    </a:lnT>
+                    <a:lnB w="6350" cap="flat" cmpd="sng" algn="ctr">
+                      <a:solidFill>
+                        <a:srgbClr val="D9C4CD"/>
+                      </a:solidFill>
+                      <a:prstDash val="solid"/>
+                      <a:round/>
+                      <a:headEnd type="none" w="med" len="med"/>
+                      <a:tailEnd type="none" w="med" len="med"/>
+                    </a:lnB>
+                    <a:solidFill>
+                      <a:schemeClr val="bg2"/>
+                    </a:solidFill>
+                  </a:tcPr>
+                </a:tc>
+                <a:tc>
+                  <a:txBody>
+                    <a:bodyPr/>
+                    <a:lstStyle/>
+                    <a:p>
+                      <a:pPr algn="ctr" indent="0" marL="0">
+                        <a:buNone/>
+                      </a:pPr>
+                      <a:r>
+                        <a:rPr lang="en-US" sz="1400" dirty="0">
+                          <a:solidFill>
+                            <a:schemeClr val="tx1"/>
+                          </a:solidFill>
+                        </a:rPr>
+                        <a:t>53 600</a:t>
+                      </a:r>
+                      <a:endParaRPr lang="en-US" sz="1400" dirty="0"/>
+                    </a:p>
+                  </a:txBody>
+                  <a:tcPr marL="73152" marR="73152" marT="73152" marB="73152" anchor="ctr">
+                    <a:lnL w="6350" cap="flat" cmpd="sng" algn="ctr">
+                      <a:solidFill>
+                        <a:srgbClr val="D9C4CD"/>
+                      </a:solidFill>
+                      <a:prstDash val="solid"/>
+                      <a:round/>
+                      <a:headEnd type="none" w="med" len="med"/>
+                      <a:tailEnd type="none" w="med" len="med"/>
+                    </a:lnL>
+                    <a:lnR w="6350" cap="flat" cmpd="sng" algn="ctr">
+                      <a:solidFill>
+                        <a:srgbClr val="D9C4CD"/>
+                      </a:solidFill>
+                      <a:prstDash val="solid"/>
+                      <a:round/>
+                      <a:headEnd type="none" w="med" len="med"/>
+                      <a:tailEnd type="none" w="med" len="med"/>
+                    </a:lnR>
+                    <a:lnT w="6350" cap="flat" cmpd="sng" algn="ctr">
+                      <a:solidFill>
+                        <a:srgbClr val="D9C4CD"/>
+                      </a:solidFill>
+                      <a:prstDash val="solid"/>
+                      <a:round/>
+                      <a:headEnd type="none" w="med" len="med"/>
+                      <a:tailEnd type="none" w="med" len="med"/>
+                    </a:lnT>
+                    <a:lnB w="6350" cap="flat" cmpd="sng" algn="ctr">
+                      <a:solidFill>
+                        <a:srgbClr val="D9C4CD"/>
+                      </a:solidFill>
+                      <a:prstDash val="solid"/>
+                      <a:round/>
+                      <a:headEnd type="none" w="med" len="med"/>
+                      <a:tailEnd type="none" w="med" len="med"/>
+                    </a:lnB>
+                    <a:solidFill>
+                      <a:schemeClr val="bg2"/>
+                    </a:solidFill>
+                  </a:tcPr>
+                </a:tc>
+                <a:tc>
+                  <a:txBody>
+                    <a:bodyPr/>
+                    <a:lstStyle/>
+                    <a:p>
+                      <a:pPr algn="ctr" indent="0" marL="0">
+                        <a:buNone/>
+                      </a:pPr>
+                      <a:r>
+                        <a:rPr lang="en-US" sz="1400" dirty="0">
+                          <a:solidFill>
+                            <a:schemeClr val="tx1"/>
+                          </a:solidFill>
+                        </a:rPr>
+                        <a:t>34,5 % (6M)</a:t>
+                      </a:r>
+                      <a:endParaRPr lang="en-US" sz="1400" dirty="0"/>
+                    </a:p>
+                  </a:txBody>
+                  <a:tcPr marL="73152" marR="73152" marT="73152" marB="73152" anchor="ctr">
+                    <a:lnL w="6350" cap="flat" cmpd="sng" algn="ctr">
+                      <a:solidFill>
+                        <a:srgbClr val="D9C4CD"/>
+                      </a:solidFill>
+                      <a:prstDash val="solid"/>
+                      <a:round/>
+                      <a:headEnd type="none" w="med" len="med"/>
+                      <a:tailEnd type="none" w="med" len="med"/>
+                    </a:lnL>
+                    <a:lnR w="6350" cap="flat" cmpd="sng" algn="ctr">
+                      <a:solidFill>
+                        <a:srgbClr val="D9C4CD"/>
+                      </a:solidFill>
+                      <a:prstDash val="solid"/>
+                      <a:round/>
+                      <a:headEnd type="none" w="med" len="med"/>
+                      <a:tailEnd type="none" w="med" len="med"/>
+                    </a:lnR>
+                    <a:lnT w="6350" cap="flat" cmpd="sng" algn="ctr">
+                      <a:solidFill>
+                        <a:srgbClr val="D9C4CD"/>
+                      </a:solidFill>
+                      <a:prstDash val="solid"/>
+                      <a:round/>
+                      <a:headEnd type="none" w="med" len="med"/>
+                      <a:tailEnd type="none" w="med" len="med"/>
+                    </a:lnT>
+                    <a:lnB w="6350" cap="flat" cmpd="sng" algn="ctr">
+                      <a:solidFill>
+                        <a:srgbClr val="D9C4CD"/>
+                      </a:solidFill>
+                      <a:prstDash val="solid"/>
+                      <a:round/>
+                      <a:headEnd type="none" w="med" len="med"/>
+                      <a:tailEnd type="none" w="med" len="med"/>
+                    </a:lnB>
+                    <a:solidFill>
+                      <a:schemeClr val="bg2"/>
+                    </a:solidFill>
+                  </a:tcPr>
+                </a:tc>
+                <a:tc>
+                  <a:txBody>
+                    <a:bodyPr/>
+                    <a:lstStyle/>
+                    <a:p>
+                      <a:pPr algn="ctr" indent="0" marL="0">
+                        <a:buNone/>
+                      </a:pPr>
+                      <a:r>
+                        <a:rPr lang="en-US" sz="1400" dirty="0">
+                          <a:solidFill>
+                            <a:schemeClr val="tx1"/>
+                          </a:solidFill>
+                        </a:rPr>
+                        <a:t>3,7 / 2,6 / 2,1 p. b.</a:t>
+                      </a:r>
+                      <a:endParaRPr lang="en-US" sz="1400" dirty="0"/>
+                    </a:p>
+                  </a:txBody>
+                  <a:tcPr marL="73152" marR="73152" marT="73152" marB="73152" anchor="ctr">
+                    <a:lnL w="6350" cap="flat" cmpd="sng" algn="ctr">
+                      <a:solidFill>
+                        <a:srgbClr val="D9C4CD"/>
+                      </a:solidFill>
+                      <a:prstDash val="solid"/>
+                      <a:round/>
+                      <a:headEnd type="none" w="med" len="med"/>
+                      <a:tailEnd type="none" w="med" len="med"/>
+                    </a:lnL>
+                    <a:lnR w="6350" cap="flat" cmpd="sng" algn="ctr">
+                      <a:solidFill>
+                        <a:srgbClr val="D9C4CD"/>
+                      </a:solidFill>
+                      <a:prstDash val="solid"/>
+                      <a:round/>
+                      <a:headEnd type="none" w="med" len="med"/>
+                      <a:tailEnd type="none" w="med" len="med"/>
+                    </a:lnR>
+                    <a:lnT w="6350" cap="flat" cmpd="sng" algn="ctr">
+                      <a:solidFill>
+                        <a:srgbClr val="D9C4CD"/>
+                      </a:solidFill>
+                      <a:prstDash val="solid"/>
+                      <a:round/>
+                      <a:headEnd type="none" w="med" len="med"/>
+                      <a:tailEnd type="none" w="med" len="med"/>
+                    </a:lnT>
+                    <a:lnB w="6350" cap="flat" cmpd="sng" algn="ctr">
+                      <a:solidFill>
+                        <a:srgbClr val="D9C4CD"/>
+                      </a:solidFill>
+                      <a:prstDash val="solid"/>
+                      <a:round/>
+                      <a:headEnd type="none" w="med" len="med"/>
+                      <a:tailEnd type="none" w="med" len="med"/>
+                    </a:lnB>
+                    <a:solidFill>
+                      <a:schemeClr val="bg2"/>
+                    </a:solidFill>
+                  </a:tcPr>
+                </a:tc>
+              </a:tr>
+              <a:tr h="685800">
+                <a:tc>
+                  <a:txBody>
+                    <a:bodyPr/>
+                    <a:lstStyle/>
+                    <a:p>
+                      <a:pPr algn="l" indent="0" marL="0">
+                        <a:buNone/>
+                      </a:pPr>
+                      <a:r>
+                        <a:rPr lang="en-US" sz="1400" b="1" dirty="0">
+                          <a:solidFill>
+                            <a:schemeClr val="tx1"/>
+                          </a:solidFill>
+                        </a:rPr>
+                        <a:t>A2</a:t>
+                      </a:r>
+                      <a:endParaRPr lang="en-US" sz="1400" dirty="0"/>
+                    </a:p>
+                  </a:txBody>
+                  <a:tcPr marL="73152" marR="73152" marT="73152" marB="73152" anchor="ctr">
+                    <a:lnL w="6350" cap="flat" cmpd="sng" algn="ctr">
+                      <a:solidFill>
+                        <a:srgbClr val="D9C4CD"/>
+                      </a:solidFill>
+                      <a:prstDash val="solid"/>
+                      <a:round/>
+                      <a:headEnd type="none" w="med" len="med"/>
+                      <a:tailEnd type="none" w="med" len="med"/>
+                    </a:lnL>
+                    <a:lnR w="6350" cap="flat" cmpd="sng" algn="ctr">
+                      <a:solidFill>
+                        <a:srgbClr val="D9C4CD"/>
+                      </a:solidFill>
+                      <a:prstDash val="solid"/>
+                      <a:round/>
+                      <a:headEnd type="none" w="med" len="med"/>
+                      <a:tailEnd type="none" w="med" len="med"/>
+                    </a:lnR>
+                    <a:lnT w="6350" cap="flat" cmpd="sng" algn="ctr">
+                      <a:solidFill>
+                        <a:srgbClr val="D9C4CD"/>
+                      </a:solidFill>
+                      <a:prstDash val="solid"/>
+                      <a:round/>
+                      <a:headEnd type="none" w="med" len="med"/>
+                      <a:tailEnd type="none" w="med" len="med"/>
+                    </a:lnT>
+                    <a:lnB w="6350" cap="flat" cmpd="sng" algn="ctr">
+                      <a:solidFill>
+                        <a:srgbClr val="D9C4CD"/>
+                      </a:solidFill>
+                      <a:prstDash val="solid"/>
+                      <a:round/>
+                      <a:headEnd type="none" w="med" len="med"/>
+                      <a:tailEnd type="none" w="med" len="med"/>
+                    </a:lnB>
+                    <a:solidFill>
+                      <a:schemeClr val="bg1"/>
+                    </a:solidFill>
+                  </a:tcPr>
+                </a:tc>
+                <a:tc>
+                  <a:txBody>
+                    <a:bodyPr/>
+                    <a:lstStyle/>
+                    <a:p>
+                      <a:pPr algn="l" indent="0" marL="0">
+                        <a:buNone/>
+                      </a:pPr>
+                      <a:r>
+                        <a:rPr lang="en-US" sz="1400" b="1" dirty="0">
+                          <a:solidFill>
+                            <a:schemeClr val="tx1"/>
+                          </a:solidFill>
+                        </a:rPr>
+                        <a:t>Push vs SMS × odkaz na rezervaci</a:t>
+                      </a:r>
+                      <a:r>
+                        <a:rPr lang="en-US" sz="1400" dirty="0">
+                          <a:solidFill>
+                            <a:schemeClr val="tx1"/>
+                          </a:solidFill>
+                        </a:rPr>
+                        <a:t>, faktoriál 2 × 2 (všechny segmenty kromě zkříženého dopisu)</a:t>
+                      </a:r>
+                      <a:endParaRPr lang="en-US" sz="1400" dirty="0"/>
+                    </a:p>
+                  </a:txBody>
+                  <a:tcPr marL="73152" marR="73152" marT="73152" marB="73152" anchor="ctr">
+                    <a:lnL w="6350" cap="flat" cmpd="sng" algn="ctr">
+                      <a:solidFill>
+                        <a:srgbClr val="D9C4CD"/>
+                      </a:solidFill>
+                      <a:prstDash val="solid"/>
+                      <a:round/>
+                      <a:headEnd type="none" w="med" len="med"/>
+                      <a:tailEnd type="none" w="med" len="med"/>
+                    </a:lnL>
+                    <a:lnR w="6350" cap="flat" cmpd="sng" algn="ctr">
+                      <a:solidFill>
+                        <a:srgbClr val="D9C4CD"/>
+                      </a:solidFill>
+                      <a:prstDash val="solid"/>
+                      <a:round/>
+                      <a:headEnd type="none" w="med" len="med"/>
+                      <a:tailEnd type="none" w="med" len="med"/>
+                    </a:lnR>
+                    <a:lnT w="6350" cap="flat" cmpd="sng" algn="ctr">
+                      <a:solidFill>
+                        <a:srgbClr val="D9C4CD"/>
+                      </a:solidFill>
+                      <a:prstDash val="solid"/>
+                      <a:round/>
+                      <a:headEnd type="none" w="med" len="med"/>
+                      <a:tailEnd type="none" w="med" len="med"/>
+                    </a:lnT>
+                    <a:lnB w="6350" cap="flat" cmpd="sng" algn="ctr">
+                      <a:solidFill>
+                        <a:srgbClr val="D9C4CD"/>
+                      </a:solidFill>
+                      <a:prstDash val="solid"/>
+                      <a:round/>
+                      <a:headEnd type="none" w="med" len="med"/>
+                      <a:tailEnd type="none" w="med" len="med"/>
+                    </a:lnB>
+                    <a:solidFill>
+                      <a:schemeClr val="bg1"/>
+                    </a:solidFill>
+                  </a:tcPr>
+                </a:tc>
+                <a:tc>
+                  <a:txBody>
+                    <a:bodyPr/>
+                    <a:lstStyle/>
+                    <a:p>
+                      <a:pPr algn="ctr" indent="0" marL="0">
+                        <a:buNone/>
+                      </a:pPr>
+                      <a:r>
+                        <a:rPr lang="en-US" sz="1400" dirty="0">
+                          <a:solidFill>
+                            <a:schemeClr val="tx1"/>
+                          </a:solidFill>
+                        </a:rPr>
+                        <a:t>248 900</a:t>
+                      </a:r>
+                      <a:endParaRPr lang="en-US" sz="1400" dirty="0"/>
+                    </a:p>
+                  </a:txBody>
+                  <a:tcPr marL="73152" marR="73152" marT="73152" marB="73152" anchor="ctr">
+                    <a:lnL w="6350" cap="flat" cmpd="sng" algn="ctr">
+                      <a:solidFill>
+                        <a:srgbClr val="D9C4CD"/>
+                      </a:solidFill>
+                      <a:prstDash val="solid"/>
+                      <a:round/>
+                      <a:headEnd type="none" w="med" len="med"/>
+                      <a:tailEnd type="none" w="med" len="med"/>
+                    </a:lnL>
+                    <a:lnR w="6350" cap="flat" cmpd="sng" algn="ctr">
+                      <a:solidFill>
+                        <a:srgbClr val="D9C4CD"/>
+                      </a:solidFill>
+                      <a:prstDash val="solid"/>
+                      <a:round/>
+                      <a:headEnd type="none" w="med" len="med"/>
+                      <a:tailEnd type="none" w="med" len="med"/>
+                    </a:lnR>
+                    <a:lnT w="6350" cap="flat" cmpd="sng" algn="ctr">
+                      <a:solidFill>
+                        <a:srgbClr val="D9C4CD"/>
+                      </a:solidFill>
+                      <a:prstDash val="solid"/>
+                      <a:round/>
+                      <a:headEnd type="none" w="med" len="med"/>
+                      <a:tailEnd type="none" w="med" len="med"/>
+                    </a:lnT>
+                    <a:lnB w="6350" cap="flat" cmpd="sng" algn="ctr">
+                      <a:solidFill>
+                        <a:srgbClr val="D9C4CD"/>
+                      </a:solidFill>
+                      <a:prstDash val="solid"/>
+                      <a:round/>
+                      <a:headEnd type="none" w="med" len="med"/>
+                      <a:tailEnd type="none" w="med" len="med"/>
+                    </a:lnB>
+                    <a:solidFill>
+                      <a:schemeClr val="bg1"/>
+                    </a:solidFill>
+                  </a:tcPr>
+                </a:tc>
+                <a:tc>
+                  <a:txBody>
+                    <a:bodyPr/>
+                    <a:lstStyle/>
+                    <a:p>
+                      <a:pPr algn="ctr" indent="0" marL="0">
+                        <a:buNone/>
+                      </a:pPr>
+                      <a:r>
+                        <a:rPr lang="en-US" sz="1400" dirty="0">
+                          <a:solidFill>
+                            <a:schemeClr val="tx1"/>
+                          </a:solidFill>
+                        </a:rPr>
+                        <a:t>19,7 %</a:t>
+                      </a:r>
+                      <a:endParaRPr lang="en-US" sz="1400" dirty="0"/>
+                    </a:p>
+                  </a:txBody>
+                  <a:tcPr marL="73152" marR="73152" marT="73152" marB="73152" anchor="ctr">
+                    <a:lnL w="6350" cap="flat" cmpd="sng" algn="ctr">
+                      <a:solidFill>
+                        <a:srgbClr val="D9C4CD"/>
+                      </a:solidFill>
+                      <a:prstDash val="solid"/>
+                      <a:round/>
+                      <a:headEnd type="none" w="med" len="med"/>
+                      <a:tailEnd type="none" w="med" len="med"/>
+                    </a:lnL>
+                    <a:lnR w="6350" cap="flat" cmpd="sng" algn="ctr">
+                      <a:solidFill>
+                        <a:srgbClr val="D9C4CD"/>
+                      </a:solidFill>
+                      <a:prstDash val="solid"/>
+                      <a:round/>
+                      <a:headEnd type="none" w="med" len="med"/>
+                      <a:tailEnd type="none" w="med" len="med"/>
+                    </a:lnR>
+                    <a:lnT w="6350" cap="flat" cmpd="sng" algn="ctr">
+                      <a:solidFill>
+                        <a:srgbClr val="D9C4CD"/>
+                      </a:solidFill>
+                      <a:prstDash val="solid"/>
+                      <a:round/>
+                      <a:headEnd type="none" w="med" len="med"/>
+                      <a:tailEnd type="none" w="med" len="med"/>
+                    </a:lnT>
+                    <a:lnB w="6350" cap="flat" cmpd="sng" algn="ctr">
+                      <a:solidFill>
+                        <a:srgbClr val="D9C4CD"/>
+                      </a:solidFill>
+                      <a:prstDash val="solid"/>
+                      <a:round/>
+                      <a:headEnd type="none" w="med" len="med"/>
+                      <a:tailEnd type="none" w="med" len="med"/>
+                    </a:lnB>
+                    <a:solidFill>
+                      <a:schemeClr val="bg1"/>
+                    </a:solidFill>
+                  </a:tcPr>
+                </a:tc>
+                <a:tc>
+                  <a:txBody>
+                    <a:bodyPr/>
+                    <a:lstStyle/>
+                    <a:p>
+                      <a:pPr algn="ctr" indent="0" marL="0">
+                        <a:buNone/>
+                      </a:pPr>
+                      <a:r>
+                        <a:rPr lang="en-US" sz="1400" dirty="0">
+                          <a:solidFill>
+                            <a:schemeClr val="tx1"/>
+                          </a:solidFill>
+                        </a:rPr>
+                        <a:t>1,4 / 1,0 / 0,8 p. b.</a:t>
+                      </a:r>
+                      <a:endParaRPr lang="en-US" sz="1400" dirty="0"/>
+                    </a:p>
+                  </a:txBody>
+                  <a:tcPr marL="73152" marR="73152" marT="73152" marB="73152" anchor="ctr">
+                    <a:lnL w="6350" cap="flat" cmpd="sng" algn="ctr">
+                      <a:solidFill>
+                        <a:srgbClr val="D9C4CD"/>
+                      </a:solidFill>
+                      <a:prstDash val="solid"/>
+                      <a:round/>
+                      <a:headEnd type="none" w="med" len="med"/>
+                      <a:tailEnd type="none" w="med" len="med"/>
+                    </a:lnL>
+                    <a:lnR w="6350" cap="flat" cmpd="sng" algn="ctr">
+                      <a:solidFill>
+                        <a:srgbClr val="D9C4CD"/>
+                      </a:solidFill>
+                      <a:prstDash val="solid"/>
+                      <a:round/>
+                      <a:headEnd type="none" w="med" len="med"/>
+                      <a:tailEnd type="none" w="med" len="med"/>
+                    </a:lnR>
+                    <a:lnT w="6350" cap="flat" cmpd="sng" algn="ctr">
+                      <a:solidFill>
+                        <a:srgbClr val="D9C4CD"/>
+                      </a:solidFill>
+                      <a:prstDash val="solid"/>
+                      <a:round/>
+                      <a:headEnd type="none" w="med" len="med"/>
+                      <a:tailEnd type="none" w="med" len="med"/>
+                    </a:lnT>
+                    <a:lnB w="6350" cap="flat" cmpd="sng" algn="ctr">
+                      <a:solidFill>
+                        <a:srgbClr val="D9C4CD"/>
+                      </a:solidFill>
+                      <a:prstDash val="solid"/>
+                      <a:round/>
+                      <a:headEnd type="none" w="med" len="med"/>
+                      <a:tailEnd type="none" w="med" len="med"/>
+                    </a:lnB>
+                    <a:solidFill>
+                      <a:schemeClr val="bg1"/>
+                    </a:solidFill>
+                  </a:tcPr>
+                </a:tc>
+              </a:tr>
+              <a:tr h="685800">
+                <a:tc>
+                  <a:txBody>
+                    <a:bodyPr/>
+                    <a:lstStyle/>
+                    <a:p>
+                      <a:pPr algn="l" indent="0" marL="0">
+                        <a:buNone/>
+                      </a:pPr>
+                      <a:r>
+                        <a:rPr lang="en-US" sz="1400" b="1" dirty="0">
+                          <a:solidFill>
+                            <a:schemeClr val="tx1"/>
+                          </a:solidFill>
+                        </a:rPr>
+                        <a:t>A3</a:t>
+                      </a:r>
+                      <a:endParaRPr lang="en-US" sz="1400" dirty="0"/>
+                    </a:p>
+                  </a:txBody>
+                  <a:tcPr marL="73152" marR="73152" marT="73152" marB="73152" anchor="ctr">
+                    <a:lnL w="6350" cap="flat" cmpd="sng" algn="ctr">
+                      <a:solidFill>
+                        <a:srgbClr val="D9C4CD"/>
+                      </a:solidFill>
+                      <a:prstDash val="solid"/>
+                      <a:round/>
+                      <a:headEnd type="none" w="med" len="med"/>
+                      <a:tailEnd type="none" w="med" len="med"/>
+                    </a:lnL>
+                    <a:lnR w="6350" cap="flat" cmpd="sng" algn="ctr">
+                      <a:solidFill>
+                        <a:srgbClr val="D9C4CD"/>
+                      </a:solidFill>
+                      <a:prstDash val="solid"/>
+                      <a:round/>
+                      <a:headEnd type="none" w="med" len="med"/>
+                      <a:tailEnd type="none" w="med" len="med"/>
+                    </a:lnR>
+                    <a:lnT w="6350" cap="flat" cmpd="sng" algn="ctr">
+                      <a:solidFill>
+                        <a:srgbClr val="D9C4CD"/>
+                      </a:solidFill>
+                      <a:prstDash val="solid"/>
+                      <a:round/>
+                      <a:headEnd type="none" w="med" len="med"/>
+                      <a:tailEnd type="none" w="med" len="med"/>
+                    </a:lnT>
+                    <a:lnB w="6350" cap="flat" cmpd="sng" algn="ctr">
+                      <a:solidFill>
+                        <a:srgbClr val="D9C4CD"/>
+                      </a:solidFill>
+                      <a:prstDash val="solid"/>
+                      <a:round/>
+                      <a:headEnd type="none" w="med" len="med"/>
+                      <a:tailEnd type="none" w="med" len="med"/>
+                    </a:lnB>
+                    <a:solidFill>
+                      <a:schemeClr val="bg2"/>
+                    </a:solidFill>
+                  </a:tcPr>
+                </a:tc>
+                <a:tc>
+                  <a:txBody>
+                    <a:bodyPr/>
+                    <a:lstStyle/>
+                    <a:p>
+                      <a:pPr algn="l" indent="0" marL="0">
+                        <a:buNone/>
+                      </a:pPr>
+                      <a:r>
+                        <a:rPr lang="en-US" sz="1400" b="1" dirty="0">
+                          <a:solidFill>
+                            <a:schemeClr val="tx1"/>
+                          </a:solidFill>
+                        </a:rPr>
+                        <a:t>Dotazník bariér → cílený další krok</a:t>
+                      </a:r>
+                      <a:r>
+                        <a:rPr lang="en-US" sz="1400" dirty="0">
+                          <a:solidFill>
+                            <a:schemeClr val="tx1"/>
+                          </a:solidFill>
+                        </a:rPr>
+                        <a:t>, ženy bez účasti do 3 měsíců („zvaná málokrát“, vypadlé 4–5+ let)</a:t>
+                      </a:r>
+                      <a:endParaRPr lang="en-US" sz="1400" dirty="0"/>
+                    </a:p>
+                  </a:txBody>
+                  <a:tcPr marL="73152" marR="73152" marT="73152" marB="73152" anchor="ctr">
+                    <a:lnL w="6350" cap="flat" cmpd="sng" algn="ctr">
+                      <a:solidFill>
+                        <a:srgbClr val="D9C4CD"/>
+                      </a:solidFill>
+                      <a:prstDash val="solid"/>
+                      <a:round/>
+                      <a:headEnd type="none" w="med" len="med"/>
+                      <a:tailEnd type="none" w="med" len="med"/>
+                    </a:lnL>
+                    <a:lnR w="6350" cap="flat" cmpd="sng" algn="ctr">
+                      <a:solidFill>
+                        <a:srgbClr val="D9C4CD"/>
+                      </a:solidFill>
+                      <a:prstDash val="solid"/>
+                      <a:round/>
+                      <a:headEnd type="none" w="med" len="med"/>
+                      <a:tailEnd type="none" w="med" len="med"/>
+                    </a:lnR>
+                    <a:lnT w="6350" cap="flat" cmpd="sng" algn="ctr">
+                      <a:solidFill>
+                        <a:srgbClr val="D9C4CD"/>
+                      </a:solidFill>
+                      <a:prstDash val="solid"/>
+                      <a:round/>
+                      <a:headEnd type="none" w="med" len="med"/>
+                      <a:tailEnd type="none" w="med" len="med"/>
+                    </a:lnT>
+                    <a:lnB w="6350" cap="flat" cmpd="sng" algn="ctr">
+                      <a:solidFill>
+                        <a:srgbClr val="D9C4CD"/>
+                      </a:solidFill>
+                      <a:prstDash val="solid"/>
+                      <a:round/>
+                      <a:headEnd type="none" w="med" len="med"/>
+                      <a:tailEnd type="none" w="med" len="med"/>
+                    </a:lnB>
+                    <a:solidFill>
+                      <a:schemeClr val="bg2"/>
+                    </a:solidFill>
+                  </a:tcPr>
+                </a:tc>
+                <a:tc>
+                  <a:txBody>
+                    <a:bodyPr/>
+                    <a:lstStyle/>
+                    <a:p>
+                      <a:pPr algn="ctr" indent="0" marL="0">
+                        <a:buNone/>
+                      </a:pPr>
+                      <a:r>
+                        <a:rPr lang="en-US" sz="1400" dirty="0">
+                          <a:solidFill>
+                            <a:schemeClr val="tx1"/>
+                          </a:solidFill>
+                        </a:rPr>
+                        <a:t>67 600</a:t>
+                      </a:r>
+                      <a:endParaRPr lang="en-US" sz="1400" dirty="0"/>
+                    </a:p>
+                  </a:txBody>
+                  <a:tcPr marL="73152" marR="73152" marT="73152" marB="73152" anchor="ctr">
+                    <a:lnL w="6350" cap="flat" cmpd="sng" algn="ctr">
+                      <a:solidFill>
+                        <a:srgbClr val="D9C4CD"/>
+                      </a:solidFill>
+                      <a:prstDash val="solid"/>
+                      <a:round/>
+                      <a:headEnd type="none" w="med" len="med"/>
+                      <a:tailEnd type="none" w="med" len="med"/>
+                    </a:lnL>
+                    <a:lnR w="6350" cap="flat" cmpd="sng" algn="ctr">
+                      <a:solidFill>
+                        <a:srgbClr val="D9C4CD"/>
+                      </a:solidFill>
+                      <a:prstDash val="solid"/>
+                      <a:round/>
+                      <a:headEnd type="none" w="med" len="med"/>
+                      <a:tailEnd type="none" w="med" len="med"/>
+                    </a:lnR>
+                    <a:lnT w="6350" cap="flat" cmpd="sng" algn="ctr">
+                      <a:solidFill>
+                        <a:srgbClr val="D9C4CD"/>
+                      </a:solidFill>
+                      <a:prstDash val="solid"/>
+                      <a:round/>
+                      <a:headEnd type="none" w="med" len="med"/>
+                      <a:tailEnd type="none" w="med" len="med"/>
+                    </a:lnT>
+                    <a:lnB w="6350" cap="flat" cmpd="sng" algn="ctr">
+                      <a:solidFill>
+                        <a:srgbClr val="D9C4CD"/>
+                      </a:solidFill>
+                      <a:prstDash val="solid"/>
+                      <a:round/>
+                      <a:headEnd type="none" w="med" len="med"/>
+                      <a:tailEnd type="none" w="med" len="med"/>
+                    </a:lnB>
+                    <a:solidFill>
+                      <a:schemeClr val="bg2"/>
+                    </a:solidFill>
+                  </a:tcPr>
+                </a:tc>
+                <a:tc>
+                  <a:txBody>
+                    <a:bodyPr/>
+                    <a:lstStyle/>
+                    <a:p>
+                      <a:pPr algn="ctr" indent="0" marL="0">
+                        <a:buNone/>
+                      </a:pPr>
+                      <a:r>
+                        <a:rPr lang="en-US" sz="1400" dirty="0">
+                          <a:solidFill>
+                            <a:schemeClr val="tx1"/>
+                          </a:solidFill>
+                        </a:rPr>
+                        <a:t>14,8 % (3.–12. měsíc)</a:t>
+                      </a:r>
+                      <a:endParaRPr lang="en-US" sz="1400" dirty="0"/>
+                    </a:p>
+                  </a:txBody>
+                  <a:tcPr marL="73152" marR="73152" marT="73152" marB="73152" anchor="ctr">
+                    <a:lnL w="6350" cap="flat" cmpd="sng" algn="ctr">
+                      <a:solidFill>
+                        <a:srgbClr val="D9C4CD"/>
+                      </a:solidFill>
+                      <a:prstDash val="solid"/>
+                      <a:round/>
+                      <a:headEnd type="none" w="med" len="med"/>
+                      <a:tailEnd type="none" w="med" len="med"/>
+                    </a:lnL>
+                    <a:lnR w="6350" cap="flat" cmpd="sng" algn="ctr">
+                      <a:solidFill>
+                        <a:srgbClr val="D9C4CD"/>
+                      </a:solidFill>
+                      <a:prstDash val="solid"/>
+                      <a:round/>
+                      <a:headEnd type="none" w="med" len="med"/>
+                      <a:tailEnd type="none" w="med" len="med"/>
+                    </a:lnR>
+                    <a:lnT w="6350" cap="flat" cmpd="sng" algn="ctr">
+                      <a:solidFill>
+                        <a:srgbClr val="D9C4CD"/>
+                      </a:solidFill>
+                      <a:prstDash val="solid"/>
+                      <a:round/>
+                      <a:headEnd type="none" w="med" len="med"/>
+                      <a:tailEnd type="none" w="med" len="med"/>
+                    </a:lnT>
+                    <a:lnB w="6350" cap="flat" cmpd="sng" algn="ctr">
+                      <a:solidFill>
+                        <a:srgbClr val="D9C4CD"/>
+                      </a:solidFill>
+                      <a:prstDash val="solid"/>
+                      <a:round/>
+                      <a:headEnd type="none" w="med" len="med"/>
+                      <a:tailEnd type="none" w="med" len="med"/>
+                    </a:lnB>
+                    <a:solidFill>
+                      <a:schemeClr val="bg2"/>
+                    </a:solidFill>
+                  </a:tcPr>
+                </a:tc>
+                <a:tc>
+                  <a:txBody>
+                    <a:bodyPr/>
+                    <a:lstStyle/>
+                    <a:p>
+                      <a:pPr algn="ctr" indent="0" marL="0">
+                        <a:buNone/>
+                      </a:pPr>
+                      <a:r>
+                        <a:rPr lang="en-US" sz="1400" dirty="0">
+                          <a:solidFill>
+                            <a:schemeClr val="tx1"/>
+                          </a:solidFill>
+                        </a:rPr>
+                        <a:t>2,5 / 1,8 / 1,4 p. b.</a:t>
+                      </a:r>
+                      <a:endParaRPr lang="en-US" sz="1400" dirty="0"/>
+                    </a:p>
+                  </a:txBody>
+                  <a:tcPr marL="73152" marR="73152" marT="73152" marB="73152" anchor="ctr">
+                    <a:lnL w="6350" cap="flat" cmpd="sng" algn="ctr">
+                      <a:solidFill>
+                        <a:srgbClr val="D9C4CD"/>
+                      </a:solidFill>
+                      <a:prstDash val="solid"/>
+                      <a:round/>
+                      <a:headEnd type="none" w="med" len="med"/>
+                      <a:tailEnd type="none" w="med" len="med"/>
+                    </a:lnL>
+                    <a:lnR w="6350" cap="flat" cmpd="sng" algn="ctr">
+                      <a:solidFill>
+                        <a:srgbClr val="D9C4CD"/>
+                      </a:solidFill>
+                      <a:prstDash val="solid"/>
+                      <a:round/>
+                      <a:headEnd type="none" w="med" len="med"/>
+                      <a:tailEnd type="none" w="med" len="med"/>
+                    </a:lnR>
+                    <a:lnT w="6350" cap="flat" cmpd="sng" algn="ctr">
+                      <a:solidFill>
+                        <a:srgbClr val="D9C4CD"/>
+                      </a:solidFill>
+                      <a:prstDash val="solid"/>
+                      <a:round/>
+                      <a:headEnd type="none" w="med" len="med"/>
+                      <a:tailEnd type="none" w="med" len="med"/>
+                    </a:lnT>
+                    <a:lnB w="6350" cap="flat" cmpd="sng" algn="ctr">
+                      <a:solidFill>
+                        <a:srgbClr val="D9C4CD"/>
+                      </a:solidFill>
+                      <a:prstDash val="solid"/>
+                      <a:round/>
+                      <a:headEnd type="none" w="med" len="med"/>
+                      <a:tailEnd type="none" w="med" len="med"/>
+                    </a:lnB>
+                    <a:solidFill>
+                      <a:schemeClr val="bg2"/>
+                    </a:solidFill>
+                  </a:tcPr>
+                </a:tc>
+              </a:tr>
+            </a:tbl>
+          </a:graphicData>
+        </a:graphic>
+      </p:graphicFrame>
+      <p:sp>
+        <p:nvSpPr>
+          <p:cNvPr id="4" name="poznamka_aplikace"/>
+          <p:cNvSpPr txBox="1"/>
           <p:nvPr/>
         </p:nvSpPr>
         <p:spPr>
           <a:xfrm>
-            <a:off x="548640" y="1234440"/>
-            <a:ext cx="5410048" cy="2331720"/>
-          </a:xfrm>
-          <a:prstGeom prst="roundRect">
-            <a:avLst>
-              <a:gd name="adj" fmla="val 3137"/>
-            </a:avLst>
-          </a:prstGeom>
-          <a:solidFill>
-            <a:schemeClr val="bg1">
-              <a:alpha val="12000"/>
-            </a:schemeClr>
-          </a:solidFill>
-          <a:ln/>
-        </p:spPr>
-      </p:sp>
-      <p:sp>
-        <p:nvSpPr>
-          <p:cNvPr id="4" name="omezeni_1_text"/>
-          <p:cNvSpPr txBox="1"/>
-          <p:nvPr/>
-        </p:nvSpPr>
-        <p:spPr>
-          <a:xfrm>
-            <a:off x="822960" y="1463040"/>
-            <a:ext cx="4861408" cy="1874520"/>
+            <a:off x="548640" y="4251960"/>
+            <a:ext cx="11094415" cy="502920"/>
           </a:xfrm>
           <a:prstGeom prst="rect">
             <a:avLst/>
@@ -7148,74 +8855,56 @@
           <a:ln/>
         </p:spPr>
         <p:txBody>
-          <a:bodyPr wrap="square" lIns="0" tIns="0" rIns="0" bIns="0" rtlCol="0" anchor="t"/>
+          <a:bodyPr wrap="square" lIns="0" tIns="0" rIns="0" bIns="0" rtlCol="0" anchor="ctr"/>
           <a:lstStyle/>
           <a:p>
             <a:pPr indent="0" marL="0">
               <a:buNone/>
             </a:pPr>
             <a:r>
-              <a:rPr lang="en-US" sz="1900" dirty="0">
-                <a:solidFill>
-                  <a:schemeClr val="bg1"/>
+              <a:rPr lang="en-US" sz="1100" dirty="0">
+                <a:solidFill>
+                  <a:schemeClr val="accent4"/>
                 </a:solidFill>
               </a:rPr>
-              <a:t>Segmenty popisují, </a:t>
-            </a:r>
-            <a:r>
-              <a:rPr lang="en-US" sz="1900" b="1" dirty="0">
-                <a:solidFill>
-                  <a:schemeClr val="bg1"/>
-                </a:solidFill>
-              </a:rPr>
-              <a:t>kdo přijde, ne kdo přijde díky intervenci</a:t>
-            </a:r>
-            <a:r>
-              <a:rPr lang="en-US" sz="1900" dirty="0">
-                <a:solidFill>
-                  <a:schemeClr val="bg1"/>
-                </a:solidFill>
-              </a:rPr>
-              <a:t>. Páky jsou hypotézy pro experiment.</a:t>
-            </a:r>
-            <a:endParaRPr lang="en-US" sz="1900" dirty="0"/>
+              <a:t>* nejmenší účinek, který pokus spolehlivě odhalí, když polovina uživatelek aplikace v cílových segmentech za rok dostane zásah a polovina zůstane kontrolou (α = 0,05, síla 80 %). Podíl uživatelek aplikace mezi pozvanými ženami zatím neznáme.</a:t>
+            </a:r>
+            <a:endParaRPr lang="en-US" sz="1100" dirty="0"/>
           </a:p>
         </p:txBody>
       </p:sp>
       <p:sp>
         <p:nvSpPr>
-          <p:cNvPr id="5" name="omezeni_2"/>
+          <p:cNvPr id="5" name="karta_aplikace"/>
           <p:cNvSpPr/>
           <p:nvPr/>
         </p:nvSpPr>
         <p:spPr>
           <a:xfrm>
-            <a:off x="6233008" y="1234440"/>
-            <a:ext cx="5410048" cy="2331720"/>
+            <a:off x="548640" y="4937760"/>
+            <a:ext cx="11094415" cy="1417320"/>
           </a:xfrm>
           <a:prstGeom prst="roundRect">
             <a:avLst>
-              <a:gd name="adj" fmla="val 3137"/>
+              <a:gd name="adj" fmla="val 5161"/>
             </a:avLst>
           </a:prstGeom>
           <a:solidFill>
-            <a:schemeClr val="bg1">
-              <a:alpha val="12000"/>
-            </a:schemeClr>
+            <a:schemeClr val="bg2"/>
           </a:solidFill>
           <a:ln/>
         </p:spPr>
       </p:sp>
       <p:sp>
         <p:nvSpPr>
-          <p:cNvPr id="6" name="omezeni_2_text"/>
+          <p:cNvPr id="6" name="karta_aplikace_text"/>
           <p:cNvSpPr txBox="1"/>
           <p:nvPr/>
         </p:nvSpPr>
         <p:spPr>
           <a:xfrm>
-            <a:off x="6507328" y="1463040"/>
-            <a:ext cx="4861408" cy="1874520"/>
+            <a:off x="777240" y="5074920"/>
+            <a:ext cx="10637215" cy="1143000"/>
           </a:xfrm>
           <a:prstGeom prst="rect">
             <a:avLst/>
@@ -7224,141 +8913,75 @@
           <a:ln/>
         </p:spPr>
         <p:txBody>
-          <a:bodyPr wrap="square" lIns="0" tIns="0" rIns="0" bIns="0" rtlCol="0" anchor="t"/>
+          <a:bodyPr wrap="square" lIns="0" tIns="0" rIns="0" bIns="0" rtlCol="0" anchor="ctr"/>
           <a:lstStyle/>
           <a:p>
-            <a:pPr indent="0" marL="0">
-              <a:buNone/>
+            <a:pPr marL="228600" indent="-228600">
+              <a:spcAft>
+                <a:spcPts val="800"/>
+              </a:spcAft>
+              <a:buSzPct val="100000"/>
+              <a:buChar char="•"/>
             </a:pPr>
             <a:r>
-              <a:rPr lang="en-US" sz="1900" dirty="0">
-                <a:solidFill>
-                  <a:schemeClr val="bg1"/>
+              <a:rPr lang="en-US" sz="1500" dirty="0">
+                <a:solidFill>
+                  <a:schemeClr val="tx1"/>
                 </a:solidFill>
               </a:rPr>
-              <a:t>„Bez screeningu“ = bez kódu za 5 let. Přechod „vypadlá 4–5+ let“ → bez screeningu je zčásti artefakt tohoto okna.</a:t>
-            </a:r>
-            <a:endParaRPr lang="en-US" sz="1900" dirty="0"/>
-          </a:p>
-        </p:txBody>
-      </p:sp>
-      <p:sp>
-        <p:nvSpPr>
-          <p:cNvPr id="7" name="omezeni_3"/>
-          <p:cNvSpPr/>
-          <p:nvPr/>
-        </p:nvSpPr>
-        <p:spPr>
-          <a:xfrm>
-            <a:off x="548640" y="3840480"/>
-            <a:ext cx="5410048" cy="2331720"/>
-          </a:xfrm>
-          <a:prstGeom prst="roundRect">
-            <a:avLst>
-              <a:gd name="adj" fmla="val 3137"/>
-            </a:avLst>
-          </a:prstGeom>
-          <a:solidFill>
-            <a:schemeClr val="bg1">
-              <a:alpha val="12000"/>
-            </a:schemeClr>
-          </a:solidFill>
-          <a:ln/>
-        </p:spPr>
-      </p:sp>
-      <p:sp>
-        <p:nvSpPr>
-          <p:cNvPr id="8" name="omezeni_3_text"/>
-          <p:cNvSpPr txBox="1"/>
-          <p:nvPr/>
-        </p:nvSpPr>
-        <p:spPr>
-          <a:xfrm>
-            <a:off x="822960" y="4069080"/>
-            <a:ext cx="4861408" cy="1874520"/>
-          </a:xfrm>
-          <a:prstGeom prst="rect">
-            <a:avLst/>
-          </a:prstGeom>
-          <a:noFill/>
-          <a:ln/>
-        </p:spPr>
-        <p:txBody>
-          <a:bodyPr wrap="square" lIns="0" tIns="0" rIns="0" bIns="0" rtlCol="0" anchor="t"/>
-          <a:lstStyle/>
-          <a:p>
-            <a:pPr indent="0" marL="0">
-              <a:buNone/>
+              <a:t>Samotná push je slabá (0 až +1 p. b.); aplikace má smysl jako </a:t>
+            </a:r>
+            <a:r>
+              <a:rPr lang="en-US" sz="1500" b="1" dirty="0">
+                <a:solidFill>
+                  <a:schemeClr val="tx1"/>
+                </a:solidFill>
+              </a:rPr>
+              <a:t>levný kanál pro předrezervaci a navigaci</a:t>
+            </a:r>
+            <a:r>
+              <a:rPr lang="en-US" sz="1500" dirty="0">
+                <a:solidFill>
+                  <a:schemeClr val="tx1"/>
+                </a:solidFill>
+              </a:rPr>
+              <a:t> a jako </a:t>
+            </a:r>
+            <a:r>
+              <a:rPr lang="en-US" sz="1500" b="1" dirty="0">
+                <a:solidFill>
+                  <a:schemeClr val="tx1"/>
+                </a:solidFill>
+              </a:rPr>
+              <a:t>zdroj důvodů neúčasti</a:t>
+            </a:r>
+            <a:r>
+              <a:rPr lang="en-US" sz="1500" dirty="0">
+                <a:solidFill>
+                  <a:schemeClr val="tx1"/>
+                </a:solidFill>
+              </a:rPr>
+              <a:t>.</a:t>
+            </a:r>
+            <a:endParaRPr lang="en-US" sz="1500" dirty="0"/>
+          </a:p>
+          <a:p>
+            <a:pPr marL="228600" indent="-228600">
+              <a:spcAft>
+                <a:spcPts val="800"/>
+              </a:spcAft>
+              <a:buSzPct val="100000"/>
+              <a:buChar char="•"/>
             </a:pPr>
             <a:r>
-              <a:rPr lang="en-US" sz="1900" dirty="0">
-                <a:solidFill>
-                  <a:schemeClr val="bg1"/>
+              <a:rPr lang="en-US" sz="1500" dirty="0">
+                <a:solidFill>
+                  <a:schemeClr val="tx1"/>
                 </a:solidFill>
               </a:rPr>
-              <a:t>Účast do 12 měsíců u pozvánek z konce roku 2023 se pozoruje až v roce 2024. Přísně oddělené učení by muselo končit rokem 2022.</a:t>
-            </a:r>
-            <a:endParaRPr lang="en-US" sz="1900" dirty="0"/>
-          </a:p>
-        </p:txBody>
-      </p:sp>
-      <p:sp>
-        <p:nvSpPr>
-          <p:cNvPr id="9" name="omezeni_4"/>
-          <p:cNvSpPr/>
-          <p:nvPr/>
-        </p:nvSpPr>
-        <p:spPr>
-          <a:xfrm>
-            <a:off x="6233008" y="3840480"/>
-            <a:ext cx="5410048" cy="2331720"/>
-          </a:xfrm>
-          <a:prstGeom prst="roundRect">
-            <a:avLst>
-              <a:gd name="adj" fmla="val 3137"/>
-            </a:avLst>
-          </a:prstGeom>
-          <a:solidFill>
-            <a:schemeClr val="bg1">
-              <a:alpha val="12000"/>
-            </a:schemeClr>
-          </a:solidFill>
-          <a:ln/>
-        </p:spPr>
-      </p:sp>
-      <p:sp>
-        <p:nvSpPr>
-          <p:cNvPr id="10" name="omezeni_4_text"/>
-          <p:cNvSpPr txBox="1"/>
-          <p:nvPr/>
-        </p:nvSpPr>
-        <p:spPr>
-          <a:xfrm>
-            <a:off x="6507328" y="4069080"/>
-            <a:ext cx="4861408" cy="1874520"/>
-          </a:xfrm>
-          <a:prstGeom prst="rect">
-            <a:avLst/>
-          </a:prstGeom>
-          <a:noFill/>
-          <a:ln/>
-        </p:spPr>
-        <p:txBody>
-          <a:bodyPr wrap="square" lIns="0" tIns="0" rIns="0" bIns="0" rtlCol="0" anchor="t"/>
-          <a:lstStyle/>
-          <a:p>
-            <a:pPr indent="0" marL="0">
-              <a:buNone/>
-            </a:pPr>
-            <a:r>
-              <a:rPr lang="en-US" sz="1900" dirty="0">
-                <a:solidFill>
-                  <a:schemeClr val="bg1"/>
-                </a:solidFill>
-              </a:rPr>
-              <a:t>V datech nejsou nově pojištěné ženy ani ženy 75+. Územní pracoviště není okres.</a:t>
-            </a:r>
-            <a:endParaRPr lang="en-US" sz="1900" dirty="0"/>
+              <a:t>Výsledky platí jen pro uživatelky aplikace; nejtěžší segmenty zastihne nejméně.</a:t>
+            </a:r>
+            <a:endParaRPr lang="en-US" sz="1500" dirty="0"/>
           </a:p>
         </p:txBody>
       </p:sp>
@@ -7392,7 +9015,7 @@
             <a:lvl1pPr>
               <a:defRPr sz="1000">
                 <a:solidFill>
-                  <a:schemeClr val="accent3"/>
+                  <a:schemeClr val="accent4"/>
                 </a:solidFill>
               </a:defRPr>
             </a:lvl1pPr>
@@ -7401,7 +9024,371 @@
             <a:pPr algn="r"/>
             <a:fld id="{F7021451-1387-4CA6-816F-3879F97B5CBC}" type="slidenum">
               <a:rPr b="0" lang="en-US"/>
-              <a:t>14</a:t>
+              <a:t>15</a:t>
+            </a:fld>
+            <a:endParaRPr lang="en-US"/>
+          </a:p>
+        </p:txBody>
+      </p:sp>
+    </p:spTree>
+  </p:cSld>
+  <p:clrMapOvr>
+    <a:masterClrMapping/>
+  </p:clrMapOvr>
+</p:sld>
+</file>
+
+<file path=ppt/slides/slide16.xml><?xml version="1.0" encoding="utf-8"?>
+<p:sld xmlns:a="http://schemas.openxmlformats.org/drawingml/2006/main" xmlns:r="http://schemas.openxmlformats.org/officeDocument/2006/relationships" xmlns:p="http://schemas.openxmlformats.org/presentationml/2006/main">
+  <p:cSld name="Slide 16">
+    <p:spTree>
+      <p:nvGrpSpPr>
+        <p:cNvPr id="1" name=""/>
+        <p:cNvGrpSpPr/>
+        <p:nvPr/>
+      </p:nvGrpSpPr>
+      <p:grpSpPr>
+        <a:xfrm>
+          <a:off x="0" y="0"/>
+          <a:ext cx="0" cy="0"/>
+          <a:chOff x="0" y="0"/>
+          <a:chExt cx="0" cy="0"/>
+        </a:xfrm>
+      </p:grpSpPr>
+      <p:sp>
+        <p:nvSpPr>
+          <p:cNvPr id="2" name="Text 0"/>
+          <p:cNvSpPr/>
+          <p:nvPr>
+            <p:ph idx="100" type="title" hasCustomPrompt="1"/>
+          </p:nvPr>
+        </p:nvSpPr>
+        <p:spPr>
+          <a:xfrm>
+            <a:off x="548640" y="320040"/>
+            <a:ext cx="11094415" cy="731520"/>
+          </a:xfrm>
+          <a:prstGeom prst="rect">
+            <a:avLst/>
+          </a:prstGeom>
+          <a:noFill/>
+          <a:ln/>
+        </p:spPr>
+        <p:txBody>
+          <a:bodyPr wrap="square" lIns="0" tIns="0" rIns="0" bIns="0" rtlCol="0" anchor="ctr"/>
+          <a:lstStyle/>
+          <a:p>
+            <a:pPr algn="l" indent="0" marL="0">
+              <a:buNone/>
+            </a:pPr>
+            <a:r>
+              <a:rPr lang="en-US" sz="3000" b="1" dirty="0">
+                <a:solidFill>
+                  <a:schemeClr val="bg1"/>
+                </a:solidFill>
+              </a:rPr>
+              <a:t>Omezení</a:t>
+            </a:r>
+            <a:endParaRPr lang="en-US" sz="3000" dirty="0"/>
+          </a:p>
+        </p:txBody>
+      </p:sp>
+      <p:sp>
+        <p:nvSpPr>
+          <p:cNvPr id="3" name="omezeni_1"/>
+          <p:cNvSpPr/>
+          <p:nvPr/>
+        </p:nvSpPr>
+        <p:spPr>
+          <a:xfrm>
+            <a:off x="548640" y="1234440"/>
+            <a:ext cx="5410048" cy="2331720"/>
+          </a:xfrm>
+          <a:prstGeom prst="roundRect">
+            <a:avLst>
+              <a:gd name="adj" fmla="val 3137"/>
+            </a:avLst>
+          </a:prstGeom>
+          <a:solidFill>
+            <a:schemeClr val="bg1">
+              <a:alpha val="12000"/>
+            </a:schemeClr>
+          </a:solidFill>
+          <a:ln/>
+        </p:spPr>
+      </p:sp>
+      <p:sp>
+        <p:nvSpPr>
+          <p:cNvPr id="4" name="omezeni_1_text"/>
+          <p:cNvSpPr txBox="1"/>
+          <p:nvPr/>
+        </p:nvSpPr>
+        <p:spPr>
+          <a:xfrm>
+            <a:off x="822960" y="1463040"/>
+            <a:ext cx="4861408" cy="1874520"/>
+          </a:xfrm>
+          <a:prstGeom prst="rect">
+            <a:avLst/>
+          </a:prstGeom>
+          <a:noFill/>
+          <a:ln/>
+        </p:spPr>
+        <p:txBody>
+          <a:bodyPr wrap="square" lIns="0" tIns="0" rIns="0" bIns="0" rtlCol="0" anchor="t"/>
+          <a:lstStyle/>
+          <a:p>
+            <a:pPr indent="0" marL="0">
+              <a:buNone/>
+            </a:pPr>
+            <a:r>
+              <a:rPr lang="en-US" sz="1900" dirty="0">
+                <a:solidFill>
+                  <a:schemeClr val="bg1"/>
+                </a:solidFill>
+              </a:rPr>
+              <a:t>Segmenty popisují, </a:t>
+            </a:r>
+            <a:r>
+              <a:rPr lang="en-US" sz="1900" b="1" dirty="0">
+                <a:solidFill>
+                  <a:schemeClr val="bg1"/>
+                </a:solidFill>
+              </a:rPr>
+              <a:t>kdo přijde, ne kdo přijde díky intervenci</a:t>
+            </a:r>
+            <a:r>
+              <a:rPr lang="en-US" sz="1900" dirty="0">
+                <a:solidFill>
+                  <a:schemeClr val="bg1"/>
+                </a:solidFill>
+              </a:rPr>
+              <a:t>. Páky jsou hypotézy pro experiment.</a:t>
+            </a:r>
+            <a:endParaRPr lang="en-US" sz="1900" dirty="0"/>
+          </a:p>
+        </p:txBody>
+      </p:sp>
+      <p:sp>
+        <p:nvSpPr>
+          <p:cNvPr id="5" name="omezeni_2"/>
+          <p:cNvSpPr/>
+          <p:nvPr/>
+        </p:nvSpPr>
+        <p:spPr>
+          <a:xfrm>
+            <a:off x="6233008" y="1234440"/>
+            <a:ext cx="5410048" cy="2331720"/>
+          </a:xfrm>
+          <a:prstGeom prst="roundRect">
+            <a:avLst>
+              <a:gd name="adj" fmla="val 3137"/>
+            </a:avLst>
+          </a:prstGeom>
+          <a:solidFill>
+            <a:schemeClr val="bg1">
+              <a:alpha val="12000"/>
+            </a:schemeClr>
+          </a:solidFill>
+          <a:ln/>
+        </p:spPr>
+      </p:sp>
+      <p:sp>
+        <p:nvSpPr>
+          <p:cNvPr id="6" name="omezeni_2_text"/>
+          <p:cNvSpPr txBox="1"/>
+          <p:nvPr/>
+        </p:nvSpPr>
+        <p:spPr>
+          <a:xfrm>
+            <a:off x="6507328" y="1463040"/>
+            <a:ext cx="4861408" cy="1874520"/>
+          </a:xfrm>
+          <a:prstGeom prst="rect">
+            <a:avLst/>
+          </a:prstGeom>
+          <a:noFill/>
+          <a:ln/>
+        </p:spPr>
+        <p:txBody>
+          <a:bodyPr wrap="square" lIns="0" tIns="0" rIns="0" bIns="0" rtlCol="0" anchor="t"/>
+          <a:lstStyle/>
+          <a:p>
+            <a:pPr indent="0" marL="0">
+              <a:buNone/>
+            </a:pPr>
+            <a:r>
+              <a:rPr lang="en-US" sz="1900" dirty="0">
+                <a:solidFill>
+                  <a:schemeClr val="bg1"/>
+                </a:solidFill>
+              </a:rPr>
+              <a:t>„Bez screeningu“ = bez kódu za 5 let. Přechod „vypadlá 4–5+ let“ → bez screeningu je zčásti artefakt tohoto okna.</a:t>
+            </a:r>
+            <a:endParaRPr lang="en-US" sz="1900" dirty="0"/>
+          </a:p>
+        </p:txBody>
+      </p:sp>
+      <p:sp>
+        <p:nvSpPr>
+          <p:cNvPr id="7" name="omezeni_3"/>
+          <p:cNvSpPr/>
+          <p:nvPr/>
+        </p:nvSpPr>
+        <p:spPr>
+          <a:xfrm>
+            <a:off x="548640" y="3840480"/>
+            <a:ext cx="5410048" cy="2331720"/>
+          </a:xfrm>
+          <a:prstGeom prst="roundRect">
+            <a:avLst>
+              <a:gd name="adj" fmla="val 3137"/>
+            </a:avLst>
+          </a:prstGeom>
+          <a:solidFill>
+            <a:schemeClr val="bg1">
+              <a:alpha val="12000"/>
+            </a:schemeClr>
+          </a:solidFill>
+          <a:ln/>
+        </p:spPr>
+      </p:sp>
+      <p:sp>
+        <p:nvSpPr>
+          <p:cNvPr id="8" name="omezeni_3_text"/>
+          <p:cNvSpPr txBox="1"/>
+          <p:nvPr/>
+        </p:nvSpPr>
+        <p:spPr>
+          <a:xfrm>
+            <a:off x="822960" y="4069080"/>
+            <a:ext cx="4861408" cy="1874520"/>
+          </a:xfrm>
+          <a:prstGeom prst="rect">
+            <a:avLst/>
+          </a:prstGeom>
+          <a:noFill/>
+          <a:ln/>
+        </p:spPr>
+        <p:txBody>
+          <a:bodyPr wrap="square" lIns="0" tIns="0" rIns="0" bIns="0" rtlCol="0" anchor="t"/>
+          <a:lstStyle/>
+          <a:p>
+            <a:pPr indent="0" marL="0">
+              <a:buNone/>
+            </a:pPr>
+            <a:r>
+              <a:rPr lang="en-US" sz="1900" dirty="0">
+                <a:solidFill>
+                  <a:schemeClr val="bg1"/>
+                </a:solidFill>
+              </a:rPr>
+              <a:t>Účast do 12 měsíců u pozvánek z konce roku 2023 se pozoruje až v roce 2024. Přísně oddělené učení by muselo končit rokem 2022.</a:t>
+            </a:r>
+            <a:endParaRPr lang="en-US" sz="1900" dirty="0"/>
+          </a:p>
+        </p:txBody>
+      </p:sp>
+      <p:sp>
+        <p:nvSpPr>
+          <p:cNvPr id="9" name="omezeni_4"/>
+          <p:cNvSpPr/>
+          <p:nvPr/>
+        </p:nvSpPr>
+        <p:spPr>
+          <a:xfrm>
+            <a:off x="6233008" y="3840480"/>
+            <a:ext cx="5410048" cy="2331720"/>
+          </a:xfrm>
+          <a:prstGeom prst="roundRect">
+            <a:avLst>
+              <a:gd name="adj" fmla="val 3137"/>
+            </a:avLst>
+          </a:prstGeom>
+          <a:solidFill>
+            <a:schemeClr val="bg1">
+              <a:alpha val="12000"/>
+            </a:schemeClr>
+          </a:solidFill>
+          <a:ln/>
+        </p:spPr>
+      </p:sp>
+      <p:sp>
+        <p:nvSpPr>
+          <p:cNvPr id="10" name="omezeni_4_text"/>
+          <p:cNvSpPr txBox="1"/>
+          <p:nvPr/>
+        </p:nvSpPr>
+        <p:spPr>
+          <a:xfrm>
+            <a:off x="6507328" y="4069080"/>
+            <a:ext cx="4861408" cy="1874520"/>
+          </a:xfrm>
+          <a:prstGeom prst="rect">
+            <a:avLst/>
+          </a:prstGeom>
+          <a:noFill/>
+          <a:ln/>
+        </p:spPr>
+        <p:txBody>
+          <a:bodyPr wrap="square" lIns="0" tIns="0" rIns="0" bIns="0" rtlCol="0" anchor="t"/>
+          <a:lstStyle/>
+          <a:p>
+            <a:pPr indent="0" marL="0">
+              <a:buNone/>
+            </a:pPr>
+            <a:r>
+              <a:rPr lang="en-US" sz="1900" dirty="0">
+                <a:solidFill>
+                  <a:schemeClr val="bg1"/>
+                </a:solidFill>
+              </a:rPr>
+              <a:t>V datech nejsou nově pojištěné ženy ani ženy 75+. Územní pracoviště není okres.</a:t>
+            </a:r>
+            <a:endParaRPr lang="en-US" sz="1900" dirty="0"/>
+          </a:p>
+        </p:txBody>
+      </p:sp>
+      <p:sp>
+        <p:nvSpPr>
+          <p:cNvPr id="25" name="Slide Number Placeholder 0"/>
+          <p:cNvSpPr>
+            <a:spLocks noGrp="1"/>
+          </p:cNvSpPr>
+          <p:nvPr>
+            <p:ph type="sldNum" sz="quarter" idx="4294967295"/>
+          </p:nvPr>
+        </p:nvSpPr>
+        <p:spPr>
+          <a:xfrm>
+            <a:off x="11094415" y="6446520"/>
+            <a:ext cx="548640" cy="274320"/>
+          </a:xfrm>
+          <a:prstGeom prst="rect">
+            <a:avLst/>
+          </a:prstGeom>
+          <a:extLst>
+            <a:ext uri="{C572A759-6A51-4108-AA02-DFA0A04FC94B}">
+              <ma14:wrappingTextBoxFlag xmlns:ma14="http://schemas.microsoft.com/office/mac/drawingml/2011/main" val="0"/>
+            </a:ext>
+          </a:extLst>
+        </p:spPr>
+        <p:txBody>
+          <a:bodyPr/>
+          <a:lstStyle>
+            <a:lvl1pPr>
+              <a:defRPr sz="1000">
+                <a:solidFill>
+                  <a:schemeClr val="accent3"/>
+                </a:solidFill>
+              </a:defRPr>
+            </a:lvl1pPr>
+          </a:lstStyle>
+          <a:p>
+            <a:pPr algn="r"/>
+            <a:fld id="{F7021451-1387-4CA6-816F-3879F97B5CBC}" type="slidenum">
+              <a:rPr b="0" lang="en-US"/>
+              <a:t>16</a:t>
             </a:fld>
             <a:endParaRPr lang="en-US"/>
           </a:p>
@@ -8137,7 +10124,7 @@
       </p:sp>
       <p:pic>
         <p:nvPicPr>
-          <p:cNvPr id="3" name="strom_segmentu.png" descr="C:\Users\vittu\src\mamograf-data-exploration\docs\vzp_segmentace\strom_segmentu.png">    </p:cNvPr>
+          <p:cNvPr id="3" name="strom_segmentu.png" descr="C:\Users\vittu\src\mamograf-vzp\docs\vzp_segmentace\strom_segmentu.png">    </p:cNvPr>
           <p:cNvPicPr>
             <a:picLocks noChangeAspect="1"/>
           </p:cNvPicPr>
@@ -8459,7 +10446,7 @@
       </p:sp>
       <p:pic>
         <p:nvPicPr>
-          <p:cNvPr id="3" name="segmenty_predikce_2024.png" descr="C:\Users\vittu\src\mamograf-data-exploration\docs\vzp_segmentace\segmenty_predikce_2024.png">    </p:cNvPr>
+          <p:cNvPr id="3" name="segmenty_predikce_2024.png" descr="C:\Users\vittu\src\mamograf-vzp\docs\vzp_segmentace\segmenty_predikce_2024.png">    </p:cNvPr>
           <p:cNvPicPr>
             <a:picLocks noChangeAspect="1"/>
           </p:cNvPicPr>
@@ -9243,7 +11230,7 @@
                   <a:schemeClr val="accent1"/>
                 </a:solidFill>
               </a:rPr>
-              <a:t>Kde jsou ženy, které nepřišly (2024: 207 tisíc)</a:t>
+              <a:t>Výkon segmentačního modelu podrobněji</a:t>
             </a:r>
             <a:endParaRPr lang="en-US" sz="3000" dirty="0"/>
           </a:p>
@@ -9251,7 +11238,7 @@
       </p:sp>
       <p:pic>
         <p:nvPicPr>
-          <p:cNvPr id="3" name="segmenty_mapa.png" descr="C:\Users\vittu\src\mamograf-data-exploration\docs\vzp_segmentace\segmenty_mapa.png">    </p:cNvPr>
+          <p:cNvPr id="3" name="segmenty_vykon.png" descr="C:\Users\vittu\src\mamograf-vzp\docs\vzp_segmentace\segmenty_vykon.png">    </p:cNvPr>
           <p:cNvPicPr>
             <a:picLocks noChangeAspect="1"/>
           </p:cNvPicPr>
@@ -9266,23 +11253,1542 @@
         <p:spPr>
           <a:xfrm>
             <a:off x="548640" y="1234440"/>
-            <a:ext cx="6675120" cy="4121914"/>
+            <a:ext cx="5990120" cy="5120640"/>
           </a:xfrm>
           <a:prstGeom prst="rect">
             <a:avLst/>
           </a:prstGeom>
         </p:spPr>
       </p:pic>
-      <p:sp>
-        <p:nvSpPr>
-          <p:cNvPr id="4" name="body"/>
+      <p:graphicFrame>
+        <p:nvGraphicFramePr>
+          <p:cNvPr id="6" name="tabulka_vykon"/>
+          <p:cNvGraphicFramePr>
+            <a:graphicFrameLocks noGrp="1"/>
+          </p:cNvGraphicFramePr>
+          <p:nvPr>
+            <p:extLst>
+              <p:ext uri="{D42A27DB-BD31-4B8C-83A1-F6EECF244321}">
+                <p14:modId xmlns:p14="http://schemas.microsoft.com/office/powerpoint/2010/main" val="1579011935"/>
+              </p:ext>
+            </p:extLst>
+          </p:nvPr>
+        </p:nvGraphicFramePr>
+        <p:xfrm>
+          <a:off x="6858800" y="1234440"/>
+          <a:ext cx="4784255" cy="914400"/>
+        </p:xfrm>
+        <a:graphic>
+          <a:graphicData uri="http://schemas.openxmlformats.org/drawingml/2006/table">
+            <a:tbl>
+              <a:tblPr/>
+              <a:tblGrid>
+                <a:gridCol w="2406815"/>
+                <a:gridCol w="1280160"/>
+                <a:gridCol w="1097280"/>
+              </a:tblGrid>
+              <a:tr h="0">
+                <a:tc>
+                  <a:txBody>
+                    <a:bodyPr/>
+                    <a:lstStyle/>
+                    <a:p>
+                      <a:pPr indent="0" marL="0">
+                        <a:buNone/>
+                      </a:pPr>
+                      <a:r>
+                        <a:rPr lang="en-US" sz="1200" b="1" dirty="0">
+                          <a:solidFill>
+                            <a:schemeClr val="bg1"/>
+                          </a:solidFill>
+                        </a:rPr>
+                        <a:t>2024, do 12 měsíců</a:t>
+                      </a:r>
+                      <a:endParaRPr lang="en-US" sz="1200" dirty="0"/>
+                    </a:p>
+                  </a:txBody>
+                  <a:tcPr marL="45720" marR="45720" marT="45720" marB="45720" anchor="ctr">
+                    <a:lnL w="6350" cap="flat" cmpd="sng" algn="ctr">
+                      <a:solidFill>
+                        <a:srgbClr val="D9C4CD"/>
+                      </a:solidFill>
+                      <a:prstDash val="solid"/>
+                      <a:round/>
+                      <a:headEnd type="none" w="med" len="med"/>
+                      <a:tailEnd type="none" w="med" len="med"/>
+                    </a:lnL>
+                    <a:lnR w="6350" cap="flat" cmpd="sng" algn="ctr">
+                      <a:solidFill>
+                        <a:srgbClr val="D9C4CD"/>
+                      </a:solidFill>
+                      <a:prstDash val="solid"/>
+                      <a:round/>
+                      <a:headEnd type="none" w="med" len="med"/>
+                      <a:tailEnd type="none" w="med" len="med"/>
+                    </a:lnR>
+                    <a:lnT w="6350" cap="flat" cmpd="sng" algn="ctr">
+                      <a:solidFill>
+                        <a:srgbClr val="D9C4CD"/>
+                      </a:solidFill>
+                      <a:prstDash val="solid"/>
+                      <a:round/>
+                      <a:headEnd type="none" w="med" len="med"/>
+                      <a:tailEnd type="none" w="med" len="med"/>
+                    </a:lnT>
+                    <a:lnB w="6350" cap="flat" cmpd="sng" algn="ctr">
+                      <a:solidFill>
+                        <a:srgbClr val="D9C4CD"/>
+                      </a:solidFill>
+                      <a:prstDash val="solid"/>
+                      <a:round/>
+                      <a:headEnd type="none" w="med" len="med"/>
+                      <a:tailEnd type="none" w="med" len="med"/>
+                    </a:lnB>
+                    <a:solidFill>
+                      <a:schemeClr val="accent1"/>
+                    </a:solidFill>
+                  </a:tcPr>
+                </a:tc>
+                <a:tc>
+                  <a:txBody>
+                    <a:bodyPr/>
+                    <a:lstStyle/>
+                    <a:p>
+                      <a:pPr indent="0" marL="0">
+                        <a:buNone/>
+                      </a:pPr>
+                      <a:r>
+                        <a:rPr lang="en-US" sz="1200" b="1" dirty="0">
+                          <a:solidFill>
+                            <a:schemeClr val="bg1"/>
+                          </a:solidFill>
+                        </a:rPr>
+                        <a:t>11 segmentů</a:t>
+                      </a:r>
+                      <a:endParaRPr lang="en-US" sz="1200" dirty="0"/>
+                    </a:p>
+                  </a:txBody>
+                  <a:tcPr marL="45720" marR="45720" marT="45720" marB="45720" anchor="ctr">
+                    <a:lnL w="6350" cap="flat" cmpd="sng" algn="ctr">
+                      <a:solidFill>
+                        <a:srgbClr val="D9C4CD"/>
+                      </a:solidFill>
+                      <a:prstDash val="solid"/>
+                      <a:round/>
+                      <a:headEnd type="none" w="med" len="med"/>
+                      <a:tailEnd type="none" w="med" len="med"/>
+                    </a:lnL>
+                    <a:lnR w="6350" cap="flat" cmpd="sng" algn="ctr">
+                      <a:solidFill>
+                        <a:srgbClr val="D9C4CD"/>
+                      </a:solidFill>
+                      <a:prstDash val="solid"/>
+                      <a:round/>
+                      <a:headEnd type="none" w="med" len="med"/>
+                      <a:tailEnd type="none" w="med" len="med"/>
+                    </a:lnR>
+                    <a:lnT w="6350" cap="flat" cmpd="sng" algn="ctr">
+                      <a:solidFill>
+                        <a:srgbClr val="D9C4CD"/>
+                      </a:solidFill>
+                      <a:prstDash val="solid"/>
+                      <a:round/>
+                      <a:headEnd type="none" w="med" len="med"/>
+                      <a:tailEnd type="none" w="med" len="med"/>
+                    </a:lnT>
+                    <a:lnB w="6350" cap="flat" cmpd="sng" algn="ctr">
+                      <a:solidFill>
+                        <a:srgbClr val="D9C4CD"/>
+                      </a:solidFill>
+                      <a:prstDash val="solid"/>
+                      <a:round/>
+                      <a:headEnd type="none" w="med" len="med"/>
+                      <a:tailEnd type="none" w="med" len="med"/>
+                    </a:lnB>
+                    <a:solidFill>
+                      <a:schemeClr val="accent1"/>
+                    </a:solidFill>
+                  </a:tcPr>
+                </a:tc>
+                <a:tc>
+                  <a:txBody>
+                    <a:bodyPr/>
+                    <a:lstStyle/>
+                    <a:p>
+                      <a:pPr indent="0" marL="0">
+                        <a:buNone/>
+                      </a:pPr>
+                      <a:r>
+                        <a:rPr lang="en-US" sz="1200" b="1" dirty="0">
+                          <a:solidFill>
+                            <a:schemeClr val="bg1"/>
+                          </a:solidFill>
+                        </a:rPr>
+                        <a:t>model hazardu</a:t>
+                      </a:r>
+                      <a:endParaRPr lang="en-US" sz="1200" dirty="0"/>
+                    </a:p>
+                  </a:txBody>
+                  <a:tcPr marL="45720" marR="45720" marT="45720" marB="45720" anchor="ctr">
+                    <a:lnL w="6350" cap="flat" cmpd="sng" algn="ctr">
+                      <a:solidFill>
+                        <a:srgbClr val="D9C4CD"/>
+                      </a:solidFill>
+                      <a:prstDash val="solid"/>
+                      <a:round/>
+                      <a:headEnd type="none" w="med" len="med"/>
+                      <a:tailEnd type="none" w="med" len="med"/>
+                    </a:lnL>
+                    <a:lnR w="6350" cap="flat" cmpd="sng" algn="ctr">
+                      <a:solidFill>
+                        <a:srgbClr val="D9C4CD"/>
+                      </a:solidFill>
+                      <a:prstDash val="solid"/>
+                      <a:round/>
+                      <a:headEnd type="none" w="med" len="med"/>
+                      <a:tailEnd type="none" w="med" len="med"/>
+                    </a:lnR>
+                    <a:lnT w="6350" cap="flat" cmpd="sng" algn="ctr">
+                      <a:solidFill>
+                        <a:srgbClr val="D9C4CD"/>
+                      </a:solidFill>
+                      <a:prstDash val="solid"/>
+                      <a:round/>
+                      <a:headEnd type="none" w="med" len="med"/>
+                      <a:tailEnd type="none" w="med" len="med"/>
+                    </a:lnT>
+                    <a:lnB w="6350" cap="flat" cmpd="sng" algn="ctr">
+                      <a:solidFill>
+                        <a:srgbClr val="D9C4CD"/>
+                      </a:solidFill>
+                      <a:prstDash val="solid"/>
+                      <a:round/>
+                      <a:headEnd type="none" w="med" len="med"/>
+                      <a:tailEnd type="none" w="med" len="med"/>
+                    </a:lnB>
+                    <a:solidFill>
+                      <a:schemeClr val="accent1"/>
+                    </a:solidFill>
+                  </a:tcPr>
+                </a:tc>
+              </a:tr>
+              <a:tr h="0">
+                <a:tc>
+                  <a:txBody>
+                    <a:bodyPr/>
+                    <a:lstStyle/>
+                    <a:p>
+                      <a:pPr indent="0" marL="0">
+                        <a:buNone/>
+                      </a:pPr>
+                      <a:r>
+                        <a:rPr lang="en-US" sz="1200" dirty="0">
+                          <a:solidFill>
+                            <a:schemeClr val="tx1"/>
+                          </a:solidFill>
+                        </a:rPr>
+                        <a:t>AUROC (95% interval)</a:t>
+                      </a:r>
+                      <a:endParaRPr lang="en-US" sz="1200" dirty="0"/>
+                    </a:p>
+                  </a:txBody>
+                  <a:tcPr marL="45720" marR="45720" marT="45720" marB="45720" anchor="ctr">
+                    <a:lnL w="6350" cap="flat" cmpd="sng" algn="ctr">
+                      <a:solidFill>
+                        <a:srgbClr val="D9C4CD"/>
+                      </a:solidFill>
+                      <a:prstDash val="solid"/>
+                      <a:round/>
+                      <a:headEnd type="none" w="med" len="med"/>
+                      <a:tailEnd type="none" w="med" len="med"/>
+                    </a:lnL>
+                    <a:lnR w="6350" cap="flat" cmpd="sng" algn="ctr">
+                      <a:solidFill>
+                        <a:srgbClr val="D9C4CD"/>
+                      </a:solidFill>
+                      <a:prstDash val="solid"/>
+                      <a:round/>
+                      <a:headEnd type="none" w="med" len="med"/>
+                      <a:tailEnd type="none" w="med" len="med"/>
+                    </a:lnR>
+                    <a:lnT w="6350" cap="flat" cmpd="sng" algn="ctr">
+                      <a:solidFill>
+                        <a:srgbClr val="D9C4CD"/>
+                      </a:solidFill>
+                      <a:prstDash val="solid"/>
+                      <a:round/>
+                      <a:headEnd type="none" w="med" len="med"/>
+                      <a:tailEnd type="none" w="med" len="med"/>
+                    </a:lnT>
+                    <a:lnB w="6350" cap="flat" cmpd="sng" algn="ctr">
+                      <a:solidFill>
+                        <a:srgbClr val="D9C4CD"/>
+                      </a:solidFill>
+                      <a:prstDash val="solid"/>
+                      <a:round/>
+                      <a:headEnd type="none" w="med" len="med"/>
+                      <a:tailEnd type="none" w="med" len="med"/>
+                    </a:lnB>
+                    <a:solidFill>
+                      <a:schemeClr val="bg2"/>
+                    </a:solidFill>
+                  </a:tcPr>
+                </a:tc>
+                <a:tc>
+                  <a:txBody>
+                    <a:bodyPr/>
+                    <a:lstStyle/>
+                    <a:p>
+                      <a:pPr indent="0" marL="0">
+                        <a:buNone/>
+                      </a:pPr>
+                      <a:r>
+                        <a:rPr lang="en-US" sz="1200" b="1" dirty="0">
+                          <a:solidFill>
+                            <a:schemeClr val="tx1"/>
+                          </a:solidFill>
+                        </a:rPr>
+                        <a:t>0,807</a:t>
+                      </a:r>
+                      <a:r>
+                        <a:rPr lang="en-US" sz="1200" dirty="0">
+                          <a:solidFill>
+                            <a:schemeClr val="tx1"/>
+                          </a:solidFill>
+                        </a:rPr>
+                        <a:t> (±0,002)</a:t>
+                      </a:r>
+                      <a:endParaRPr lang="en-US" sz="1200" dirty="0"/>
+                    </a:p>
+                  </a:txBody>
+                  <a:tcPr marL="45720" marR="45720" marT="45720" marB="45720" anchor="ctr">
+                    <a:lnL w="6350" cap="flat" cmpd="sng" algn="ctr">
+                      <a:solidFill>
+                        <a:srgbClr val="D9C4CD"/>
+                      </a:solidFill>
+                      <a:prstDash val="solid"/>
+                      <a:round/>
+                      <a:headEnd type="none" w="med" len="med"/>
+                      <a:tailEnd type="none" w="med" len="med"/>
+                    </a:lnL>
+                    <a:lnR w="6350" cap="flat" cmpd="sng" algn="ctr">
+                      <a:solidFill>
+                        <a:srgbClr val="D9C4CD"/>
+                      </a:solidFill>
+                      <a:prstDash val="solid"/>
+                      <a:round/>
+                      <a:headEnd type="none" w="med" len="med"/>
+                      <a:tailEnd type="none" w="med" len="med"/>
+                    </a:lnR>
+                    <a:lnT w="6350" cap="flat" cmpd="sng" algn="ctr">
+                      <a:solidFill>
+                        <a:srgbClr val="D9C4CD"/>
+                      </a:solidFill>
+                      <a:prstDash val="solid"/>
+                      <a:round/>
+                      <a:headEnd type="none" w="med" len="med"/>
+                      <a:tailEnd type="none" w="med" len="med"/>
+                    </a:lnT>
+                    <a:lnB w="6350" cap="flat" cmpd="sng" algn="ctr">
+                      <a:solidFill>
+                        <a:srgbClr val="D9C4CD"/>
+                      </a:solidFill>
+                      <a:prstDash val="solid"/>
+                      <a:round/>
+                      <a:headEnd type="none" w="med" len="med"/>
+                      <a:tailEnd type="none" w="med" len="med"/>
+                    </a:lnB>
+                    <a:solidFill>
+                      <a:schemeClr val="bg2"/>
+                    </a:solidFill>
+                  </a:tcPr>
+                </a:tc>
+                <a:tc>
+                  <a:txBody>
+                    <a:bodyPr/>
+                    <a:lstStyle/>
+                    <a:p>
+                      <a:pPr indent="0" marL="0">
+                        <a:buNone/>
+                      </a:pPr>
+                      <a:r>
+                        <a:rPr lang="en-US" sz="1200" dirty="0">
+                          <a:solidFill>
+                            <a:schemeClr val="tx1"/>
+                          </a:solidFill>
+                        </a:rPr>
+                        <a:t>0,837 (±0,002)</a:t>
+                      </a:r>
+                      <a:endParaRPr lang="en-US" sz="1200" dirty="0"/>
+                    </a:p>
+                  </a:txBody>
+                  <a:tcPr marL="45720" marR="45720" marT="45720" marB="45720" anchor="ctr">
+                    <a:lnL w="6350" cap="flat" cmpd="sng" algn="ctr">
+                      <a:solidFill>
+                        <a:srgbClr val="D9C4CD"/>
+                      </a:solidFill>
+                      <a:prstDash val="solid"/>
+                      <a:round/>
+                      <a:headEnd type="none" w="med" len="med"/>
+                      <a:tailEnd type="none" w="med" len="med"/>
+                    </a:lnL>
+                    <a:lnR w="6350" cap="flat" cmpd="sng" algn="ctr">
+                      <a:solidFill>
+                        <a:srgbClr val="D9C4CD"/>
+                      </a:solidFill>
+                      <a:prstDash val="solid"/>
+                      <a:round/>
+                      <a:headEnd type="none" w="med" len="med"/>
+                      <a:tailEnd type="none" w="med" len="med"/>
+                    </a:lnR>
+                    <a:lnT w="6350" cap="flat" cmpd="sng" algn="ctr">
+                      <a:solidFill>
+                        <a:srgbClr val="D9C4CD"/>
+                      </a:solidFill>
+                      <a:prstDash val="solid"/>
+                      <a:round/>
+                      <a:headEnd type="none" w="med" len="med"/>
+                      <a:tailEnd type="none" w="med" len="med"/>
+                    </a:lnT>
+                    <a:lnB w="6350" cap="flat" cmpd="sng" algn="ctr">
+                      <a:solidFill>
+                        <a:srgbClr val="D9C4CD"/>
+                      </a:solidFill>
+                      <a:prstDash val="solid"/>
+                      <a:round/>
+                      <a:headEnd type="none" w="med" len="med"/>
+                      <a:tailEnd type="none" w="med" len="med"/>
+                    </a:lnB>
+                    <a:solidFill>
+                      <a:schemeClr val="bg2"/>
+                    </a:solidFill>
+                  </a:tcPr>
+                </a:tc>
+              </a:tr>
+              <a:tr h="0">
+                <a:tc>
+                  <a:txBody>
+                    <a:bodyPr/>
+                    <a:lstStyle/>
+                    <a:p>
+                      <a:pPr indent="0" marL="0">
+                        <a:buNone/>
+                      </a:pPr>
+                      <a:r>
+                        <a:rPr lang="en-US" sz="1200" dirty="0">
+                          <a:solidFill>
+                            <a:schemeClr val="tx1"/>
+                          </a:solidFill>
+                        </a:rPr>
+                        <a:t>AUPRC (bez modelu 0,192)</a:t>
+                      </a:r>
+                      <a:endParaRPr lang="en-US" sz="1200" dirty="0"/>
+                    </a:p>
+                  </a:txBody>
+                  <a:tcPr marL="45720" marR="45720" marT="45720" marB="45720" anchor="ctr">
+                    <a:lnL w="6350" cap="flat" cmpd="sng" algn="ctr">
+                      <a:solidFill>
+                        <a:srgbClr val="D9C4CD"/>
+                      </a:solidFill>
+                      <a:prstDash val="solid"/>
+                      <a:round/>
+                      <a:headEnd type="none" w="med" len="med"/>
+                      <a:tailEnd type="none" w="med" len="med"/>
+                    </a:lnL>
+                    <a:lnR w="6350" cap="flat" cmpd="sng" algn="ctr">
+                      <a:solidFill>
+                        <a:srgbClr val="D9C4CD"/>
+                      </a:solidFill>
+                      <a:prstDash val="solid"/>
+                      <a:round/>
+                      <a:headEnd type="none" w="med" len="med"/>
+                      <a:tailEnd type="none" w="med" len="med"/>
+                    </a:lnR>
+                    <a:lnT w="6350" cap="flat" cmpd="sng" algn="ctr">
+                      <a:solidFill>
+                        <a:srgbClr val="D9C4CD"/>
+                      </a:solidFill>
+                      <a:prstDash val="solid"/>
+                      <a:round/>
+                      <a:headEnd type="none" w="med" len="med"/>
+                      <a:tailEnd type="none" w="med" len="med"/>
+                    </a:lnT>
+                    <a:lnB w="6350" cap="flat" cmpd="sng" algn="ctr">
+                      <a:solidFill>
+                        <a:srgbClr val="D9C4CD"/>
+                      </a:solidFill>
+                      <a:prstDash val="solid"/>
+                      <a:round/>
+                      <a:headEnd type="none" w="med" len="med"/>
+                      <a:tailEnd type="none" w="med" len="med"/>
+                    </a:lnB>
+                    <a:solidFill>
+                      <a:schemeClr val="bg1"/>
+                    </a:solidFill>
+                  </a:tcPr>
+                </a:tc>
+                <a:tc>
+                  <a:txBody>
+                    <a:bodyPr/>
+                    <a:lstStyle/>
+                    <a:p>
+                      <a:pPr indent="0" marL="0">
+                        <a:buNone/>
+                      </a:pPr>
+                      <a:r>
+                        <a:rPr lang="en-US" sz="1200" dirty="0">
+                          <a:solidFill>
+                            <a:schemeClr val="tx1"/>
+                          </a:solidFill>
+                        </a:rPr>
+                        <a:t>0,469</a:t>
+                      </a:r>
+                      <a:endParaRPr lang="en-US" sz="1200" dirty="0"/>
+                    </a:p>
+                  </a:txBody>
+                  <a:tcPr marL="45720" marR="45720" marT="45720" marB="45720" anchor="ctr">
+                    <a:lnL w="6350" cap="flat" cmpd="sng" algn="ctr">
+                      <a:solidFill>
+                        <a:srgbClr val="D9C4CD"/>
+                      </a:solidFill>
+                      <a:prstDash val="solid"/>
+                      <a:round/>
+                      <a:headEnd type="none" w="med" len="med"/>
+                      <a:tailEnd type="none" w="med" len="med"/>
+                    </a:lnL>
+                    <a:lnR w="6350" cap="flat" cmpd="sng" algn="ctr">
+                      <a:solidFill>
+                        <a:srgbClr val="D9C4CD"/>
+                      </a:solidFill>
+                      <a:prstDash val="solid"/>
+                      <a:round/>
+                      <a:headEnd type="none" w="med" len="med"/>
+                      <a:tailEnd type="none" w="med" len="med"/>
+                    </a:lnR>
+                    <a:lnT w="6350" cap="flat" cmpd="sng" algn="ctr">
+                      <a:solidFill>
+                        <a:srgbClr val="D9C4CD"/>
+                      </a:solidFill>
+                      <a:prstDash val="solid"/>
+                      <a:round/>
+                      <a:headEnd type="none" w="med" len="med"/>
+                      <a:tailEnd type="none" w="med" len="med"/>
+                    </a:lnT>
+                    <a:lnB w="6350" cap="flat" cmpd="sng" algn="ctr">
+                      <a:solidFill>
+                        <a:srgbClr val="D9C4CD"/>
+                      </a:solidFill>
+                      <a:prstDash val="solid"/>
+                      <a:round/>
+                      <a:headEnd type="none" w="med" len="med"/>
+                      <a:tailEnd type="none" w="med" len="med"/>
+                    </a:lnB>
+                    <a:solidFill>
+                      <a:schemeClr val="bg1"/>
+                    </a:solidFill>
+                  </a:tcPr>
+                </a:tc>
+                <a:tc>
+                  <a:txBody>
+                    <a:bodyPr/>
+                    <a:lstStyle/>
+                    <a:p>
+                      <a:pPr indent="0" marL="0">
+                        <a:buNone/>
+                      </a:pPr>
+                      <a:r>
+                        <a:rPr lang="en-US" sz="1200" dirty="0">
+                          <a:solidFill>
+                            <a:schemeClr val="tx1"/>
+                          </a:solidFill>
+                        </a:rPr>
+                        <a:t>0,578</a:t>
+                      </a:r>
+                      <a:endParaRPr lang="en-US" sz="1200" dirty="0"/>
+                    </a:p>
+                  </a:txBody>
+                  <a:tcPr marL="45720" marR="45720" marT="45720" marB="45720" anchor="ctr">
+                    <a:lnL w="6350" cap="flat" cmpd="sng" algn="ctr">
+                      <a:solidFill>
+                        <a:srgbClr val="D9C4CD"/>
+                      </a:solidFill>
+                      <a:prstDash val="solid"/>
+                      <a:round/>
+                      <a:headEnd type="none" w="med" len="med"/>
+                      <a:tailEnd type="none" w="med" len="med"/>
+                    </a:lnL>
+                    <a:lnR w="6350" cap="flat" cmpd="sng" algn="ctr">
+                      <a:solidFill>
+                        <a:srgbClr val="D9C4CD"/>
+                      </a:solidFill>
+                      <a:prstDash val="solid"/>
+                      <a:round/>
+                      <a:headEnd type="none" w="med" len="med"/>
+                      <a:tailEnd type="none" w="med" len="med"/>
+                    </a:lnR>
+                    <a:lnT w="6350" cap="flat" cmpd="sng" algn="ctr">
+                      <a:solidFill>
+                        <a:srgbClr val="D9C4CD"/>
+                      </a:solidFill>
+                      <a:prstDash val="solid"/>
+                      <a:round/>
+                      <a:headEnd type="none" w="med" len="med"/>
+                      <a:tailEnd type="none" w="med" len="med"/>
+                    </a:lnT>
+                    <a:lnB w="6350" cap="flat" cmpd="sng" algn="ctr">
+                      <a:solidFill>
+                        <a:srgbClr val="D9C4CD"/>
+                      </a:solidFill>
+                      <a:prstDash val="solid"/>
+                      <a:round/>
+                      <a:headEnd type="none" w="med" len="med"/>
+                      <a:tailEnd type="none" w="med" len="med"/>
+                    </a:lnB>
+                    <a:solidFill>
+                      <a:schemeClr val="bg1"/>
+                    </a:solidFill>
+                  </a:tcPr>
+                </a:tc>
+              </a:tr>
+              <a:tr h="0">
+                <a:tc>
+                  <a:txBody>
+                    <a:bodyPr/>
+                    <a:lstStyle/>
+                    <a:p>
+                      <a:pPr indent="0" marL="0">
+                        <a:buNone/>
+                      </a:pPr>
+                      <a:r>
+                        <a:rPr lang="en-US" sz="1200" dirty="0">
+                          <a:solidFill>
+                            <a:schemeClr val="tx1"/>
+                          </a:solidFill>
+                        </a:rPr>
+                        <a:t>zlepšení Brier score proti „bez modelu“</a:t>
+                      </a:r>
+                      <a:endParaRPr lang="en-US" sz="1200" dirty="0"/>
+                    </a:p>
+                  </a:txBody>
+                  <a:tcPr marL="45720" marR="45720" marT="45720" marB="45720" anchor="ctr">
+                    <a:lnL w="6350" cap="flat" cmpd="sng" algn="ctr">
+                      <a:solidFill>
+                        <a:srgbClr val="D9C4CD"/>
+                      </a:solidFill>
+                      <a:prstDash val="solid"/>
+                      <a:round/>
+                      <a:headEnd type="none" w="med" len="med"/>
+                      <a:tailEnd type="none" w="med" len="med"/>
+                    </a:lnL>
+                    <a:lnR w="6350" cap="flat" cmpd="sng" algn="ctr">
+                      <a:solidFill>
+                        <a:srgbClr val="D9C4CD"/>
+                      </a:solidFill>
+                      <a:prstDash val="solid"/>
+                      <a:round/>
+                      <a:headEnd type="none" w="med" len="med"/>
+                      <a:tailEnd type="none" w="med" len="med"/>
+                    </a:lnR>
+                    <a:lnT w="6350" cap="flat" cmpd="sng" algn="ctr">
+                      <a:solidFill>
+                        <a:srgbClr val="D9C4CD"/>
+                      </a:solidFill>
+                      <a:prstDash val="solid"/>
+                      <a:round/>
+                      <a:headEnd type="none" w="med" len="med"/>
+                      <a:tailEnd type="none" w="med" len="med"/>
+                    </a:lnT>
+                    <a:lnB w="6350" cap="flat" cmpd="sng" algn="ctr">
+                      <a:solidFill>
+                        <a:srgbClr val="D9C4CD"/>
+                      </a:solidFill>
+                      <a:prstDash val="solid"/>
+                      <a:round/>
+                      <a:headEnd type="none" w="med" len="med"/>
+                      <a:tailEnd type="none" w="med" len="med"/>
+                    </a:lnB>
+                    <a:solidFill>
+                      <a:schemeClr val="bg2"/>
+                    </a:solidFill>
+                  </a:tcPr>
+                </a:tc>
+                <a:tc>
+                  <a:txBody>
+                    <a:bodyPr/>
+                    <a:lstStyle/>
+                    <a:p>
+                      <a:pPr indent="0" marL="0">
+                        <a:buNone/>
+                      </a:pPr>
+                      <a:r>
+                        <a:rPr lang="en-US" sz="1200" dirty="0">
+                          <a:solidFill>
+                            <a:schemeClr val="tx1"/>
+                          </a:solidFill>
+                        </a:rPr>
+                        <a:t>22 %</a:t>
+                      </a:r>
+                      <a:endParaRPr lang="en-US" sz="1200" dirty="0"/>
+                    </a:p>
+                  </a:txBody>
+                  <a:tcPr marL="45720" marR="45720" marT="45720" marB="45720" anchor="ctr">
+                    <a:lnL w="6350" cap="flat" cmpd="sng" algn="ctr">
+                      <a:solidFill>
+                        <a:srgbClr val="D9C4CD"/>
+                      </a:solidFill>
+                      <a:prstDash val="solid"/>
+                      <a:round/>
+                      <a:headEnd type="none" w="med" len="med"/>
+                      <a:tailEnd type="none" w="med" len="med"/>
+                    </a:lnL>
+                    <a:lnR w="6350" cap="flat" cmpd="sng" algn="ctr">
+                      <a:solidFill>
+                        <a:srgbClr val="D9C4CD"/>
+                      </a:solidFill>
+                      <a:prstDash val="solid"/>
+                      <a:round/>
+                      <a:headEnd type="none" w="med" len="med"/>
+                      <a:tailEnd type="none" w="med" len="med"/>
+                    </a:lnR>
+                    <a:lnT w="6350" cap="flat" cmpd="sng" algn="ctr">
+                      <a:solidFill>
+                        <a:srgbClr val="D9C4CD"/>
+                      </a:solidFill>
+                      <a:prstDash val="solid"/>
+                      <a:round/>
+                      <a:headEnd type="none" w="med" len="med"/>
+                      <a:tailEnd type="none" w="med" len="med"/>
+                    </a:lnT>
+                    <a:lnB w="6350" cap="flat" cmpd="sng" algn="ctr">
+                      <a:solidFill>
+                        <a:srgbClr val="D9C4CD"/>
+                      </a:solidFill>
+                      <a:prstDash val="solid"/>
+                      <a:round/>
+                      <a:headEnd type="none" w="med" len="med"/>
+                      <a:tailEnd type="none" w="med" len="med"/>
+                    </a:lnB>
+                    <a:solidFill>
+                      <a:schemeClr val="bg2"/>
+                    </a:solidFill>
+                  </a:tcPr>
+                </a:tc>
+                <a:tc>
+                  <a:txBody>
+                    <a:bodyPr/>
+                    <a:lstStyle/>
+                    <a:p>
+                      <a:pPr indent="0" marL="0">
+                        <a:buNone/>
+                      </a:pPr>
+                      <a:r>
+                        <a:rPr lang="en-US" sz="1200" dirty="0">
+                          <a:solidFill>
+                            <a:schemeClr val="tx1"/>
+                          </a:solidFill>
+                        </a:rPr>
+                        <a:t>28 %</a:t>
+                      </a:r>
+                      <a:endParaRPr lang="en-US" sz="1200" dirty="0"/>
+                    </a:p>
+                  </a:txBody>
+                  <a:tcPr marL="45720" marR="45720" marT="45720" marB="45720" anchor="ctr">
+                    <a:lnL w="6350" cap="flat" cmpd="sng" algn="ctr">
+                      <a:solidFill>
+                        <a:srgbClr val="D9C4CD"/>
+                      </a:solidFill>
+                      <a:prstDash val="solid"/>
+                      <a:round/>
+                      <a:headEnd type="none" w="med" len="med"/>
+                      <a:tailEnd type="none" w="med" len="med"/>
+                    </a:lnL>
+                    <a:lnR w="6350" cap="flat" cmpd="sng" algn="ctr">
+                      <a:solidFill>
+                        <a:srgbClr val="D9C4CD"/>
+                      </a:solidFill>
+                      <a:prstDash val="solid"/>
+                      <a:round/>
+                      <a:headEnd type="none" w="med" len="med"/>
+                      <a:tailEnd type="none" w="med" len="med"/>
+                    </a:lnR>
+                    <a:lnT w="6350" cap="flat" cmpd="sng" algn="ctr">
+                      <a:solidFill>
+                        <a:srgbClr val="D9C4CD"/>
+                      </a:solidFill>
+                      <a:prstDash val="solid"/>
+                      <a:round/>
+                      <a:headEnd type="none" w="med" len="med"/>
+                      <a:tailEnd type="none" w="med" len="med"/>
+                    </a:lnT>
+                    <a:lnB w="6350" cap="flat" cmpd="sng" algn="ctr">
+                      <a:solidFill>
+                        <a:srgbClr val="D9C4CD"/>
+                      </a:solidFill>
+                      <a:prstDash val="solid"/>
+                      <a:round/>
+                      <a:headEnd type="none" w="med" len="med"/>
+                      <a:tailEnd type="none" w="med" len="med"/>
+                    </a:lnB>
+                    <a:solidFill>
+                      <a:schemeClr val="bg2"/>
+                    </a:solidFill>
+                  </a:tcPr>
+                </a:tc>
+              </a:tr>
+              <a:tr h="0">
+                <a:tc>
+                  <a:txBody>
+                    <a:bodyPr/>
+                    <a:lstStyle/>
+                    <a:p>
+                      <a:pPr indent="0" marL="0">
+                        <a:buNone/>
+                      </a:pPr>
+                      <a:r>
+                        <a:rPr lang="en-US" sz="1200" dirty="0">
+                          <a:solidFill>
+                            <a:schemeClr val="tx1"/>
+                          </a:solidFill>
+                        </a:rPr>
+                        <a:t>kalibrační sklon (ideál 1)</a:t>
+                      </a:r>
+                      <a:endParaRPr lang="en-US" sz="1200" dirty="0"/>
+                    </a:p>
+                  </a:txBody>
+                  <a:tcPr marL="45720" marR="45720" marT="45720" marB="45720" anchor="ctr">
+                    <a:lnL w="6350" cap="flat" cmpd="sng" algn="ctr">
+                      <a:solidFill>
+                        <a:srgbClr val="D9C4CD"/>
+                      </a:solidFill>
+                      <a:prstDash val="solid"/>
+                      <a:round/>
+                      <a:headEnd type="none" w="med" len="med"/>
+                      <a:tailEnd type="none" w="med" len="med"/>
+                    </a:lnL>
+                    <a:lnR w="6350" cap="flat" cmpd="sng" algn="ctr">
+                      <a:solidFill>
+                        <a:srgbClr val="D9C4CD"/>
+                      </a:solidFill>
+                      <a:prstDash val="solid"/>
+                      <a:round/>
+                      <a:headEnd type="none" w="med" len="med"/>
+                      <a:tailEnd type="none" w="med" len="med"/>
+                    </a:lnR>
+                    <a:lnT w="6350" cap="flat" cmpd="sng" algn="ctr">
+                      <a:solidFill>
+                        <a:srgbClr val="D9C4CD"/>
+                      </a:solidFill>
+                      <a:prstDash val="solid"/>
+                      <a:round/>
+                      <a:headEnd type="none" w="med" len="med"/>
+                      <a:tailEnd type="none" w="med" len="med"/>
+                    </a:lnT>
+                    <a:lnB w="6350" cap="flat" cmpd="sng" algn="ctr">
+                      <a:solidFill>
+                        <a:srgbClr val="D9C4CD"/>
+                      </a:solidFill>
+                      <a:prstDash val="solid"/>
+                      <a:round/>
+                      <a:headEnd type="none" w="med" len="med"/>
+                      <a:tailEnd type="none" w="med" len="med"/>
+                    </a:lnB>
+                    <a:solidFill>
+                      <a:schemeClr val="bg1"/>
+                    </a:solidFill>
+                  </a:tcPr>
+                </a:tc>
+                <a:tc>
+                  <a:txBody>
+                    <a:bodyPr/>
+                    <a:lstStyle/>
+                    <a:p>
+                      <a:pPr indent="0" marL="0">
+                        <a:buNone/>
+                      </a:pPr>
+                      <a:r>
+                        <a:rPr lang="en-US" sz="1200" dirty="0">
+                          <a:solidFill>
+                            <a:schemeClr val="tx1"/>
+                          </a:solidFill>
+                        </a:rPr>
+                        <a:t>0,99</a:t>
+                      </a:r>
+                      <a:endParaRPr lang="en-US" sz="1200" dirty="0"/>
+                    </a:p>
+                  </a:txBody>
+                  <a:tcPr marL="45720" marR="45720" marT="45720" marB="45720" anchor="ctr">
+                    <a:lnL w="6350" cap="flat" cmpd="sng" algn="ctr">
+                      <a:solidFill>
+                        <a:srgbClr val="D9C4CD"/>
+                      </a:solidFill>
+                      <a:prstDash val="solid"/>
+                      <a:round/>
+                      <a:headEnd type="none" w="med" len="med"/>
+                      <a:tailEnd type="none" w="med" len="med"/>
+                    </a:lnL>
+                    <a:lnR w="6350" cap="flat" cmpd="sng" algn="ctr">
+                      <a:solidFill>
+                        <a:srgbClr val="D9C4CD"/>
+                      </a:solidFill>
+                      <a:prstDash val="solid"/>
+                      <a:round/>
+                      <a:headEnd type="none" w="med" len="med"/>
+                      <a:tailEnd type="none" w="med" len="med"/>
+                    </a:lnR>
+                    <a:lnT w="6350" cap="flat" cmpd="sng" algn="ctr">
+                      <a:solidFill>
+                        <a:srgbClr val="D9C4CD"/>
+                      </a:solidFill>
+                      <a:prstDash val="solid"/>
+                      <a:round/>
+                      <a:headEnd type="none" w="med" len="med"/>
+                      <a:tailEnd type="none" w="med" len="med"/>
+                    </a:lnT>
+                    <a:lnB w="6350" cap="flat" cmpd="sng" algn="ctr">
+                      <a:solidFill>
+                        <a:srgbClr val="D9C4CD"/>
+                      </a:solidFill>
+                      <a:prstDash val="solid"/>
+                      <a:round/>
+                      <a:headEnd type="none" w="med" len="med"/>
+                      <a:tailEnd type="none" w="med" len="med"/>
+                    </a:lnB>
+                    <a:solidFill>
+                      <a:schemeClr val="bg1"/>
+                    </a:solidFill>
+                  </a:tcPr>
+                </a:tc>
+                <a:tc>
+                  <a:txBody>
+                    <a:bodyPr/>
+                    <a:lstStyle/>
+                    <a:p>
+                      <a:pPr indent="0" marL="0">
+                        <a:buNone/>
+                      </a:pPr>
+                      <a:r>
+                        <a:rPr lang="en-US" sz="1200" dirty="0">
+                          <a:solidFill>
+                            <a:schemeClr val="tx1"/>
+                          </a:solidFill>
+                        </a:rPr>
+                        <a:t>0,98</a:t>
+                      </a:r>
+                      <a:endParaRPr lang="en-US" sz="1200" dirty="0"/>
+                    </a:p>
+                  </a:txBody>
+                  <a:tcPr marL="45720" marR="45720" marT="45720" marB="45720" anchor="ctr">
+                    <a:lnL w="6350" cap="flat" cmpd="sng" algn="ctr">
+                      <a:solidFill>
+                        <a:srgbClr val="D9C4CD"/>
+                      </a:solidFill>
+                      <a:prstDash val="solid"/>
+                      <a:round/>
+                      <a:headEnd type="none" w="med" len="med"/>
+                      <a:tailEnd type="none" w="med" len="med"/>
+                    </a:lnL>
+                    <a:lnR w="6350" cap="flat" cmpd="sng" algn="ctr">
+                      <a:solidFill>
+                        <a:srgbClr val="D9C4CD"/>
+                      </a:solidFill>
+                      <a:prstDash val="solid"/>
+                      <a:round/>
+                      <a:headEnd type="none" w="med" len="med"/>
+                      <a:tailEnd type="none" w="med" len="med"/>
+                    </a:lnR>
+                    <a:lnT w="6350" cap="flat" cmpd="sng" algn="ctr">
+                      <a:solidFill>
+                        <a:srgbClr val="D9C4CD"/>
+                      </a:solidFill>
+                      <a:prstDash val="solid"/>
+                      <a:round/>
+                      <a:headEnd type="none" w="med" len="med"/>
+                      <a:tailEnd type="none" w="med" len="med"/>
+                    </a:lnT>
+                    <a:lnB w="6350" cap="flat" cmpd="sng" algn="ctr">
+                      <a:solidFill>
+                        <a:srgbClr val="D9C4CD"/>
+                      </a:solidFill>
+                      <a:prstDash val="solid"/>
+                      <a:round/>
+                      <a:headEnd type="none" w="med" len="med"/>
+                      <a:tailEnd type="none" w="med" len="med"/>
+                    </a:lnB>
+                    <a:solidFill>
+                      <a:schemeClr val="bg1"/>
+                    </a:solidFill>
+                  </a:tcPr>
+                </a:tc>
+              </a:tr>
+              <a:tr h="0">
+                <a:tc>
+                  <a:txBody>
+                    <a:bodyPr/>
+                    <a:lstStyle/>
+                    <a:p>
+                      <a:pPr indent="0" marL="0">
+                        <a:buNone/>
+                      </a:pPr>
+                      <a:r>
+                        <a:rPr lang="en-US" sz="1200" dirty="0">
+                          <a:solidFill>
+                            <a:schemeClr val="tx1"/>
+                          </a:solidFill>
+                        </a:rPr>
+                        <a:t>kalibrace v celku</a:t>
+                      </a:r>
+                      <a:endParaRPr lang="en-US" sz="1200" dirty="0"/>
+                    </a:p>
+                  </a:txBody>
+                  <a:tcPr marL="45720" marR="45720" marT="45720" marB="45720" anchor="ctr">
+                    <a:lnL w="6350" cap="flat" cmpd="sng" algn="ctr">
+                      <a:solidFill>
+                        <a:srgbClr val="D9C4CD"/>
+                      </a:solidFill>
+                      <a:prstDash val="solid"/>
+                      <a:round/>
+                      <a:headEnd type="none" w="med" len="med"/>
+                      <a:tailEnd type="none" w="med" len="med"/>
+                    </a:lnL>
+                    <a:lnR w="6350" cap="flat" cmpd="sng" algn="ctr">
+                      <a:solidFill>
+                        <a:srgbClr val="D9C4CD"/>
+                      </a:solidFill>
+                      <a:prstDash val="solid"/>
+                      <a:round/>
+                      <a:headEnd type="none" w="med" len="med"/>
+                      <a:tailEnd type="none" w="med" len="med"/>
+                    </a:lnR>
+                    <a:lnT w="6350" cap="flat" cmpd="sng" algn="ctr">
+                      <a:solidFill>
+                        <a:srgbClr val="D9C4CD"/>
+                      </a:solidFill>
+                      <a:prstDash val="solid"/>
+                      <a:round/>
+                      <a:headEnd type="none" w="med" len="med"/>
+                      <a:tailEnd type="none" w="med" len="med"/>
+                    </a:lnT>
+                    <a:lnB w="6350" cap="flat" cmpd="sng" algn="ctr">
+                      <a:solidFill>
+                        <a:srgbClr val="D9C4CD"/>
+                      </a:solidFill>
+                      <a:prstDash val="solid"/>
+                      <a:round/>
+                      <a:headEnd type="none" w="med" len="med"/>
+                      <a:tailEnd type="none" w="med" len="med"/>
+                    </a:lnB>
+                    <a:solidFill>
+                      <a:schemeClr val="bg2"/>
+                    </a:solidFill>
+                  </a:tcPr>
+                </a:tc>
+                <a:tc>
+                  <a:txBody>
+                    <a:bodyPr/>
+                    <a:lstStyle/>
+                    <a:p>
+                      <a:pPr indent="0" marL="0">
+                        <a:buNone/>
+                      </a:pPr>
+                      <a:r>
+                        <a:rPr lang="en-US" sz="1200" dirty="0">
+                          <a:solidFill>
+                            <a:schemeClr val="tx1"/>
+                          </a:solidFill>
+                        </a:rPr>
+                        <a:t>−1,4 p. b.</a:t>
+                      </a:r>
+                      <a:endParaRPr lang="en-US" sz="1200" dirty="0"/>
+                    </a:p>
+                  </a:txBody>
+                  <a:tcPr marL="45720" marR="45720" marT="45720" marB="45720" anchor="ctr">
+                    <a:lnL w="6350" cap="flat" cmpd="sng" algn="ctr">
+                      <a:solidFill>
+                        <a:srgbClr val="D9C4CD"/>
+                      </a:solidFill>
+                      <a:prstDash val="solid"/>
+                      <a:round/>
+                      <a:headEnd type="none" w="med" len="med"/>
+                      <a:tailEnd type="none" w="med" len="med"/>
+                    </a:lnL>
+                    <a:lnR w="6350" cap="flat" cmpd="sng" algn="ctr">
+                      <a:solidFill>
+                        <a:srgbClr val="D9C4CD"/>
+                      </a:solidFill>
+                      <a:prstDash val="solid"/>
+                      <a:round/>
+                      <a:headEnd type="none" w="med" len="med"/>
+                      <a:tailEnd type="none" w="med" len="med"/>
+                    </a:lnR>
+                    <a:lnT w="6350" cap="flat" cmpd="sng" algn="ctr">
+                      <a:solidFill>
+                        <a:srgbClr val="D9C4CD"/>
+                      </a:solidFill>
+                      <a:prstDash val="solid"/>
+                      <a:round/>
+                      <a:headEnd type="none" w="med" len="med"/>
+                      <a:tailEnd type="none" w="med" len="med"/>
+                    </a:lnT>
+                    <a:lnB w="6350" cap="flat" cmpd="sng" algn="ctr">
+                      <a:solidFill>
+                        <a:srgbClr val="D9C4CD"/>
+                      </a:solidFill>
+                      <a:prstDash val="solid"/>
+                      <a:round/>
+                      <a:headEnd type="none" w="med" len="med"/>
+                      <a:tailEnd type="none" w="med" len="med"/>
+                    </a:lnB>
+                    <a:solidFill>
+                      <a:schemeClr val="bg2"/>
+                    </a:solidFill>
+                  </a:tcPr>
+                </a:tc>
+                <a:tc>
+                  <a:txBody>
+                    <a:bodyPr/>
+                    <a:lstStyle/>
+                    <a:p>
+                      <a:pPr indent="0" marL="0">
+                        <a:buNone/>
+                      </a:pPr>
+                      <a:r>
+                        <a:rPr lang="en-US" sz="1200" dirty="0">
+                          <a:solidFill>
+                            <a:schemeClr val="tx1"/>
+                          </a:solidFill>
+                        </a:rPr>
+                        <a:t>−0,6 p. b.</a:t>
+                      </a:r>
+                      <a:endParaRPr lang="en-US" sz="1200" dirty="0"/>
+                    </a:p>
+                  </a:txBody>
+                  <a:tcPr marL="45720" marR="45720" marT="45720" marB="45720" anchor="ctr">
+                    <a:lnL w="6350" cap="flat" cmpd="sng" algn="ctr">
+                      <a:solidFill>
+                        <a:srgbClr val="D9C4CD"/>
+                      </a:solidFill>
+                      <a:prstDash val="solid"/>
+                      <a:round/>
+                      <a:headEnd type="none" w="med" len="med"/>
+                      <a:tailEnd type="none" w="med" len="med"/>
+                    </a:lnL>
+                    <a:lnR w="6350" cap="flat" cmpd="sng" algn="ctr">
+                      <a:solidFill>
+                        <a:srgbClr val="D9C4CD"/>
+                      </a:solidFill>
+                      <a:prstDash val="solid"/>
+                      <a:round/>
+                      <a:headEnd type="none" w="med" len="med"/>
+                      <a:tailEnd type="none" w="med" len="med"/>
+                    </a:lnR>
+                    <a:lnT w="6350" cap="flat" cmpd="sng" algn="ctr">
+                      <a:solidFill>
+                        <a:srgbClr val="D9C4CD"/>
+                      </a:solidFill>
+                      <a:prstDash val="solid"/>
+                      <a:round/>
+                      <a:headEnd type="none" w="med" len="med"/>
+                      <a:tailEnd type="none" w="med" len="med"/>
+                    </a:lnT>
+                    <a:lnB w="6350" cap="flat" cmpd="sng" algn="ctr">
+                      <a:solidFill>
+                        <a:srgbClr val="D9C4CD"/>
+                      </a:solidFill>
+                      <a:prstDash val="solid"/>
+                      <a:round/>
+                      <a:headEnd type="none" w="med" len="med"/>
+                      <a:tailEnd type="none" w="med" len="med"/>
+                    </a:lnB>
+                    <a:solidFill>
+                      <a:schemeClr val="bg2"/>
+                    </a:solidFill>
+                  </a:tcPr>
+                </a:tc>
+              </a:tr>
+              <a:tr h="0">
+                <a:tc>
+                  <a:txBody>
+                    <a:bodyPr/>
+                    <a:lstStyle/>
+                    <a:p>
+                      <a:pPr indent="0" marL="0">
+                        <a:buNone/>
+                      </a:pPr>
+                      <a:r>
+                        <a:rPr lang="en-US" sz="1200" dirty="0">
+                          <a:solidFill>
+                            <a:schemeClr val="tx1"/>
+                          </a:solidFill>
+                        </a:rPr>
+                        <a:t>přišlé v horních 20 % (lift)</a:t>
+                      </a:r>
+                      <a:endParaRPr lang="en-US" sz="1200" dirty="0"/>
+                    </a:p>
+                  </a:txBody>
+                  <a:tcPr marL="45720" marR="45720" marT="45720" marB="45720" anchor="ctr">
+                    <a:lnL w="6350" cap="flat" cmpd="sng" algn="ctr">
+                      <a:solidFill>
+                        <a:srgbClr val="D9C4CD"/>
+                      </a:solidFill>
+                      <a:prstDash val="solid"/>
+                      <a:round/>
+                      <a:headEnd type="none" w="med" len="med"/>
+                      <a:tailEnd type="none" w="med" len="med"/>
+                    </a:lnL>
+                    <a:lnR w="6350" cap="flat" cmpd="sng" algn="ctr">
+                      <a:solidFill>
+                        <a:srgbClr val="D9C4CD"/>
+                      </a:solidFill>
+                      <a:prstDash val="solid"/>
+                      <a:round/>
+                      <a:headEnd type="none" w="med" len="med"/>
+                      <a:tailEnd type="none" w="med" len="med"/>
+                    </a:lnR>
+                    <a:lnT w="6350" cap="flat" cmpd="sng" algn="ctr">
+                      <a:solidFill>
+                        <a:srgbClr val="D9C4CD"/>
+                      </a:solidFill>
+                      <a:prstDash val="solid"/>
+                      <a:round/>
+                      <a:headEnd type="none" w="med" len="med"/>
+                      <a:tailEnd type="none" w="med" len="med"/>
+                    </a:lnT>
+                    <a:lnB w="6350" cap="flat" cmpd="sng" algn="ctr">
+                      <a:solidFill>
+                        <a:srgbClr val="D9C4CD"/>
+                      </a:solidFill>
+                      <a:prstDash val="solid"/>
+                      <a:round/>
+                      <a:headEnd type="none" w="med" len="med"/>
+                      <a:tailEnd type="none" w="med" len="med"/>
+                    </a:lnB>
+                    <a:solidFill>
+                      <a:schemeClr val="bg1"/>
+                    </a:solidFill>
+                  </a:tcPr>
+                </a:tc>
+                <a:tc>
+                  <a:txBody>
+                    <a:bodyPr/>
+                    <a:lstStyle/>
+                    <a:p>
+                      <a:pPr indent="0" marL="0">
+                        <a:buNone/>
+                      </a:pPr>
+                      <a:r>
+                        <a:rPr lang="en-US" sz="1200" dirty="0">
+                          <a:solidFill>
+                            <a:schemeClr val="tx1"/>
+                          </a:solidFill>
+                        </a:rPr>
+                        <a:t>53 % (2,6×)</a:t>
+                      </a:r>
+                      <a:endParaRPr lang="en-US" sz="1200" dirty="0"/>
+                    </a:p>
+                  </a:txBody>
+                  <a:tcPr marL="45720" marR="45720" marT="45720" marB="45720" anchor="ctr">
+                    <a:lnL w="6350" cap="flat" cmpd="sng" algn="ctr">
+                      <a:solidFill>
+                        <a:srgbClr val="D9C4CD"/>
+                      </a:solidFill>
+                      <a:prstDash val="solid"/>
+                      <a:round/>
+                      <a:headEnd type="none" w="med" len="med"/>
+                      <a:tailEnd type="none" w="med" len="med"/>
+                    </a:lnL>
+                    <a:lnR w="6350" cap="flat" cmpd="sng" algn="ctr">
+                      <a:solidFill>
+                        <a:srgbClr val="D9C4CD"/>
+                      </a:solidFill>
+                      <a:prstDash val="solid"/>
+                      <a:round/>
+                      <a:headEnd type="none" w="med" len="med"/>
+                      <a:tailEnd type="none" w="med" len="med"/>
+                    </a:lnR>
+                    <a:lnT w="6350" cap="flat" cmpd="sng" algn="ctr">
+                      <a:solidFill>
+                        <a:srgbClr val="D9C4CD"/>
+                      </a:solidFill>
+                      <a:prstDash val="solid"/>
+                      <a:round/>
+                      <a:headEnd type="none" w="med" len="med"/>
+                      <a:tailEnd type="none" w="med" len="med"/>
+                    </a:lnT>
+                    <a:lnB w="6350" cap="flat" cmpd="sng" algn="ctr">
+                      <a:solidFill>
+                        <a:srgbClr val="D9C4CD"/>
+                      </a:solidFill>
+                      <a:prstDash val="solid"/>
+                      <a:round/>
+                      <a:headEnd type="none" w="med" len="med"/>
+                      <a:tailEnd type="none" w="med" len="med"/>
+                    </a:lnB>
+                    <a:solidFill>
+                      <a:schemeClr val="bg1"/>
+                    </a:solidFill>
+                  </a:tcPr>
+                </a:tc>
+                <a:tc>
+                  <a:txBody>
+                    <a:bodyPr/>
+                    <a:lstStyle/>
+                    <a:p>
+                      <a:pPr indent="0" marL="0">
+                        <a:buNone/>
+                      </a:pPr>
+                      <a:r>
+                        <a:rPr lang="en-US" sz="1200" dirty="0">
+                          <a:solidFill>
+                            <a:schemeClr val="tx1"/>
+                          </a:solidFill>
+                        </a:rPr>
+                        <a:t>58 % (2,9×)</a:t>
+                      </a:r>
+                      <a:endParaRPr lang="en-US" sz="1200" dirty="0"/>
+                    </a:p>
+                  </a:txBody>
+                  <a:tcPr marL="45720" marR="45720" marT="45720" marB="45720" anchor="ctr">
+                    <a:lnL w="6350" cap="flat" cmpd="sng" algn="ctr">
+                      <a:solidFill>
+                        <a:srgbClr val="D9C4CD"/>
+                      </a:solidFill>
+                      <a:prstDash val="solid"/>
+                      <a:round/>
+                      <a:headEnd type="none" w="med" len="med"/>
+                      <a:tailEnd type="none" w="med" len="med"/>
+                    </a:lnL>
+                    <a:lnR w="6350" cap="flat" cmpd="sng" algn="ctr">
+                      <a:solidFill>
+                        <a:srgbClr val="D9C4CD"/>
+                      </a:solidFill>
+                      <a:prstDash val="solid"/>
+                      <a:round/>
+                      <a:headEnd type="none" w="med" len="med"/>
+                      <a:tailEnd type="none" w="med" len="med"/>
+                    </a:lnR>
+                    <a:lnT w="6350" cap="flat" cmpd="sng" algn="ctr">
+                      <a:solidFill>
+                        <a:srgbClr val="D9C4CD"/>
+                      </a:solidFill>
+                      <a:prstDash val="solid"/>
+                      <a:round/>
+                      <a:headEnd type="none" w="med" len="med"/>
+                      <a:tailEnd type="none" w="med" len="med"/>
+                    </a:lnT>
+                    <a:lnB w="6350" cap="flat" cmpd="sng" algn="ctr">
+                      <a:solidFill>
+                        <a:srgbClr val="D9C4CD"/>
+                      </a:solidFill>
+                      <a:prstDash val="solid"/>
+                      <a:round/>
+                      <a:headEnd type="none" w="med" len="med"/>
+                      <a:tailEnd type="none" w="med" len="med"/>
+                    </a:lnB>
+                    <a:solidFill>
+                      <a:schemeClr val="bg1"/>
+                    </a:solidFill>
+                  </a:tcPr>
+                </a:tc>
+              </a:tr>
+              <a:tr h="0">
+                <a:tc>
+                  <a:txBody>
+                    <a:bodyPr/>
+                    <a:lstStyle/>
+                    <a:p>
+                      <a:pPr indent="0" marL="0">
+                        <a:buNone/>
+                      </a:pPr>
+                      <a:r>
+                        <a:rPr lang="en-US" sz="1200" dirty="0">
+                          <a:solidFill>
+                            <a:schemeClr val="tx1"/>
+                          </a:solidFill>
+                        </a:rPr>
+                        <a:t>nepřišlé mezi 30 % s nejnižší předpovědí (bez modelu 81 %)</a:t>
+                      </a:r>
+                      <a:endParaRPr lang="en-US" sz="1200" dirty="0"/>
+                    </a:p>
+                  </a:txBody>
+                  <a:tcPr marL="45720" marR="45720" marT="45720" marB="45720" anchor="ctr">
+                    <a:lnL w="6350" cap="flat" cmpd="sng" algn="ctr">
+                      <a:solidFill>
+                        <a:srgbClr val="D9C4CD"/>
+                      </a:solidFill>
+                      <a:prstDash val="solid"/>
+                      <a:round/>
+                      <a:headEnd type="none" w="med" len="med"/>
+                      <a:tailEnd type="none" w="med" len="med"/>
+                    </a:lnL>
+                    <a:lnR w="6350" cap="flat" cmpd="sng" algn="ctr">
+                      <a:solidFill>
+                        <a:srgbClr val="D9C4CD"/>
+                      </a:solidFill>
+                      <a:prstDash val="solid"/>
+                      <a:round/>
+                      <a:headEnd type="none" w="med" len="med"/>
+                      <a:tailEnd type="none" w="med" len="med"/>
+                    </a:lnR>
+                    <a:lnT w="6350" cap="flat" cmpd="sng" algn="ctr">
+                      <a:solidFill>
+                        <a:srgbClr val="D9C4CD"/>
+                      </a:solidFill>
+                      <a:prstDash val="solid"/>
+                      <a:round/>
+                      <a:headEnd type="none" w="med" len="med"/>
+                      <a:tailEnd type="none" w="med" len="med"/>
+                    </a:lnT>
+                    <a:lnB w="6350" cap="flat" cmpd="sng" algn="ctr">
+                      <a:solidFill>
+                        <a:srgbClr val="D9C4CD"/>
+                      </a:solidFill>
+                      <a:prstDash val="solid"/>
+                      <a:round/>
+                      <a:headEnd type="none" w="med" len="med"/>
+                      <a:tailEnd type="none" w="med" len="med"/>
+                    </a:lnB>
+                    <a:solidFill>
+                      <a:schemeClr val="bg2"/>
+                    </a:solidFill>
+                  </a:tcPr>
+                </a:tc>
+                <a:tc>
+                  <a:txBody>
+                    <a:bodyPr/>
+                    <a:lstStyle/>
+                    <a:p>
+                      <a:pPr indent="0" marL="0">
+                        <a:buNone/>
+                      </a:pPr>
+                      <a:r>
+                        <a:rPr lang="en-US" sz="1200" b="1" dirty="0">
+                          <a:solidFill>
+                            <a:schemeClr val="tx1"/>
+                          </a:solidFill>
+                        </a:rPr>
+                        <a:t>96 %</a:t>
+                      </a:r>
+                      <a:endParaRPr lang="en-US" sz="1200" dirty="0"/>
+                    </a:p>
+                  </a:txBody>
+                  <a:tcPr marL="45720" marR="45720" marT="45720" marB="45720" anchor="ctr">
+                    <a:lnL w="6350" cap="flat" cmpd="sng" algn="ctr">
+                      <a:solidFill>
+                        <a:srgbClr val="D9C4CD"/>
+                      </a:solidFill>
+                      <a:prstDash val="solid"/>
+                      <a:round/>
+                      <a:headEnd type="none" w="med" len="med"/>
+                      <a:tailEnd type="none" w="med" len="med"/>
+                    </a:lnL>
+                    <a:lnR w="6350" cap="flat" cmpd="sng" algn="ctr">
+                      <a:solidFill>
+                        <a:srgbClr val="D9C4CD"/>
+                      </a:solidFill>
+                      <a:prstDash val="solid"/>
+                      <a:round/>
+                      <a:headEnd type="none" w="med" len="med"/>
+                      <a:tailEnd type="none" w="med" len="med"/>
+                    </a:lnR>
+                    <a:lnT w="6350" cap="flat" cmpd="sng" algn="ctr">
+                      <a:solidFill>
+                        <a:srgbClr val="D9C4CD"/>
+                      </a:solidFill>
+                      <a:prstDash val="solid"/>
+                      <a:round/>
+                      <a:headEnd type="none" w="med" len="med"/>
+                      <a:tailEnd type="none" w="med" len="med"/>
+                    </a:lnT>
+                    <a:lnB w="6350" cap="flat" cmpd="sng" algn="ctr">
+                      <a:solidFill>
+                        <a:srgbClr val="D9C4CD"/>
+                      </a:solidFill>
+                      <a:prstDash val="solid"/>
+                      <a:round/>
+                      <a:headEnd type="none" w="med" len="med"/>
+                      <a:tailEnd type="none" w="med" len="med"/>
+                    </a:lnB>
+                    <a:solidFill>
+                      <a:schemeClr val="bg2"/>
+                    </a:solidFill>
+                  </a:tcPr>
+                </a:tc>
+                <a:tc>
+                  <a:txBody>
+                    <a:bodyPr/>
+                    <a:lstStyle/>
+                    <a:p>
+                      <a:pPr indent="0" marL="0">
+                        <a:buNone/>
+                      </a:pPr>
+                      <a:r>
+                        <a:rPr lang="en-US" sz="1200" dirty="0">
+                          <a:solidFill>
+                            <a:schemeClr val="tx1"/>
+                          </a:solidFill>
+                        </a:rPr>
+                        <a:t>97 %</a:t>
+                      </a:r>
+                      <a:endParaRPr lang="en-US" sz="1200" dirty="0"/>
+                    </a:p>
+                  </a:txBody>
+                  <a:tcPr marL="45720" marR="45720" marT="45720" marB="45720" anchor="ctr">
+                    <a:lnL w="6350" cap="flat" cmpd="sng" algn="ctr">
+                      <a:solidFill>
+                        <a:srgbClr val="D9C4CD"/>
+                      </a:solidFill>
+                      <a:prstDash val="solid"/>
+                      <a:round/>
+                      <a:headEnd type="none" w="med" len="med"/>
+                      <a:tailEnd type="none" w="med" len="med"/>
+                    </a:lnL>
+                    <a:lnR w="6350" cap="flat" cmpd="sng" algn="ctr">
+                      <a:solidFill>
+                        <a:srgbClr val="D9C4CD"/>
+                      </a:solidFill>
+                      <a:prstDash val="solid"/>
+                      <a:round/>
+                      <a:headEnd type="none" w="med" len="med"/>
+                      <a:tailEnd type="none" w="med" len="med"/>
+                    </a:lnR>
+                    <a:lnT w="6350" cap="flat" cmpd="sng" algn="ctr">
+                      <a:solidFill>
+                        <a:srgbClr val="D9C4CD"/>
+                      </a:solidFill>
+                      <a:prstDash val="solid"/>
+                      <a:round/>
+                      <a:headEnd type="none" w="med" len="med"/>
+                      <a:tailEnd type="none" w="med" len="med"/>
+                    </a:lnT>
+                    <a:lnB w="6350" cap="flat" cmpd="sng" algn="ctr">
+                      <a:solidFill>
+                        <a:srgbClr val="D9C4CD"/>
+                      </a:solidFill>
+                      <a:prstDash val="solid"/>
+                      <a:round/>
+                      <a:headEnd type="none" w="med" len="med"/>
+                      <a:tailEnd type="none" w="med" len="med"/>
+                    </a:lnB>
+                    <a:solidFill>
+                      <a:schemeClr val="bg2"/>
+                    </a:solidFill>
+                  </a:tcPr>
+                </a:tc>
+              </a:tr>
+            </a:tbl>
+          </a:graphicData>
+        </a:graphic>
+      </p:graphicFrame>
+      <p:sp>
+        <p:nvSpPr>
+          <p:cNvPr id="5" name="komentar_vykon"/>
           <p:cNvSpPr txBox="1"/>
           <p:nvPr/>
         </p:nvSpPr>
         <p:spPr>
           <a:xfrm>
-            <a:off x="7589520" y="1234440"/>
-            <a:ext cx="4053535" cy="5029200"/>
+            <a:off x="6858800" y="4069080"/>
+            <a:ext cx="4784255" cy="2194560"/>
           </a:xfrm>
           <a:prstGeom prst="rect">
             <a:avLst/>
@@ -9302,22 +12808,30 @@
               <a:buChar char="•"/>
             </a:pPr>
             <a:r>
-              <a:rPr lang="en-US" sz="1500" b="1" dirty="0">
+              <a:rPr lang="en-US" sz="1400" dirty="0">
                 <a:solidFill>
                   <a:schemeClr val="tx1"/>
                 </a:solidFill>
               </a:rPr>
-              <a:t>56 %</a:t>
-            </a:r>
-            <a:r>
-              <a:rPr lang="en-US" sz="1500" dirty="0">
+              <a:t>Segmenty </a:t>
+            </a:r>
+            <a:r>
+              <a:rPr lang="en-US" sz="1400" b="1" dirty="0">
                 <a:solidFill>
                   <a:schemeClr val="tx1"/>
                 </a:solidFill>
               </a:rPr>
-              <a:t> nepřišlých je ve čtyřech segmentech s účastí 3–10 %. Největší je „jiná prevence, opakovaně nereaguje“: 56,8 tis. žen.</a:t>
-            </a:r>
-            <a:endParaRPr lang="en-US" sz="1500" dirty="0"/>
+              <a:t>podceňují účast o 1,4 p. b.</a:t>
+            </a:r>
+            <a:r>
+              <a:rPr lang="en-US" sz="1400" dirty="0">
+                <a:solidFill>
+                  <a:schemeClr val="tx1"/>
+                </a:solidFill>
+              </a:rPr>
+              <a:t>, protože účast mezi lety roste; rozpětí předpovědí sedí (sklon 0,99).</a:t>
+            </a:r>
+            <a:endParaRPr lang="en-US" sz="1400" dirty="0"/>
           </a:p>
           <a:p>
             <a:pPr marL="228600" indent="-228600">
@@ -9328,72 +12842,30 @@
               <a:buChar char="•"/>
             </a:pPr>
             <a:r>
-              <a:rPr lang="en-US" sz="1500" b="1" dirty="0">
+              <a:rPr lang="en-US" sz="1400" dirty="0">
                 <a:solidFill>
                   <a:schemeClr val="tx1"/>
                 </a:solidFill>
               </a:rPr>
-              <a:t>59 %</a:t>
-            </a:r>
-            <a:r>
-              <a:rPr lang="en-US" sz="1500" dirty="0">
+              <a:t>Pro </a:t>
+            </a:r>
+            <a:r>
+              <a:rPr lang="en-US" sz="1400" b="1" dirty="0">
                 <a:solidFill>
                   <a:schemeClr val="tx1"/>
                 </a:solidFill>
               </a:rPr>
-              <a:t> nepřišlých chodí ke gynekologovi nebo na jinou prevenci, takže je lze oslovit přes lékaře.</a:t>
-            </a:r>
-            <a:endParaRPr lang="en-US" sz="1500" dirty="0"/>
-          </a:p>
-          <a:p>
-            <a:pPr marL="228600" indent="-228600">
-              <a:spcAft>
-                <a:spcPts val="1000"/>
-              </a:spcAft>
-              <a:buSzPct val="100000"/>
-              <a:buChar char="•"/>
-            </a:pPr>
-            <a:r>
-              <a:rPr lang="en-US" sz="1500" dirty="0">
+              <a:t>kampaň na nepřišlé segmenty stačí</a:t>
+            </a:r>
+            <a:r>
+              <a:rPr lang="en-US" sz="1400" dirty="0">
                 <a:solidFill>
                   <a:schemeClr val="tx1"/>
                 </a:solidFill>
               </a:rPr>
-              <a:t>Nejslibnější střed: </a:t>
-            </a:r>
-            <a:r>
-              <a:rPr lang="en-US" sz="1500" b="1" dirty="0">
-                <a:solidFill>
-                  <a:schemeClr val="tx1"/>
-                </a:solidFill>
-              </a:rPr>
-              <a:t>gynekolog, zvaná málokrát</a:t>
-            </a:r>
-            <a:r>
-              <a:rPr lang="en-US" sz="1500" dirty="0">
-                <a:solidFill>
-                  <a:schemeClr val="tx1"/>
-                </a:solidFill>
-              </a:rPr>
-              <a:t> (22,7 tis. nepřišlých, účast 27 %) a </a:t>
-            </a:r>
-            <a:r>
-              <a:rPr lang="en-US" sz="1500" b="1" dirty="0">
-                <a:solidFill>
-                  <a:schemeClr val="tx1"/>
-                </a:solidFill>
-              </a:rPr>
-              <a:t>jiná prevence, zvaná málokrát</a:t>
-            </a:r>
-            <a:r>
-              <a:rPr lang="en-US" sz="1500" dirty="0">
-                <a:solidFill>
-                  <a:schemeClr val="tx1"/>
-                </a:solidFill>
-              </a:rPr>
-              <a:t> (25,7 tis., 13 %).</a:t>
-            </a:r>
-            <a:endParaRPr lang="en-US" sz="1500" dirty="0"/>
+              <a:t>: model hazardu je lepší hlavně u žen, které přijdou samy.</a:t>
+            </a:r>
+            <a:endParaRPr lang="en-US" sz="1400" dirty="0"/>
           </a:p>
         </p:txBody>
       </p:sp>
@@ -9499,7 +12971,7 @@
                   <a:schemeClr val="accent1"/>
                 </a:solidFill>
               </a:rPr>
-              <a:t>Uvnitř segmentů: kde má smysl individuální cílení</a:t>
+              <a:t>Kde jsou ženy, které nepřišly (2024: 207 tisíc)</a:t>
             </a:r>
             <a:endParaRPr lang="en-US" sz="3000" dirty="0"/>
           </a:p>
@@ -9507,7 +12979,7 @@
       </p:sp>
       <p:pic>
         <p:nvPicPr>
-          <p:cNvPr id="3" name="segmenty_rozptyl.png" descr="C:\Users\vittu\src\mamograf-data-exploration\docs\vzp_segmentace\segmenty_rozptyl.png">    </p:cNvPr>
+          <p:cNvPr id="3" name="segmenty_mapa.png" descr="C:\Users\vittu\src\mamograf-vzp\docs\vzp_segmentace\segmenty_mapa.png">    </p:cNvPr>
           <p:cNvPicPr>
             <a:picLocks noChangeAspect="1"/>
           </p:cNvPicPr>
@@ -9522,7 +12994,7 @@
         <p:spPr>
           <a:xfrm>
             <a:off x="548640" y="1234440"/>
-            <a:ext cx="9114717" cy="3566160"/>
+            <a:ext cx="6675120" cy="4121914"/>
           </a:xfrm>
           <a:prstGeom prst="rect">
             <a:avLst/>
@@ -9531,36 +13003,14 @@
       </p:pic>
       <p:sp>
         <p:nvSpPr>
-          <p:cNvPr id="4" name="karta_siroky"/>
-          <p:cNvSpPr/>
+          <p:cNvPr id="4" name="body"/>
+          <p:cNvSpPr txBox="1"/>
           <p:nvPr/>
         </p:nvSpPr>
         <p:spPr>
           <a:xfrm>
-            <a:off x="548640" y="5029200"/>
-            <a:ext cx="5410048" cy="1325880"/>
-          </a:xfrm>
-          <a:prstGeom prst="roundRect">
-            <a:avLst>
-              <a:gd name="adj" fmla="val 5517"/>
-            </a:avLst>
-          </a:prstGeom>
-          <a:solidFill>
-            <a:schemeClr val="bg2"/>
-          </a:solidFill>
-          <a:ln/>
-        </p:spPr>
-      </p:sp>
-      <p:sp>
-        <p:nvSpPr>
-          <p:cNvPr id="5" name="karta_siroky_text"/>
-          <p:cNvSpPr txBox="1"/>
-          <p:nvPr/>
-        </p:nvSpPr>
-        <p:spPr>
-          <a:xfrm>
-            <a:off x="731520" y="5166360"/>
-            <a:ext cx="5044288" cy="1051560"/>
+            <a:off x="7589520" y="1234440"/>
+            <a:ext cx="4053535" cy="5029200"/>
           </a:xfrm>
           <a:prstGeom prst="rect">
             <a:avLst/>
@@ -9572,142 +13022,106 @@
           <a:bodyPr wrap="square" lIns="0" tIns="0" rIns="0" bIns="0" rtlCol="0" anchor="t"/>
           <a:lstStyle/>
           <a:p>
-            <a:pPr indent="0" marL="0">
+            <a:pPr marL="228600" indent="-228600">
               <a:spcAft>
-                <a:spcPts val="600"/>
+                <a:spcPts val="1000"/>
               </a:spcAft>
-              <a:buNone/>
+              <a:buSzPct val="100000"/>
+              <a:buChar char="•"/>
             </a:pPr>
             <a:r>
-              <a:rPr lang="en-US" sz="1600" b="1" dirty="0">
-                <a:solidFill>
-                  <a:schemeClr val="accent1"/>
+              <a:rPr lang="en-US" sz="1500" b="1" dirty="0">
+                <a:solidFill>
+                  <a:schemeClr val="tx1"/>
                 </a:solidFill>
               </a:rPr>
-              <a:t>Široký rozptyl</a:t>
-            </a:r>
-            <a:endParaRPr lang="en-US" sz="1600" dirty="0"/>
-          </a:p>
-          <a:p>
-            <a:pPr indent="0" marL="0">
-              <a:buNone/>
+              <a:t>56 %</a:t>
+            </a:r>
+            <a:r>
+              <a:rPr lang="en-US" sz="1500" dirty="0">
+                <a:solidFill>
+                  <a:schemeClr val="tx1"/>
+                </a:solidFill>
+              </a:rPr>
+              <a:t> nepřišlých je ve čtyřech segmentech s účastí 3–10 %. Největší je „jiná prevence, opakovaně nereaguje“: 56,8 tis. žen.</a:t>
+            </a:r>
+            <a:endParaRPr lang="en-US" sz="1500" dirty="0"/>
+          </a:p>
+          <a:p>
+            <a:pPr marL="228600" indent="-228600">
+              <a:spcAft>
+                <a:spcPts val="1000"/>
+              </a:spcAft>
+              <a:buSzPct val="100000"/>
+              <a:buChar char="•"/>
             </a:pPr>
             <a:r>
-              <a:rPr lang="en-US" sz="1400" dirty="0">
+              <a:rPr lang="en-US" sz="1500" b="1" dirty="0">
                 <a:solidFill>
                   <a:schemeClr val="tx1"/>
                 </a:solidFill>
               </a:rPr>
-              <a:t>První pozvánky, vypadlé a ženy u gynekologa. Tam má smysl </a:t>
-            </a:r>
-            <a:r>
-              <a:rPr lang="en-US" sz="1400" b="1" dirty="0">
+              <a:t>59 %</a:t>
+            </a:r>
+            <a:r>
+              <a:rPr lang="en-US" sz="1500" dirty="0">
                 <a:solidFill>
                   <a:schemeClr val="tx1"/>
                 </a:solidFill>
               </a:rPr>
-              <a:t>cílit podle modelu</a:t>
-            </a:r>
-            <a:r>
-              <a:rPr lang="en-US" sz="1400" dirty="0">
+              <a:t> nepřišlých chodí ke gynekologovi nebo na jinou prevenci, takže je lze oslovit přes lékaře.</a:t>
+            </a:r>
+            <a:endParaRPr lang="en-US" sz="1500" dirty="0"/>
+          </a:p>
+          <a:p>
+            <a:pPr marL="228600" indent="-228600">
+              <a:spcAft>
+                <a:spcPts val="1000"/>
+              </a:spcAft>
+              <a:buSzPct val="100000"/>
+              <a:buChar char="•"/>
+            </a:pPr>
+            <a:r>
+              <a:rPr lang="en-US" sz="1500" dirty="0">
                 <a:solidFill>
                   <a:schemeClr val="tx1"/>
                 </a:solidFill>
               </a:rPr>
-              <a:t> (AUROC uvnitř 0,63–0,79).</a:t>
-            </a:r>
-            <a:endParaRPr lang="en-US" sz="1600" dirty="0"/>
-          </a:p>
-        </p:txBody>
-      </p:sp>
-      <p:sp>
-        <p:nvSpPr>
-          <p:cNvPr id="6" name="karta_uzky"/>
-          <p:cNvSpPr/>
-          <p:nvPr/>
-        </p:nvSpPr>
-        <p:spPr>
-          <a:xfrm>
-            <a:off x="6233008" y="5029200"/>
-            <a:ext cx="5410048" cy="1325880"/>
-          </a:xfrm>
-          <a:prstGeom prst="roundRect">
-            <a:avLst>
-              <a:gd name="adj" fmla="val 5517"/>
-            </a:avLst>
-          </a:prstGeom>
-          <a:solidFill>
-            <a:schemeClr val="bg2"/>
-          </a:solidFill>
-          <a:ln/>
-        </p:spPr>
-      </p:sp>
-      <p:sp>
-        <p:nvSpPr>
-          <p:cNvPr id="7" name="karta_uzky_text"/>
-          <p:cNvSpPr txBox="1"/>
-          <p:nvPr/>
-        </p:nvSpPr>
-        <p:spPr>
-          <a:xfrm>
-            <a:off x="6415888" y="5166360"/>
-            <a:ext cx="5044288" cy="1051560"/>
-          </a:xfrm>
-          <a:prstGeom prst="rect">
-            <a:avLst/>
-          </a:prstGeom>
-          <a:noFill/>
-          <a:ln/>
-        </p:spPr>
-        <p:txBody>
-          <a:bodyPr wrap="square" lIns="0" tIns="0" rIns="0" bIns="0" rtlCol="0" anchor="t"/>
-          <a:lstStyle/>
-          <a:p>
-            <a:pPr indent="0" marL="0">
-              <a:spcAft>
-                <a:spcPts val="600"/>
-              </a:spcAft>
-              <a:buNone/>
-            </a:pPr>
-            <a:r>
-              <a:rPr lang="en-US" sz="1600" b="1" dirty="0">
-                <a:solidFill>
-                  <a:schemeClr val="accent1"/>
+              <a:t>Nejslibnější střed: </a:t>
+            </a:r>
+            <a:r>
+              <a:rPr lang="en-US" sz="1500" b="1" dirty="0">
+                <a:solidFill>
+                  <a:schemeClr val="tx1"/>
                 </a:solidFill>
               </a:rPr>
-              <a:t>Úzký a nízký rozptyl</a:t>
-            </a:r>
-            <a:endParaRPr lang="en-US" sz="1600" dirty="0"/>
-          </a:p>
-          <a:p>
-            <a:pPr indent="0" marL="0">
-              <a:buNone/>
-            </a:pPr>
-            <a:r>
-              <a:rPr lang="en-US" sz="1400" dirty="0">
+              <a:t>gynekolog, zvaná málokrát</a:t>
+            </a:r>
+            <a:r>
+              <a:rPr lang="en-US" sz="1500" dirty="0">
                 <a:solidFill>
                   <a:schemeClr val="tx1"/>
                 </a:solidFill>
               </a:rPr>
-              <a:t>Nereagující, odpojené a ženy bez prevence. </a:t>
-            </a:r>
-            <a:r>
-              <a:rPr lang="en-US" sz="1400" b="1" dirty="0">
+              <a:t> (22,7 tis. nepřišlých, účast 27 %) a </a:t>
+            </a:r>
+            <a:r>
+              <a:rPr lang="en-US" sz="1500" b="1" dirty="0">
                 <a:solidFill>
                   <a:schemeClr val="tx1"/>
                 </a:solidFill>
               </a:rPr>
-              <a:t>90 % z nich má predikci pod 15 %</a:t>
-            </a:r>
-            <a:r>
-              <a:rPr lang="en-US" sz="1400" dirty="0">
+              <a:t>jiná prevence, zvaná málokrát</a:t>
+            </a:r>
+            <a:r>
+              <a:rPr lang="en-US" sz="1500" dirty="0">
                 <a:solidFill>
                   <a:schemeClr val="tx1"/>
                 </a:solidFill>
               </a:rPr>
-              <a:t>, podskupina, která by chodila, v nich není.</a:t>
-            </a:r>
-            <a:endParaRPr lang="en-US" sz="1600" dirty="0"/>
+              <a:t> (25,7 tis., 13 %).</a:t>
+            </a:r>
+            <a:endParaRPr lang="en-US" sz="1500" dirty="0"/>
           </a:p>
         </p:txBody>
       </p:sp>
@@ -9813,7 +13227,7 @@
                   <a:schemeClr val="accent1"/>
                 </a:solidFill>
               </a:rPr>
-              <a:t>Přechodová matice: co následuje po pozvánce</a:t>
+              <a:t>Uvnitř segmentů: kde má smysl individuální cílení</a:t>
             </a:r>
             <a:endParaRPr lang="en-US" sz="3000" dirty="0"/>
           </a:p>
@@ -9821,7 +13235,7 @@
       </p:sp>
       <p:pic>
         <p:nvPicPr>
-          <p:cNvPr id="3" name="prechodova_matice.png" descr="C:\Users\vittu\src\mamograf-data-exploration\docs\vzp_segmentace\prechodova_matice.png">    </p:cNvPr>
+          <p:cNvPr id="3" name="segmenty_rozptyl.png" descr="C:\Users\vittu\src\mamograf-vzp\docs\vzp_segmentace\segmenty_rozptyl.png">    </p:cNvPr>
           <p:cNvPicPr>
             <a:picLocks noChangeAspect="1"/>
           </p:cNvPicPr>
@@ -9836,7 +13250,7 @@
         <p:spPr>
           <a:xfrm>
             <a:off x="548640" y="1234440"/>
-            <a:ext cx="8778240" cy="5049510"/>
+            <a:ext cx="9114717" cy="3566160"/>
           </a:xfrm>
           <a:prstGeom prst="rect">
             <a:avLst/>
@@ -9845,18 +13259,18 @@
       </p:pic>
       <p:sp>
         <p:nvSpPr>
-          <p:cNvPr id="4" name="karta_jak_cist"/>
+          <p:cNvPr id="4" name="karta_siroky"/>
           <p:cNvSpPr/>
           <p:nvPr/>
         </p:nvSpPr>
         <p:spPr>
           <a:xfrm>
-            <a:off x="9646920" y="1234440"/>
-            <a:ext cx="1996135" cy="2743200"/>
+            <a:off x="548640" y="5029200"/>
+            <a:ext cx="5410048" cy="1325880"/>
           </a:xfrm>
           <a:prstGeom prst="roundRect">
             <a:avLst>
-              <a:gd name="adj" fmla="val 3665"/>
+              <a:gd name="adj" fmla="val 5517"/>
             </a:avLst>
           </a:prstGeom>
           <a:solidFill>
@@ -9867,14 +13281,14 @@
       </p:sp>
       <p:sp>
         <p:nvSpPr>
-          <p:cNvPr id="5" name="karta_jak_cist_text"/>
+          <p:cNvPr id="5" name="karta_siroky_text"/>
           <p:cNvSpPr txBox="1"/>
           <p:nvPr/>
         </p:nvSpPr>
         <p:spPr>
           <a:xfrm>
-            <a:off x="9829800" y="1371600"/>
-            <a:ext cx="1630375" cy="2468880"/>
+            <a:off x="731520" y="5166360"/>
+            <a:ext cx="5044288" cy="1051560"/>
           </a:xfrm>
           <a:prstGeom prst="rect">
             <a:avLst/>
@@ -9898,7 +13312,7 @@
                   <a:schemeClr val="accent1"/>
                 </a:solidFill>
               </a:rPr>
-              <a:t>Jak číst</a:t>
+              <a:t>Široký rozptyl</a:t>
             </a:r>
             <a:endParaRPr lang="en-US" sz="1600" dirty="0"/>
           </a:p>
@@ -9912,7 +13326,7 @@
                   <a:schemeClr val="tx1"/>
                 </a:solidFill>
               </a:rPr>
-              <a:t>Pozvánky 2020–2023. </a:t>
+              <a:t>První pozvánky, vypadlé a ženy u gynekologa. Tam má smysl </a:t>
             </a:r>
             <a:r>
               <a:rPr lang="en-US" sz="1400" b="1" dirty="0">
@@ -9920,7 +13334,7 @@
                   <a:schemeClr val="tx1"/>
                 </a:solidFill>
               </a:rPr>
-              <a:t>Řádek</a:t>
+              <a:t>cílit podle modelu</a:t>
             </a:r>
             <a:r>
               <a:rPr lang="en-US" sz="1400" dirty="0">
@@ -9928,7 +13342,82 @@
                   <a:schemeClr val="tx1"/>
                 </a:solidFill>
               </a:rPr>
-              <a:t> = segment, </a:t>
+              <a:t> (AUROC uvnitř 0,63–0,79).</a:t>
+            </a:r>
+            <a:endParaRPr lang="en-US" sz="1600" dirty="0"/>
+          </a:p>
+        </p:txBody>
+      </p:sp>
+      <p:sp>
+        <p:nvSpPr>
+          <p:cNvPr id="6" name="karta_uzky"/>
+          <p:cNvSpPr/>
+          <p:nvPr/>
+        </p:nvSpPr>
+        <p:spPr>
+          <a:xfrm>
+            <a:off x="6233008" y="5029200"/>
+            <a:ext cx="5410048" cy="1325880"/>
+          </a:xfrm>
+          <a:prstGeom prst="roundRect">
+            <a:avLst>
+              <a:gd name="adj" fmla="val 5517"/>
+            </a:avLst>
+          </a:prstGeom>
+          <a:solidFill>
+            <a:schemeClr val="bg2"/>
+          </a:solidFill>
+          <a:ln/>
+        </p:spPr>
+      </p:sp>
+      <p:sp>
+        <p:nvSpPr>
+          <p:cNvPr id="7" name="karta_uzky_text"/>
+          <p:cNvSpPr txBox="1"/>
+          <p:nvPr/>
+        </p:nvSpPr>
+        <p:spPr>
+          <a:xfrm>
+            <a:off x="6415888" y="5166360"/>
+            <a:ext cx="5044288" cy="1051560"/>
+          </a:xfrm>
+          <a:prstGeom prst="rect">
+            <a:avLst/>
+          </a:prstGeom>
+          <a:noFill/>
+          <a:ln/>
+        </p:spPr>
+        <p:txBody>
+          <a:bodyPr wrap="square" lIns="0" tIns="0" rIns="0" bIns="0" rtlCol="0" anchor="t"/>
+          <a:lstStyle/>
+          <a:p>
+            <a:pPr indent="0" marL="0">
+              <a:spcAft>
+                <a:spcPts val="600"/>
+              </a:spcAft>
+              <a:buNone/>
+            </a:pPr>
+            <a:r>
+              <a:rPr lang="en-US" sz="1600" b="1" dirty="0">
+                <a:solidFill>
+                  <a:schemeClr val="accent1"/>
+                </a:solidFill>
+              </a:rPr>
+              <a:t>Úzký a nízký rozptyl</a:t>
+            </a:r>
+            <a:endParaRPr lang="en-US" sz="1600" dirty="0"/>
+          </a:p>
+          <a:p>
+            <a:pPr indent="0" marL="0">
+              <a:buNone/>
+            </a:pPr>
+            <a:r>
+              <a:rPr lang="en-US" sz="1400" dirty="0">
+                <a:solidFill>
+                  <a:schemeClr val="tx1"/>
+                </a:solidFill>
+              </a:rPr>
+              <a:t>Nereagující, odpojené a ženy bez prevence. </a:t>
             </a:r>
             <a:r>
               <a:rPr lang="en-US" sz="1400" b="1" dirty="0">
@@ -9936,7 +13425,7 @@
                   <a:schemeClr val="tx1"/>
                 </a:solidFill>
               </a:rPr>
-              <a:t>sloupce</a:t>
+              <a:t>90 % z nich má predikci pod 15 %</a:t>
             </a:r>
             <a:r>
               <a:rPr lang="en-US" sz="1400" dirty="0">
@@ -9944,7 +13433,7 @@
                   <a:schemeClr val="tx1"/>
                 </a:solidFill>
               </a:rPr>
-              <a:t> = přišla / segment další pozvánky / bez další pozvánky.</a:t>
+              <a:t>, podskupina, která by chodila, v nich není.</a:t>
             </a:r>
             <a:endParaRPr lang="en-US" sz="1600" dirty="0"/>
           </a:p>
@@ -10052,7 +13541,7 @@
                   <a:schemeClr val="accent1"/>
                 </a:solidFill>
               </a:rPr>
-              <a:t>Přechody jako graf</a:t>
+              <a:t>Přechodová matice: co následuje po pozvánce</a:t>
             </a:r>
             <a:endParaRPr lang="en-US" sz="3000" dirty="0"/>
           </a:p>
@@ -10060,7 +13549,7 @@
       </p:sp>
       <p:pic>
         <p:nvPicPr>
-          <p:cNvPr id="3" name="graf_prechodu.png" descr="C:\Users\vittu\src\mamograf-data-exploration\docs\vzp_segmentace\graf_prechodu.png">    </p:cNvPr>
+          <p:cNvPr id="3" name="prechodova_matice.png" descr="C:\Users\vittu\src\mamograf-vzp\docs\vzp_segmentace\prechodova_matice.png">    </p:cNvPr>
           <p:cNvPicPr>
             <a:picLocks noChangeAspect="1"/>
           </p:cNvPicPr>
@@ -10075,7 +13564,7 @@
         <p:spPr>
           <a:xfrm>
             <a:off x="548640" y="1234440"/>
-            <a:ext cx="7680960" cy="5158230"/>
+            <a:ext cx="8778240" cy="5049510"/>
           </a:xfrm>
           <a:prstGeom prst="rect">
             <a:avLst/>
@@ -10084,18 +13573,18 @@
       </p:pic>
       <p:sp>
         <p:nvSpPr>
-          <p:cNvPr id="4" name="karta_horni"/>
+          <p:cNvPr id="4" name="karta_jak_cist"/>
           <p:cNvSpPr/>
           <p:nvPr/>
         </p:nvSpPr>
         <p:spPr>
           <a:xfrm>
-            <a:off x="8549640" y="1234440"/>
-            <a:ext cx="3093415" cy="1554480"/>
+            <a:off x="9646920" y="1234440"/>
+            <a:ext cx="1996135" cy="2743200"/>
           </a:xfrm>
           <a:prstGeom prst="roundRect">
             <a:avLst>
-              <a:gd name="adj" fmla="val 4706"/>
+              <a:gd name="adj" fmla="val 3665"/>
             </a:avLst>
           </a:prstGeom>
           <a:solidFill>
@@ -10106,14 +13595,14 @@
       </p:sp>
       <p:sp>
         <p:nvSpPr>
-          <p:cNvPr id="5" name="karta_horni_text"/>
+          <p:cNvPr id="5" name="karta_jak_cist_text"/>
           <p:cNvSpPr txBox="1"/>
           <p:nvPr/>
         </p:nvSpPr>
         <p:spPr>
           <a:xfrm>
-            <a:off x="8732520" y="1371600"/>
-            <a:ext cx="2727655" cy="1280160"/>
+            <a:off x="9829800" y="1371600"/>
+            <a:ext cx="1630375" cy="2468880"/>
           </a:xfrm>
           <a:prstGeom prst="rect">
             <a:avLst/>
@@ -10137,7 +13626,7 @@
                   <a:schemeClr val="accent1"/>
                 </a:solidFill>
               </a:rPr>
-              <a:t>Horní patro</a:t>
+              <a:t>Jak číst</a:t>
             </a:r>
             <a:endParaRPr lang="en-US" sz="1600" dirty="0"/>
           </a:p>
@@ -10151,7 +13640,7 @@
                   <a:schemeClr val="tx1"/>
                 </a:solidFill>
               </a:rPr>
-              <a:t>1. pozvánka, vypadlé: </a:t>
+              <a:t>Pozvánky 2020–2023. </a:t>
             </a:r>
             <a:r>
               <a:rPr lang="en-US" sz="1400" b="1" dirty="0">
@@ -10159,7 +13648,7 @@
                   <a:schemeClr val="tx1"/>
                 </a:solidFill>
               </a:rPr>
-              <a:t>přijde 25–57 %</a:t>
+              <a:t>Řádek</a:t>
             </a:r>
             <a:r>
               <a:rPr lang="en-US" sz="1400" dirty="0">
@@ -10167,189 +13656,23 @@
                   <a:schemeClr val="tx1"/>
                 </a:solidFill>
               </a:rPr>
-              <a:t>.</a:t>
-            </a:r>
-            <a:endParaRPr lang="en-US" sz="1600" dirty="0"/>
-          </a:p>
-        </p:txBody>
-      </p:sp>
-      <p:sp>
-        <p:nvSpPr>
-          <p:cNvPr id="6" name="karta_stredni"/>
-          <p:cNvSpPr/>
-          <p:nvPr/>
-        </p:nvSpPr>
-        <p:spPr>
-          <a:xfrm>
-            <a:off x="8549640" y="3017520"/>
-            <a:ext cx="3093415" cy="1554480"/>
-          </a:xfrm>
-          <a:prstGeom prst="roundRect">
-            <a:avLst>
-              <a:gd name="adj" fmla="val 4706"/>
-            </a:avLst>
-          </a:prstGeom>
-          <a:solidFill>
-            <a:schemeClr val="bg2"/>
-          </a:solidFill>
-          <a:ln/>
-        </p:spPr>
-      </p:sp>
-      <p:sp>
-        <p:nvSpPr>
-          <p:cNvPr id="7" name="karta_stredni_text"/>
-          <p:cNvSpPr txBox="1"/>
-          <p:nvPr/>
-        </p:nvSpPr>
-        <p:spPr>
-          <a:xfrm>
-            <a:off x="8732520" y="3154680"/>
-            <a:ext cx="2727655" cy="1280160"/>
-          </a:xfrm>
-          <a:prstGeom prst="rect">
-            <a:avLst/>
-          </a:prstGeom>
-          <a:noFill/>
-          <a:ln/>
-        </p:spPr>
-        <p:txBody>
-          <a:bodyPr wrap="square" lIns="0" tIns="0" rIns="0" bIns="0" rtlCol="0" anchor="t"/>
-          <a:lstStyle/>
-          <a:p>
-            <a:pPr indent="0" marL="0">
-              <a:spcAft>
-                <a:spcPts val="600"/>
-              </a:spcAft>
-              <a:buNone/>
-            </a:pPr>
-            <a:r>
-              <a:rPr lang="en-US" sz="1600" b="1" dirty="0">
-                <a:solidFill>
-                  <a:schemeClr val="accent1"/>
+              <a:t> = segment, </a:t>
+            </a:r>
+            <a:r>
+              <a:rPr lang="en-US" sz="1400" b="1" dirty="0">
+                <a:solidFill>
+                  <a:schemeClr val="tx1"/>
                 </a:solidFill>
               </a:rPr>
-              <a:t>Střední patro</a:t>
-            </a:r>
-            <a:endParaRPr lang="en-US" sz="1600" dirty="0"/>
-          </a:p>
-          <a:p>
-            <a:pPr indent="0" marL="0">
-              <a:buNone/>
-            </a:pPr>
+              <a:t>sloupce</a:t>
+            </a:r>
             <a:r>
               <a:rPr lang="en-US" sz="1400" dirty="0">
                 <a:solidFill>
                   <a:schemeClr val="tx1"/>
                 </a:solidFill>
               </a:rPr>
-              <a:t>„Zvaná málokrát“: polovina zůstává, </a:t>
-            </a:r>
-            <a:r>
-              <a:rPr lang="en-US" sz="1400" b="1" dirty="0">
-                <a:solidFill>
-                  <a:schemeClr val="tx1"/>
-                </a:solidFill>
-              </a:rPr>
-              <a:t>12–26 % přijde</a:t>
-            </a:r>
-            <a:r>
-              <a:rPr lang="en-US" sz="1400" dirty="0">
-                <a:solidFill>
-                  <a:schemeClr val="tx1"/>
-                </a:solidFill>
-              </a:rPr>
-              <a:t>.</a:t>
-            </a:r>
-            <a:endParaRPr lang="en-US" sz="1600" dirty="0"/>
-          </a:p>
-        </p:txBody>
-      </p:sp>
-      <p:sp>
-        <p:nvSpPr>
-          <p:cNvPr id="8" name="karta_dolni"/>
-          <p:cNvSpPr/>
-          <p:nvPr/>
-        </p:nvSpPr>
-        <p:spPr>
-          <a:xfrm>
-            <a:off x="8549640" y="4800600"/>
-            <a:ext cx="3093415" cy="1554480"/>
-          </a:xfrm>
-          <a:prstGeom prst="roundRect">
-            <a:avLst>
-              <a:gd name="adj" fmla="val 4706"/>
-            </a:avLst>
-          </a:prstGeom>
-          <a:solidFill>
-            <a:schemeClr val="bg2"/>
-          </a:solidFill>
-          <a:ln/>
-        </p:spPr>
-      </p:sp>
-      <p:sp>
-        <p:nvSpPr>
-          <p:cNvPr id="9" name="karta_dolni_text"/>
-          <p:cNvSpPr txBox="1"/>
-          <p:nvPr/>
-        </p:nvSpPr>
-        <p:spPr>
-          <a:xfrm>
-            <a:off x="8732520" y="4937760"/>
-            <a:ext cx="2727655" cy="1280160"/>
-          </a:xfrm>
-          <a:prstGeom prst="rect">
-            <a:avLst/>
-          </a:prstGeom>
-          <a:noFill/>
-          <a:ln/>
-        </p:spPr>
-        <p:txBody>
-          <a:bodyPr wrap="square" lIns="0" tIns="0" rIns="0" bIns="0" rtlCol="0" anchor="t"/>
-          <a:lstStyle/>
-          <a:p>
-            <a:pPr indent="0" marL="0">
-              <a:spcAft>
-                <a:spcPts val="600"/>
-              </a:spcAft>
-              <a:buNone/>
-            </a:pPr>
-            <a:r>
-              <a:rPr lang="en-US" sz="1600" b="1" dirty="0">
-                <a:solidFill>
-                  <a:schemeClr val="accent1"/>
-                </a:solidFill>
-              </a:rPr>
-              <a:t>Dolní patro</a:t>
-            </a:r>
-            <a:endParaRPr lang="en-US" sz="1600" dirty="0"/>
-          </a:p>
-          <a:p>
-            <a:pPr indent="0" marL="0">
-              <a:buNone/>
-            </a:pPr>
-            <a:r>
-              <a:rPr lang="en-US" sz="1400" dirty="0">
-                <a:solidFill>
-                  <a:schemeClr val="tx1"/>
-                </a:solidFill>
-              </a:rPr>
-              <a:t>Nereagující, odpojené, bez prevence: uzavřený okruh, zůstává 49–74 %, </a:t>
-            </a:r>
-            <a:r>
-              <a:rPr lang="en-US" sz="1400" b="1" dirty="0">
-                <a:solidFill>
-                  <a:schemeClr val="tx1"/>
-                </a:solidFill>
-              </a:rPr>
-              <a:t>přijde 3–9 %</a:t>
-            </a:r>
-            <a:r>
-              <a:rPr lang="en-US" sz="1400" dirty="0">
-                <a:solidFill>
-                  <a:schemeClr val="tx1"/>
-                </a:solidFill>
-              </a:rPr>
-              <a:t>.</a:t>
+              <a:t> = přišla / segment další pozvánky / bez další pozvánky.</a:t>
             </a:r>
             <a:endParaRPr lang="en-US" sz="1600" dirty="0"/>
           </a:p>
@@ -10457,7 +13780,7 @@
                   <a:schemeClr val="accent1"/>
                 </a:solidFill>
               </a:rPr>
-              <a:t>Hlavní tok: pět největších segmentů</a:t>
+              <a:t>Přechody jako graf</a:t>
             </a:r>
             <a:endParaRPr lang="en-US" sz="3000" dirty="0"/>
           </a:p>
@@ -10465,7 +13788,7 @@
       </p:sp>
       <p:pic>
         <p:nvPicPr>
-          <p:cNvPr id="3" name="graf_prechodu_top5.png" descr="C:\Users\vittu\src\mamograf-data-exploration\docs\vzp_segmentace\graf_prechodu_top5.png">    </p:cNvPr>
+          <p:cNvPr id="3" name="graf_prechodu.png" descr="C:\Users\vittu\src\mamograf-vzp\docs\vzp_segmentace\graf_prechodu.png">    </p:cNvPr>
           <p:cNvPicPr>
             <a:picLocks noChangeAspect="1"/>
           </p:cNvPicPr>
@@ -10480,7 +13803,7 @@
         <p:spPr>
           <a:xfrm>
             <a:off x="548640" y="1234440"/>
-            <a:ext cx="7677642" cy="5166360"/>
+            <a:ext cx="7680960" cy="5158230"/>
           </a:xfrm>
           <a:prstGeom prst="rect">
             <a:avLst/>
@@ -10489,18 +13812,18 @@
       </p:pic>
       <p:sp>
         <p:nvSpPr>
-          <p:cNvPr id="4" name="karta_tok"/>
+          <p:cNvPr id="4" name="karta_horni"/>
           <p:cNvSpPr/>
           <p:nvPr/>
         </p:nvSpPr>
         <p:spPr>
           <a:xfrm>
-            <a:off x="8546322" y="1234440"/>
-            <a:ext cx="3096733" cy="2377440"/>
+            <a:off x="8549640" y="1234440"/>
+            <a:ext cx="3093415" cy="1554480"/>
           </a:xfrm>
           <a:prstGeom prst="roundRect">
             <a:avLst>
-              <a:gd name="adj" fmla="val 3077"/>
+              <a:gd name="adj" fmla="val 4706"/>
             </a:avLst>
           </a:prstGeom>
           <a:solidFill>
@@ -10511,14 +13834,14 @@
       </p:sp>
       <p:sp>
         <p:nvSpPr>
-          <p:cNvPr id="5" name="karta_tok_text"/>
+          <p:cNvPr id="5" name="karta_horni_text"/>
           <p:cNvSpPr txBox="1"/>
           <p:nvPr/>
         </p:nvSpPr>
         <p:spPr>
           <a:xfrm>
-            <a:off x="8729202" y="1417320"/>
-            <a:ext cx="2730973" cy="2011680"/>
+            <a:off x="8732520" y="1371600"/>
+            <a:ext cx="2727655" cy="1280160"/>
           </a:xfrm>
           <a:prstGeom prst="rect">
             <a:avLst/>
@@ -10531,55 +13854,48 @@
           <a:lstStyle/>
           <a:p>
             <a:pPr indent="0" marL="0">
+              <a:spcAft>
+                <a:spcPts val="600"/>
+              </a:spcAft>
               <a:buNone/>
             </a:pPr>
             <a:r>
               <a:rPr lang="en-US" sz="1600" b="1" dirty="0">
                 <a:solidFill>
+                  <a:schemeClr val="accent1"/>
+                </a:solidFill>
+              </a:rPr>
+              <a:t>Horní patro</a:t>
+            </a:r>
+            <a:endParaRPr lang="en-US" sz="1600" dirty="0"/>
+          </a:p>
+          <a:p>
+            <a:pPr indent="0" marL="0">
+              <a:buNone/>
+            </a:pPr>
+            <a:r>
+              <a:rPr lang="en-US" sz="1400" dirty="0">
+                <a:solidFill>
                   <a:schemeClr val="tx1"/>
                 </a:solidFill>
               </a:rPr>
-              <a:t>1. pozvánka</a:t>
-            </a:r>
-            <a:r>
-              <a:rPr lang="en-US" sz="1600" dirty="0">
+              <a:t>1. pozvánka, vypadlé: </a:t>
+            </a:r>
+            <a:r>
+              <a:rPr lang="en-US" sz="1400" b="1" dirty="0">
                 <a:solidFill>
                   <a:schemeClr val="tx1"/>
                 </a:solidFill>
               </a:rPr>
-              <a:t> (57 % přijde) → </a:t>
-            </a:r>
-            <a:r>
-              <a:rPr lang="en-US" sz="1600" b="1" dirty="0">
+              <a:t>přijde 25–57 %</a:t>
+            </a:r>
+            <a:r>
+              <a:rPr lang="en-US" sz="1400" dirty="0">
                 <a:solidFill>
                   <a:schemeClr val="tx1"/>
                 </a:solidFill>
               </a:rPr>
-              <a:t>gynekolog / jiná prevence, zvaná málokrát</a:t>
-            </a:r>
-            <a:r>
-              <a:rPr lang="en-US" sz="1600" dirty="0">
-                <a:solidFill>
-                  <a:schemeClr val="tx1"/>
-                </a:solidFill>
-              </a:rPr>
-              <a:t> (26 % / 12 %) → </a:t>
-            </a:r>
-            <a:r>
-              <a:rPr lang="en-US" sz="1600" b="1" dirty="0">
-                <a:solidFill>
-                  <a:schemeClr val="tx1"/>
-                </a:solidFill>
-              </a:rPr>
-              <a:t>jiná prevence, nereaguje</a:t>
-            </a:r>
-            <a:r>
-              <a:rPr lang="en-US" sz="1600" dirty="0">
-                <a:solidFill>
-                  <a:schemeClr val="tx1"/>
-                </a:solidFill>
-              </a:rPr>
-              <a:t> (4 %, 74 % zůstává).</a:t>
+              <a:t>.</a:t>
             </a:r>
             <a:endParaRPr lang="en-US" sz="1600" dirty="0"/>
           </a:p>
@@ -10587,14 +13903,36 @@
       </p:sp>
       <p:sp>
         <p:nvSpPr>
-          <p:cNvPr id="6" name="pointa"/>
+          <p:cNvPr id="6" name="karta_stredni"/>
+          <p:cNvSpPr/>
+          <p:nvPr/>
+        </p:nvSpPr>
+        <p:spPr>
+          <a:xfrm>
+            <a:off x="8549640" y="3017520"/>
+            <a:ext cx="3093415" cy="1554480"/>
+          </a:xfrm>
+          <a:prstGeom prst="roundRect">
+            <a:avLst>
+              <a:gd name="adj" fmla="val 4706"/>
+            </a:avLst>
+          </a:prstGeom>
+          <a:solidFill>
+            <a:schemeClr val="bg2"/>
+          </a:solidFill>
+          <a:ln/>
+        </p:spPr>
+      </p:sp>
+      <p:sp>
+        <p:nvSpPr>
+          <p:cNvPr id="7" name="karta_stredni_text"/>
           <p:cNvSpPr txBox="1"/>
           <p:nvPr/>
         </p:nvSpPr>
         <p:spPr>
           <a:xfrm>
-            <a:off x="8546322" y="3886200"/>
-            <a:ext cx="3096733" cy="1188720"/>
+            <a:off x="8732520" y="3154680"/>
+            <a:ext cx="2727655" cy="1280160"/>
           </a:xfrm>
           <a:prstGeom prst="rect">
             <a:avLst/>
@@ -10603,19 +13941,143 @@
           <a:ln/>
         </p:spPr>
         <p:txBody>
-          <a:bodyPr wrap="square" lIns="0" tIns="0" rIns="0" bIns="0" rtlCol="0" anchor="ctr"/>
+          <a:bodyPr wrap="square" lIns="0" tIns="0" rIns="0" bIns="0" rtlCol="0" anchor="t"/>
           <a:lstStyle/>
+          <a:p>
+            <a:pPr indent="0" marL="0">
+              <a:spcAft>
+                <a:spcPts val="600"/>
+              </a:spcAft>
+              <a:buNone/>
+            </a:pPr>
+            <a:r>
+              <a:rPr lang="en-US" sz="1600" b="1" dirty="0">
+                <a:solidFill>
+                  <a:schemeClr val="accent1"/>
+                </a:solidFill>
+              </a:rPr>
+              <a:t>Střední patro</a:t>
+            </a:r>
+            <a:endParaRPr lang="en-US" sz="1600" dirty="0"/>
+          </a:p>
           <a:p>
             <a:pPr indent="0" marL="0">
               <a:buNone/>
             </a:pPr>
             <a:r>
-              <a:rPr lang="en-US" sz="1600" i="1" dirty="0">
-                <a:solidFill>
-                  <a:schemeClr val="accent2"/>
+              <a:rPr lang="en-US" sz="1400" dirty="0">
+                <a:solidFill>
+                  <a:schemeClr val="tx1"/>
                 </a:solidFill>
               </a:rPr>
-              <a:t>Zpětná hrana z „nereaguje“ chybí: co se nezíská brzy, už se skoro nezíská.</a:t>
+              <a:t>„Zvaná málokrát“: polovina zůstává, </a:t>
+            </a:r>
+            <a:r>
+              <a:rPr lang="en-US" sz="1400" b="1" dirty="0">
+                <a:solidFill>
+                  <a:schemeClr val="tx1"/>
+                </a:solidFill>
+              </a:rPr>
+              <a:t>12–26 % přijde</a:t>
+            </a:r>
+            <a:r>
+              <a:rPr lang="en-US" sz="1400" dirty="0">
+                <a:solidFill>
+                  <a:schemeClr val="tx1"/>
+                </a:solidFill>
+              </a:rPr>
+              <a:t>.</a:t>
+            </a:r>
+            <a:endParaRPr lang="en-US" sz="1600" dirty="0"/>
+          </a:p>
+        </p:txBody>
+      </p:sp>
+      <p:sp>
+        <p:nvSpPr>
+          <p:cNvPr id="8" name="karta_dolni"/>
+          <p:cNvSpPr/>
+          <p:nvPr/>
+        </p:nvSpPr>
+        <p:spPr>
+          <a:xfrm>
+            <a:off x="8549640" y="4800600"/>
+            <a:ext cx="3093415" cy="1554480"/>
+          </a:xfrm>
+          <a:prstGeom prst="roundRect">
+            <a:avLst>
+              <a:gd name="adj" fmla="val 4706"/>
+            </a:avLst>
+          </a:prstGeom>
+          <a:solidFill>
+            <a:schemeClr val="bg2"/>
+          </a:solidFill>
+          <a:ln/>
+        </p:spPr>
+      </p:sp>
+      <p:sp>
+        <p:nvSpPr>
+          <p:cNvPr id="9" name="karta_dolni_text"/>
+          <p:cNvSpPr txBox="1"/>
+          <p:nvPr/>
+        </p:nvSpPr>
+        <p:spPr>
+          <a:xfrm>
+            <a:off x="8732520" y="4937760"/>
+            <a:ext cx="2727655" cy="1280160"/>
+          </a:xfrm>
+          <a:prstGeom prst="rect">
+            <a:avLst/>
+          </a:prstGeom>
+          <a:noFill/>
+          <a:ln/>
+        </p:spPr>
+        <p:txBody>
+          <a:bodyPr wrap="square" lIns="0" tIns="0" rIns="0" bIns="0" rtlCol="0" anchor="t"/>
+          <a:lstStyle/>
+          <a:p>
+            <a:pPr indent="0" marL="0">
+              <a:spcAft>
+                <a:spcPts val="600"/>
+              </a:spcAft>
+              <a:buNone/>
+            </a:pPr>
+            <a:r>
+              <a:rPr lang="en-US" sz="1600" b="1" dirty="0">
+                <a:solidFill>
+                  <a:schemeClr val="accent1"/>
+                </a:solidFill>
+              </a:rPr>
+              <a:t>Dolní patro</a:t>
+            </a:r>
+            <a:endParaRPr lang="en-US" sz="1600" dirty="0"/>
+          </a:p>
+          <a:p>
+            <a:pPr indent="0" marL="0">
+              <a:buNone/>
+            </a:pPr>
+            <a:r>
+              <a:rPr lang="en-US" sz="1400" dirty="0">
+                <a:solidFill>
+                  <a:schemeClr val="tx1"/>
+                </a:solidFill>
+              </a:rPr>
+              <a:t>Nereagující, odpojené, bez prevence: uzavřený okruh, zůstává 49–74 %, </a:t>
+            </a:r>
+            <a:r>
+              <a:rPr lang="en-US" sz="1400" b="1" dirty="0">
+                <a:solidFill>
+                  <a:schemeClr val="tx1"/>
+                </a:solidFill>
+              </a:rPr>
+              <a:t>přijde 3–9 %</a:t>
+            </a:r>
+            <a:r>
+              <a:rPr lang="en-US" sz="1400" dirty="0">
+                <a:solidFill>
+                  <a:schemeClr val="tx1"/>
+                </a:solidFill>
+              </a:rPr>
+              <a:t>.</a:t>
             </a:r>
             <a:endParaRPr lang="en-US" sz="1600" dirty="0"/>
           </a:p>

--- a/docs/vzp_segmentace/slides.pptx
+++ b/docs/vzp_segmentace/slides.pptx
@@ -122,46 +122,46 @@
   <p:extLst>
     <p:ext uri="{521415D9-36F7-43E2-AB2F-B90AF26B5E84}">
       <p14:sectionLst xmlns:p14="http://schemas.microsoft.com/office/powerpoint/2010/main">
-        <p14:section name="Úvod" id="{e8aeb38b-11c5-632c-835b-0b9006c806b2}">
+        <p14:section name="Úvod" id="{4e7fe594-8fe0-f1ae-919e-b54289a9b8ba}">
           <p14:sldIdLst>
             <p14:sldId id="256"/>
             <p14:sldId id="257"/>
           </p14:sldIdLst>
         </p14:section>
-        <p14:section name="Segmentační model" id="{0d9ea92d-cb5a-623b-6257-349f85356049}">
+        <p14:section name="Segmentační model" id="{6db8f365-81d3-9988-b9d3-bb9b74bda135}">
           <p14:sldIdLst>
             <p14:sldId id="258"/>
             <p14:sldId id="259"/>
             <p14:sldId id="260"/>
           </p14:sldIdLst>
         </p14:section>
-        <p14:section name="Kde jsou nepřišlé ženy" id="{93d69d11-9973-3019-94d2-56f26d8bd6d9}">
+        <p14:section name="Kde jsou nepřišlé ženy" id="{a8009501-2031-0830-e8ef-f072987a75e5}">
           <p14:sldIdLst>
             <p14:sldId id="261"/>
             <p14:sldId id="262"/>
           </p14:sldIdLst>
         </p14:section>
-        <p14:section name="Přechody mezi segmenty" id="{2508e8a8-9804-ecd2-caf6-3ac23c2c913a}">
+        <p14:section name="Přechody mezi segmenty" id="{ef13d78f-4125-baf1-23ed-cbf2afaffa9d}">
           <p14:sldIdLst>
             <p14:sldId id="263"/>
             <p14:sldId id="264"/>
             <p14:sldId id="265"/>
           </p14:sldIdLst>
         </p14:section>
-        <p14:section name="Zjištění" id="{a0be8e5a-5393-b7a9-10c4-a6bfd7c22c39}">
+        <p14:section name="Zjištění" id="{bfb1eebc-fce7-2dce-c1ee-f3bbe321a7d4}">
           <p14:sldIdLst>
             <p14:sldId id="266"/>
             <p14:sldId id="267"/>
           </p14:sldIdLst>
         </p14:section>
-        <p14:section name="Experimenty" id="{8c9da344-e791-8c1e-2868-0715419794ef}">
+        <p14:section name="Experimenty" id="{d7561783-dcad-52cc-513d-2f24a0c2aa8d}">
           <p14:sldIdLst>
             <p14:sldId id="268"/>
             <p14:sldId id="269"/>
             <p14:sldId id="270"/>
           </p14:sldIdLst>
         </p14:section>
-        <p14:section name="Omezení" id="{72190a5b-de85-25e2-0748-27021c7d180d}">
+        <p14:section name="Omezení" id="{7ce15ee8-d1e8-00e7-8881-9ad7274e179a}">
           <p14:sldIdLst>
             <p14:sldId id="271"/>
           </p14:sldIdLst>
